--- a/Body/5-Office/项目报告.pptx
+++ b/Body/5-Office/项目报告.pptx
@@ -4,31 +4,30 @@
   <p:sldMasterIdLst>
     <p:sldMasterId id="2147483648" r:id="rId1"/>
   </p:sldMasterIdLst>
+  <p:notesMasterIdLst>
+    <p:notesMasterId r:id="rId22"/>
+  </p:notesMasterIdLst>
   <p:sldIdLst>
     <p:sldId id="256" r:id="rId2"/>
     <p:sldId id="258" r:id="rId3"/>
     <p:sldId id="259" r:id="rId4"/>
     <p:sldId id="260" r:id="rId5"/>
-    <p:sldId id="261" r:id="rId6"/>
+    <p:sldId id="282" r:id="rId6"/>
     <p:sldId id="262" r:id="rId7"/>
     <p:sldId id="273" r:id="rId8"/>
-    <p:sldId id="263" r:id="rId9"/>
-    <p:sldId id="264" r:id="rId10"/>
-    <p:sldId id="265" r:id="rId11"/>
-    <p:sldId id="266" r:id="rId12"/>
-    <p:sldId id="267" r:id="rId13"/>
+    <p:sldId id="283" r:id="rId9"/>
+    <p:sldId id="263" r:id="rId10"/>
+    <p:sldId id="264" r:id="rId11"/>
+    <p:sldId id="265" r:id="rId12"/>
+    <p:sldId id="266" r:id="rId13"/>
     <p:sldId id="268" r:id="rId14"/>
     <p:sldId id="269" r:id="rId15"/>
-    <p:sldId id="270" r:id="rId16"/>
-    <p:sldId id="271" r:id="rId17"/>
-    <p:sldId id="272" r:id="rId18"/>
-    <p:sldId id="274" r:id="rId19"/>
-    <p:sldId id="275" r:id="rId20"/>
-    <p:sldId id="276" r:id="rId21"/>
-    <p:sldId id="277" r:id="rId22"/>
-    <p:sldId id="278" r:id="rId23"/>
-    <p:sldId id="279" r:id="rId24"/>
-    <p:sldId id="280" r:id="rId25"/>
+    <p:sldId id="267" r:id="rId16"/>
+    <p:sldId id="270" r:id="rId17"/>
+    <p:sldId id="274" r:id="rId18"/>
+    <p:sldId id="275" r:id="rId19"/>
+    <p:sldId id="279" r:id="rId20"/>
+    <p:sldId id="280" r:id="rId21"/>
   </p:sldIdLst>
   <p:sldSz cx="12192000" cy="6858000"/>
   <p:notesSz cx="6858000" cy="9144000"/>
@@ -135,6 +134,607 @@
 </p:presentation>
 </file>
 
+<file path=ppt/ink/ink1.xml><?xml version="1.0" encoding="utf-8"?>
+<inkml:ink xmlns:inkml="http://www.w3.org/2003/InkML">
+  <inkml:definitions>
+    <inkml:context xml:id="ctx0">
+      <inkml:inkSource xml:id="inkSrc0">
+        <inkml:traceFormat>
+          <inkml:channel name="X" type="integer" min="-2.14748E9" max="2.14748E9" units="cm"/>
+          <inkml:channel name="Y" type="integer" min="-2.14748E9" max="2.14748E9" units="cm"/>
+          <inkml:channel name="F" type="integer" max="32767" units="dev"/>
+        </inkml:traceFormat>
+        <inkml:channelProperties>
+          <inkml:channelProperty channel="X" name="resolution" value="1000" units="1/cm"/>
+          <inkml:channelProperty channel="Y" name="resolution" value="1000" units="1/cm"/>
+          <inkml:channelProperty channel="F" name="resolution" value="0" units="1/dev"/>
+        </inkml:channelProperties>
+      </inkml:inkSource>
+      <inkml:timestamp xml:id="ts0" timeString="2025-11-24T09:43:09.896"/>
+    </inkml:context>
+    <inkml:brush xml:id="br0">
+      <inkml:brushProperty name="width" value="0.035" units="cm"/>
+      <inkml:brushProperty name="height" value="0.035" units="cm"/>
+      <inkml:brushProperty name="color" value="#E71224"/>
+    </inkml:brush>
+  </inkml:definitions>
+  <inkml:trace contextRef="#ctx0" brushRef="#br0">534 37 24575,'0'-1'0,"-1"0"0,1 0 0,-1 1 0,0-1 0,1 0 0,-1 0 0,1 1 0,-1-1 0,0 0 0,0 1 0,1-1 0,-1 1 0,0-1 0,0 1 0,0-1 0,0 1 0,0 0 0,1-1 0,-1 1 0,0 0 0,0 0 0,0 0 0,0 0 0,-2 0 0,-28-4 0,28 4 0,-29 1 0,0 1 0,1 1 0,0 2 0,0 2 0,0 0 0,0 2 0,1 1 0,-43 22 0,63-28 0,1 0 0,-1 1 0,1 0 0,1 0 0,-1 1 0,1 0 0,0 0 0,0 1 0,1 0 0,-1 1 0,2-1 0,-1 1 0,1 1 0,0-1 0,1 1 0,0 0 0,1 0 0,-1 1 0,2-1 0,-1 1 0,2 0 0,-1 0 0,1 0 0,1 0 0,-1 0 0,2 20 0,-1-5 0,0 6 0,1-1 0,2 1 0,1 0 0,7 33 0,-8-56 0,0 0 0,1 0 0,-1-1 0,2 1 0,-1-1 0,1 0 0,0 0 0,1 0 0,-1 0 0,1-1 0,1 0 0,-1 0 0,1 0 0,0-1 0,1 1 0,-1-1 0,1-1 0,0 0 0,0 0 0,12 5 0,100 28 0,-24-9 0,-46-14 0,1-2 0,61 7 0,-51-10 0,65 19 0,-90-19 0,0-1 0,0-1 0,58 2 0,-71-8 0,-1-1 0,1-1 0,-1-1 0,1-1 0,-1-1 0,0-1 0,27-9 0,-45 12 0,0 0 0,0 0 0,0 0 0,0 0 0,-1-1 0,1 1 0,0-1 0,-1 1 0,0-1 0,0 0 0,0 0 0,0 0 0,0-1 0,0 1 0,-1 0 0,0-1 0,1 1 0,-1-1 0,0 1 0,-1-1 0,1 1 0,-1-1 0,0 0 0,0 1 0,0-1 0,-1-6 0,0-3 0,0 0 0,-1 1 0,0-1 0,-2 1 0,1-1 0,-9-18 0,-27-40 0,-3 2 0,-2 2 0,-74-85 0,78 101 0,14 18-120,-59-70 373,75 92-467,0 1 0,-1 1 0,-1-1 0,1 2 0,-1 0 0,-24-12 0,12 10-6612</inkml:trace>
+</inkml:ink>
+</file>
+
+<file path=ppt/ink/ink2.xml><?xml version="1.0" encoding="utf-8"?>
+<inkml:ink xmlns:inkml="http://www.w3.org/2003/InkML">
+  <inkml:definitions>
+    <inkml:context xml:id="ctx0">
+      <inkml:inkSource xml:id="inkSrc0">
+        <inkml:traceFormat>
+          <inkml:channel name="X" type="integer" min="-2.14748E9" max="2.14748E9" units="cm"/>
+          <inkml:channel name="Y" type="integer" min="-2.14748E9" max="2.14748E9" units="cm"/>
+          <inkml:channel name="F" type="integer" max="32767" units="dev"/>
+        </inkml:traceFormat>
+        <inkml:channelProperties>
+          <inkml:channelProperty channel="X" name="resolution" value="1000" units="1/cm"/>
+          <inkml:channelProperty channel="Y" name="resolution" value="1000" units="1/cm"/>
+          <inkml:channelProperty channel="F" name="resolution" value="0" units="1/dev"/>
+        </inkml:channelProperties>
+      </inkml:inkSource>
+      <inkml:timestamp xml:id="ts0" timeString="2025-11-24T09:43:09.897"/>
+    </inkml:context>
+    <inkml:brush xml:id="br0">
+      <inkml:brushProperty name="width" value="0.035" units="cm"/>
+      <inkml:brushProperty name="height" value="0.035" units="cm"/>
+      <inkml:brushProperty name="color" value="#E71224"/>
+    </inkml:brush>
+  </inkml:definitions>
+  <inkml:trace contextRef="#ctx0" brushRef="#br0">1004 113 24575,'-78'4'0,"0"4"0,-124 27 0,73-10 0,77-16 0,-48 8 0,-139 41 0,232-56 0,1 0 0,0 1 0,0-1 0,0 1 0,0 0 0,0 0 0,1 1 0,-1 0 0,1 0 0,0 0 0,-9 10 0,11-8 0,0-1 0,0 1 0,1-1 0,-1 1 0,1 0 0,0 0 0,1-1 0,-1 2 0,1-1 0,1 0 0,-1 0 0,1 11 0,-12 220 0,-1 52 0,14-239 0,2-1 0,3 0 0,20 88 0,-19-118 0,0 1 0,2-1 0,0-1 0,1 1 0,1-2 0,1 1 0,1-2 0,0 1 0,1-2 0,17 16 0,-21-23 0,-1 0 0,2 0 0,-1-1 0,1-1 0,0 1 0,0-2 0,1 0 0,15 5 0,102 23 0,-112-29 0,473 59 0,-421-57 0,98 9 0,224-10 0,-386-5 0,0 0 0,0 0 0,0-1 0,0 0 0,0 0 0,0 0 0,-1-1 0,1 1 0,0-1 0,-1 0 0,1 0 0,-1-1 0,0 1 0,0-1 0,6-5 0,-5 2 0,-1 0 0,0 0 0,0 0 0,-1 0 0,0-1 0,0 0 0,0 1 0,-1-1 0,3-13 0,6-30 0,-2-1 0,-2 0 0,0-59 0,-12-157 0,2 229 0,-1 1 0,-1 0 0,-3 0 0,0 0 0,-3 1 0,-1 0 0,-1 1 0,-3 1 0,0 0 0,-2 1 0,-34-47 0,-33-34 0,27 33 0,-4 3 0,-97-97 0,152 169 11,1 1 0,-1-1 0,0 1 0,-1 0 0,1 1 0,-1 0-1,0 0 1,0 0 0,0 1 0,-9-2 0,4 3-259,0 0 1,0 1-1,0 0 1,0 1-1,-25 3 1,22-1-6579</inkml:trace>
+</inkml:ink>
+</file>
+
+<file path=ppt/ink/ink3.xml><?xml version="1.0" encoding="utf-8"?>
+<inkml:ink xmlns:inkml="http://www.w3.org/2003/InkML">
+  <inkml:definitions>
+    <inkml:context xml:id="ctx0">
+      <inkml:inkSource xml:id="inkSrc0">
+        <inkml:traceFormat>
+          <inkml:channel name="X" type="integer" min="-2.14748E9" max="2.14748E9" units="cm"/>
+          <inkml:channel name="Y" type="integer" min="-2.14748E9" max="2.14748E9" units="cm"/>
+          <inkml:channel name="F" type="integer" max="32767" units="dev"/>
+        </inkml:traceFormat>
+        <inkml:channelProperties>
+          <inkml:channelProperty channel="X" name="resolution" value="1000" units="1/cm"/>
+          <inkml:channelProperty channel="Y" name="resolution" value="1000" units="1/cm"/>
+          <inkml:channelProperty channel="F" name="resolution" value="0" units="1/dev"/>
+        </inkml:channelProperties>
+      </inkml:inkSource>
+      <inkml:timestamp xml:id="ts0" timeString="2025-11-24T09:43:09.898"/>
+    </inkml:context>
+    <inkml:brush xml:id="br0">
+      <inkml:brushProperty name="width" value="0.035" units="cm"/>
+      <inkml:brushProperty name="height" value="0.035" units="cm"/>
+      <inkml:brushProperty name="color" value="#E71224"/>
+    </inkml:brush>
+  </inkml:definitions>
+  <inkml:trace contextRef="#ctx0" brushRef="#br0">1483 503 24575,'-5'-3'0,"1"0"0,-1 0 0,0 1 0,0-1 0,1 1 0,-2 0 0,1 1 0,0-1 0,0 1 0,0 0 0,-10 0 0,-4-2 0,-161-25 0,-1 9 0,-299 5 0,439 15 0,1 1 0,-1 1 0,-78 19 0,105-18 0,1 0 0,0 1 0,0 1 0,0 0 0,0 0 0,1 2 0,0-1 0,1 2 0,0 0 0,0 0 0,1 0 0,0 2 0,0-1 0,-15 24 0,9-10 0,1 1 0,1 0 0,1 1 0,1 1 0,1 0 0,2 1 0,0 0 0,2 0 0,2 0 0,-5 53 0,10-47 0,1 0 0,2 0 0,1-1 0,17 66 0,54 123 0,-51-158 0,-12-31 0,18 54 0,4-1 0,4-2 0,61 101 0,-82-159 0,1-1 0,2 0 0,1-2 0,0-1 0,40 33 0,-42-41 0,0-2 0,1 1 0,0-2 0,1-1 0,0 0 0,1-2 0,0 0 0,36 7 0,32-3 0,0-4 0,179-7 0,-157-3 0,34 2 0,239-8 0,-359 6 0,1-1 0,-1-1 0,0-1 0,0-1 0,26-11 0,-43 14 0,1-2 0,-1 1 0,0-1 0,0 0 0,0-1 0,-1 0 0,0-1 0,0 0 0,0 0 0,-1 0 0,0-1 0,-1 0 0,0 0 0,0-1 0,8-15 0,17-48 0,-4-2 0,21-84 0,22-155 0,-58 256 0,-3 5 0,-2 0 0,-3-1 0,-2 1 0,-2-1 0,-2 0 0,-3 0 0,-2 1 0,-2 0 0,-2 0 0,-3 1 0,-2 1 0,-2 0 0,-2 1 0,-41-70 0,8 31 0,-3 2 0,-5 3 0,-92-100 0,140 170 0,0 1 0,0 0 0,-2 1 0,-21-13 0,29 20 0,1 1 0,-1-1 0,-1 2 0,1-1 0,0 1 0,-1 0 0,1 0 0,-1 1 0,1 0 0,-1 1 0,0-1 0,1 1 0,-10 2 0,-7 1-170,-1 1-1,0 1 0,1 1 1,0 1-1,0 1 0,0 1 1,-37 22-1,37-15-6655</inkml:trace>
+</inkml:ink>
+</file>
+
+<file path=ppt/ink/ink4.xml><?xml version="1.0" encoding="utf-8"?>
+<inkml:ink xmlns:inkml="http://www.w3.org/2003/InkML">
+  <inkml:definitions>
+    <inkml:context xml:id="ctx0">
+      <inkml:inkSource xml:id="inkSrc0">
+        <inkml:traceFormat>
+          <inkml:channel name="X" type="integer" min="-2.14748E9" max="2.14748E9" units="cm"/>
+          <inkml:channel name="Y" type="integer" min="-2.14748E9" max="2.14748E9" units="cm"/>
+          <inkml:channel name="F" type="integer" max="32767" units="dev"/>
+        </inkml:traceFormat>
+        <inkml:channelProperties>
+          <inkml:channelProperty channel="X" name="resolution" value="1000" units="1/cm"/>
+          <inkml:channelProperty channel="Y" name="resolution" value="1000" units="1/cm"/>
+          <inkml:channelProperty channel="F" name="resolution" value="0" units="1/dev"/>
+        </inkml:channelProperties>
+      </inkml:inkSource>
+      <inkml:timestamp xml:id="ts0" timeString="2025-11-24T09:43:09.899"/>
+    </inkml:context>
+    <inkml:brush xml:id="br0">
+      <inkml:brushProperty name="width" value="0.035" units="cm"/>
+      <inkml:brushProperty name="height" value="0.035" units="cm"/>
+      <inkml:brushProperty name="color" value="#E71224"/>
+    </inkml:brush>
+  </inkml:definitions>
+  <inkml:trace contextRef="#ctx0" brushRef="#br0">607 108 24575,'-31'-4'0,"-1"-1"0,1-5 0,-37-18 0,-45-13 0,88 35 0,14 1 0,-1 1 0,0 2 0,0 0 0,0 2 0,0 0 0,0 2 0,0 0 0,-18 7 0,26-1 0,-1-3 0,0 3 0,1-1 0,-1 3 0,1-3 0,0 3 0,1-1 0,-1 0 0,1 1 0,0-1 0,-4 21 0,-17 44 0,8-41 0,1 3 0,1 2 0,1-1 0,-17 63 0,27-85 0,0 0 0,0 0 0,1 0 0,0 2 0,0-2 0,1 2 0,0-2 0,0 2 0,1 0 0,0-2 0,1 2 0,0-1 0,0 0 0,1 0 0,0-1 0,3 19 0,3-9 0,0-1 0,1 1 0,0-3 0,1 1 0,0-3 0,1 1 0,1 0 0,24 31 0,-15-18 0,15 24 0,-12-18 0,44 57 0,-60-87 0,1-1 0,-1 1 0,1-3 0,1 1 0,-1-3 0,0 3 0,1-4 0,-1-1 0,18 5 0,14-4 0,0-4 0,0-4 0,0-2 0,0-3 0,-1-6 0,67-36 0,-39 13 0,-44 29 0,-1-4 0,0 0 0,0-2 0,0-4 0,-2 0 0,1-1 0,29-41 0,-46 52 0,-1-2 0,1 1 0,-1-1 0,0 0 0,-1-2 0,1 1 0,-1-1 0,0 2 0,-1-2 0,0 0 0,0-1 0,0 1 0,-1 0 0,0 0 0,0 0 0,-1-2 0,0 2 0,-1-23 0,0 0 0,-2 1 0,0-1 0,0 0 0,-2 2 0,-14-67 0,15 86 7,0 0 0,-1 2-1,0-2 1,0 2 0,0-1-1,-1 3 1,-1-2-1,1 2 1,-1-1 0,0 3-1,0 0 1,0-1 0,-1 1-1,0 1 1,0 1 0,0-1-1,-14-5 1,-1 0-255,-1 4 1,1-1-1,-1 5 1,0 1-1,-31 0 1,28 4-6579</inkml:trace>
+</inkml:ink>
+</file>
+
+<file path=ppt/ink/ink5.xml><?xml version="1.0" encoding="utf-8"?>
+<inkml:ink xmlns:inkml="http://www.w3.org/2003/InkML">
+  <inkml:definitions>
+    <inkml:context xml:id="ctx0">
+      <inkml:inkSource xml:id="inkSrc0">
+        <inkml:traceFormat>
+          <inkml:channel name="X" type="integer" min="-2.14748E9" max="2.14748E9" units="cm"/>
+          <inkml:channel name="Y" type="integer" min="-2.14748E9" max="2.14748E9" units="cm"/>
+          <inkml:channel name="F" type="integer" max="32767" units="dev"/>
+        </inkml:traceFormat>
+        <inkml:channelProperties>
+          <inkml:channelProperty channel="X" name="resolution" value="1000" units="1/cm"/>
+          <inkml:channelProperty channel="Y" name="resolution" value="1000" units="1/cm"/>
+          <inkml:channelProperty channel="F" name="resolution" value="0" units="1/dev"/>
+        </inkml:channelProperties>
+      </inkml:inkSource>
+      <inkml:timestamp xml:id="ts0" timeString="2025-11-24T09:43:09.900"/>
+    </inkml:context>
+    <inkml:brush xml:id="br0">
+      <inkml:brushProperty name="width" value="0.035" units="cm"/>
+      <inkml:brushProperty name="height" value="0.035" units="cm"/>
+      <inkml:brushProperty name="color" value="#E71224"/>
+    </inkml:brush>
+  </inkml:definitions>
+  <inkml:trace contextRef="#ctx0" brushRef="#br0">1013 15 24575,'-2'-2'0,"0"1"0,-1-1 0,1 0 0,-1 1 0,0 0 0,0 0 0,1 0 0,-1 0 0,0 0 0,0 0 0,0 1 0,0 0 0,0-1 0,-3 1 0,-47 3 0,33-1 0,-51 5 0,0 3 0,0 3 0,1 3 0,1 3 0,-79 33 0,109-34 0,1 2 0,1 2 0,-58 44 0,82-55 0,1 0 0,1 0 0,0 1 0,0 1 0,1 0 0,-10 19 0,-2 5 0,-19 47 0,34-66 0,1 1 0,0 0 0,1 0 0,1 0 0,1 1 0,-1 27 0,3-34 0,1 0 0,1-1 0,0 1 0,1 0 0,0 0 0,0-1 0,2 1 0,0-1 0,0 0 0,11 21 0,-12-29 0,0 0 0,1 0 0,-1 0 0,1 0 0,0-1 0,0 1 0,1-1 0,-1 0 0,1 0 0,-1-1 0,1 1 0,9 2 0,69 19 0,-55-18 0,118 24 0,1-7 0,215 6 0,-353-29 0,12 2 0,1-1 0,-1-2 0,22-2 0,-35 1 0,-1 1 0,1-2 0,-1 1 0,0-1 0,0 0 0,0 0 0,0 0 0,-1-1 0,0-1 0,1 1 0,10-11 0,16-21 0,-1-1 0,-2-2 0,42-74 0,3-1 0,-72 110 0,91-139 0,-83 123 0,-1-1 0,-1 1 0,-1-1 0,-1-1 0,8-35 0,-10 29 0,-1 12 0,0-1 0,-2 0 0,1-29 0,-3 42 0,0 1 0,0-1 0,-1 1 0,1-1 0,-1 1 0,0 0 0,1-1 0,-2 1 0,1 0 0,0 0 0,-1 0 0,1 0 0,-1 0 0,0 0 0,0 0 0,0 0 0,-1 1 0,1-1 0,0 1 0,-1-1 0,0 1 0,1 0 0,-1 0 0,-4-1 0,-12-6 0,-1 2 0,0 1 0,0 0 0,-1 2 0,0 0 0,-26-1 0,-132 2 0,150 4 0,13-1-341,0 1 0,1 1-1,-17 3 1,15 0-6485</inkml:trace>
+</inkml:ink>
+</file>
+
+<file path=ppt/ink/ink6.xml><?xml version="1.0" encoding="utf-8"?>
+<inkml:ink xmlns:inkml="http://www.w3.org/2003/InkML">
+  <inkml:definitions>
+    <inkml:context xml:id="ctx0">
+      <inkml:inkSource xml:id="inkSrc0">
+        <inkml:traceFormat>
+          <inkml:channel name="X" type="integer" min="-2.14748E9" max="2.14748E9" units="cm"/>
+          <inkml:channel name="Y" type="integer" min="-2.14748E9" max="2.14748E9" units="cm"/>
+          <inkml:channel name="F" type="integer" max="32767" units="dev"/>
+        </inkml:traceFormat>
+        <inkml:channelProperties>
+          <inkml:channelProperty channel="X" name="resolution" value="1000" units="1/cm"/>
+          <inkml:channelProperty channel="Y" name="resolution" value="1000" units="1/cm"/>
+          <inkml:channelProperty channel="F" name="resolution" value="0" units="1/dev"/>
+        </inkml:channelProperties>
+      </inkml:inkSource>
+      <inkml:timestamp xml:id="ts0" timeString="2025-11-24T09:43:09.901"/>
+    </inkml:context>
+    <inkml:brush xml:id="br0">
+      <inkml:brushProperty name="width" value="0.035" units="cm"/>
+      <inkml:brushProperty name="height" value="0.035" units="cm"/>
+      <inkml:brushProperty name="color" value="#E71224"/>
+    </inkml:brush>
+  </inkml:definitions>
+  <inkml:trace contextRef="#ctx0" brushRef="#br0">888 1 24575,'-29'0'0,"-192"7"0,186-4 0,1 2 0,-1 2 0,2 1 0,-46 16 0,48-12 0,0 2 0,1 0 0,1 2 0,0 2 0,1 0 0,-34 30 0,39-29 0,2 1 0,-23 28 0,37-39 0,1 0 0,-1 1 0,2-1 0,0 1 0,0 0 0,1 1 0,0-1 0,-5 23 0,-4 24 0,-12 69 0,23-110 0,1-1 0,1 1 0,0 0 0,1 0 0,5 30 0,-4-40 0,0 0 0,0-1 0,1 1 0,-1-1 0,1 0 0,0 1 0,1-1 0,0-1 0,-1 1 0,1 0 0,1-1 0,-1 0 0,1 0 0,-1 0 0,1-1 0,0 0 0,1 1 0,-1-2 0,7 4 0,13 4 0,1-1 0,55 13 0,-34-11 0,32 8 0,0-3 0,0-4 0,95 2 0,246-15 0,-217-3 0,-138 5 0,-25 1 0,53-6 0,-88 3 0,1 0 0,-1-1 0,1 1 0,-1-1 0,0-1 0,0 1 0,0-1 0,0 1 0,0-1 0,-1-1 0,1 1 0,-1-1 0,0 1 0,0-1 0,0 0 0,-1-1 0,1 1 0,-1-1 0,5-8 0,-2 1 0,-1 1 0,0-1 0,-1 1 0,0-1 0,-1 0 0,0-1 0,2-21 0,11-62 0,-10 69 0,5-55 0,-11 71 0,0 1 0,-1 0 0,0 0 0,0-1 0,-1 1 0,-1 0 0,0 0 0,0 0 0,-5-10 0,-5-2 0,-1-1 0,0 2 0,-2 0 0,0 1 0,-2 0 0,0 2 0,-1 0 0,0 1 0,-2 1 0,0 1 0,-1 0 0,0 2 0,-1 1 0,0 0 0,-1 2 0,-49-14 0,42 19 27,1 1-1,-1 1 1,0 2 0,-52 4-1,46-1-525,0-1-1,-61-7 1,76 2-6327</inkml:trace>
+</inkml:ink>
+</file>
+
+<file path=ppt/notesMasters/notesMaster1.xml><?xml version="1.0" encoding="utf-8"?>
+<p:notesMaster xmlns:a="http://schemas.openxmlformats.org/drawingml/2006/main" xmlns:r="http://schemas.openxmlformats.org/officeDocument/2006/relationships" xmlns:p="http://schemas.openxmlformats.org/presentationml/2006/main">
+  <p:cSld>
+    <p:bg>
+      <p:bgRef idx="1001">
+        <a:schemeClr val="bg1"/>
+      </p:bgRef>
+    </p:bg>
+    <p:spTree>
+      <p:nvGrpSpPr>
+        <p:cNvPr id="1" name=""/>
+        <p:cNvGrpSpPr/>
+        <p:nvPr/>
+      </p:nvGrpSpPr>
+      <p:grpSpPr>
+        <a:xfrm>
+          <a:off x="0" y="0"/>
+          <a:ext cx="0" cy="0"/>
+          <a:chOff x="0" y="0"/>
+          <a:chExt cx="0" cy="0"/>
+        </a:xfrm>
+      </p:grpSpPr>
+      <p:sp>
+        <p:nvSpPr>
+          <p:cNvPr id="2" name="页眉占位符 1"/>
+          <p:cNvSpPr>
+            <a:spLocks noGrp="1"/>
+          </p:cNvSpPr>
+          <p:nvPr>
+            <p:ph type="hdr" sz="quarter"/>
+          </p:nvPr>
+        </p:nvSpPr>
+        <p:spPr>
+          <a:xfrm>
+            <a:off x="0" y="0"/>
+            <a:ext cx="2971800" cy="458788"/>
+          </a:xfrm>
+          <a:prstGeom prst="rect">
+            <a:avLst/>
+          </a:prstGeom>
+        </p:spPr>
+        <p:txBody>
+          <a:bodyPr vert="horz" lIns="91440" tIns="45720" rIns="91440" bIns="45720" rtlCol="0"/>
+          <a:lstStyle>
+            <a:lvl1pPr algn="l">
+              <a:defRPr sz="1200"/>
+            </a:lvl1pPr>
+          </a:lstStyle>
+          <a:p>
+            <a:endParaRPr lang="zh-CN" altLang="en-US"/>
+          </a:p>
+        </p:txBody>
+      </p:sp>
+      <p:sp>
+        <p:nvSpPr>
+          <p:cNvPr id="3" name="日期占位符 2"/>
+          <p:cNvSpPr>
+            <a:spLocks noGrp="1"/>
+          </p:cNvSpPr>
+          <p:nvPr>
+            <p:ph type="dt" idx="1"/>
+          </p:nvPr>
+        </p:nvSpPr>
+        <p:spPr>
+          <a:xfrm>
+            <a:off x="3884613" y="0"/>
+            <a:ext cx="2971800" cy="458788"/>
+          </a:xfrm>
+          <a:prstGeom prst="rect">
+            <a:avLst/>
+          </a:prstGeom>
+        </p:spPr>
+        <p:txBody>
+          <a:bodyPr vert="horz" lIns="91440" tIns="45720" rIns="91440" bIns="45720" rtlCol="0"/>
+          <a:lstStyle>
+            <a:lvl1pPr algn="r">
+              <a:defRPr sz="1200"/>
+            </a:lvl1pPr>
+          </a:lstStyle>
+          <a:p>
+            <a:fld id="{7081FAD3-CE4E-444B-AFC3-991576DB8DC3}" type="datetimeFigureOut">
+              <a:rPr lang="zh-CN" altLang="en-US" smtClean="0"/>
+              <a:t>2025/11/24</a:t>
+            </a:fld>
+            <a:endParaRPr lang="zh-CN" altLang="en-US"/>
+          </a:p>
+        </p:txBody>
+      </p:sp>
+      <p:sp>
+        <p:nvSpPr>
+          <p:cNvPr id="4" name="幻灯片图像占位符 3"/>
+          <p:cNvSpPr>
+            <a:spLocks noGrp="1" noRot="1" noChangeAspect="1"/>
+          </p:cNvSpPr>
+          <p:nvPr>
+            <p:ph type="sldImg" idx="2"/>
+          </p:nvPr>
+        </p:nvSpPr>
+        <p:spPr>
+          <a:xfrm>
+            <a:off x="685800" y="1143000"/>
+            <a:ext cx="5486400" cy="3086100"/>
+          </a:xfrm>
+          <a:prstGeom prst="rect">
+            <a:avLst/>
+          </a:prstGeom>
+          <a:noFill/>
+          <a:ln w="12700">
+            <a:solidFill>
+              <a:prstClr val="black"/>
+            </a:solidFill>
+          </a:ln>
+        </p:spPr>
+        <p:txBody>
+          <a:bodyPr vert="horz" lIns="91440" tIns="45720" rIns="91440" bIns="45720" rtlCol="0" anchor="ctr"/>
+          <a:lstStyle/>
+          <a:p>
+            <a:endParaRPr lang="zh-CN" altLang="en-US"/>
+          </a:p>
+        </p:txBody>
+      </p:sp>
+      <p:sp>
+        <p:nvSpPr>
+          <p:cNvPr id="5" name="备注占位符 4"/>
+          <p:cNvSpPr>
+            <a:spLocks noGrp="1"/>
+          </p:cNvSpPr>
+          <p:nvPr>
+            <p:ph type="body" sz="quarter" idx="3"/>
+          </p:nvPr>
+        </p:nvSpPr>
+        <p:spPr>
+          <a:xfrm>
+            <a:off x="685800" y="4400550"/>
+            <a:ext cx="5486400" cy="3600450"/>
+          </a:xfrm>
+          <a:prstGeom prst="rect">
+            <a:avLst/>
+          </a:prstGeom>
+        </p:spPr>
+        <p:txBody>
+          <a:bodyPr vert="horz" lIns="91440" tIns="45720" rIns="91440" bIns="45720" rtlCol="0"/>
+          <a:lstStyle/>
+          <a:p>
+            <a:pPr lvl="0"/>
+            <a:r>
+              <a:rPr lang="zh-CN" altLang="en-US"/>
+              <a:t>单击此处编辑母版文本样式</a:t>
+            </a:r>
+          </a:p>
+          <a:p>
+            <a:pPr lvl="1"/>
+            <a:r>
+              <a:rPr lang="zh-CN" altLang="en-US"/>
+              <a:t>二级</a:t>
+            </a:r>
+          </a:p>
+          <a:p>
+            <a:pPr lvl="2"/>
+            <a:r>
+              <a:rPr lang="zh-CN" altLang="en-US"/>
+              <a:t>三级</a:t>
+            </a:r>
+          </a:p>
+          <a:p>
+            <a:pPr lvl="3"/>
+            <a:r>
+              <a:rPr lang="zh-CN" altLang="en-US"/>
+              <a:t>四级</a:t>
+            </a:r>
+          </a:p>
+          <a:p>
+            <a:pPr lvl="4"/>
+            <a:r>
+              <a:rPr lang="zh-CN" altLang="en-US"/>
+              <a:t>五级</a:t>
+            </a:r>
+          </a:p>
+        </p:txBody>
+      </p:sp>
+      <p:sp>
+        <p:nvSpPr>
+          <p:cNvPr id="6" name="页脚占位符 5"/>
+          <p:cNvSpPr>
+            <a:spLocks noGrp="1"/>
+          </p:cNvSpPr>
+          <p:nvPr>
+            <p:ph type="ftr" sz="quarter" idx="4"/>
+          </p:nvPr>
+        </p:nvSpPr>
+        <p:spPr>
+          <a:xfrm>
+            <a:off x="0" y="8685213"/>
+            <a:ext cx="2971800" cy="458787"/>
+          </a:xfrm>
+          <a:prstGeom prst="rect">
+            <a:avLst/>
+          </a:prstGeom>
+        </p:spPr>
+        <p:txBody>
+          <a:bodyPr vert="horz" lIns="91440" tIns="45720" rIns="91440" bIns="45720" rtlCol="0" anchor="b"/>
+          <a:lstStyle>
+            <a:lvl1pPr algn="l">
+              <a:defRPr sz="1200"/>
+            </a:lvl1pPr>
+          </a:lstStyle>
+          <a:p>
+            <a:endParaRPr lang="zh-CN" altLang="en-US"/>
+          </a:p>
+        </p:txBody>
+      </p:sp>
+      <p:sp>
+        <p:nvSpPr>
+          <p:cNvPr id="7" name="灯片编号占位符 6"/>
+          <p:cNvSpPr>
+            <a:spLocks noGrp="1"/>
+          </p:cNvSpPr>
+          <p:nvPr>
+            <p:ph type="sldNum" sz="quarter" idx="5"/>
+          </p:nvPr>
+        </p:nvSpPr>
+        <p:spPr>
+          <a:xfrm>
+            <a:off x="3884613" y="8685213"/>
+            <a:ext cx="2971800" cy="458787"/>
+          </a:xfrm>
+          <a:prstGeom prst="rect">
+            <a:avLst/>
+          </a:prstGeom>
+        </p:spPr>
+        <p:txBody>
+          <a:bodyPr vert="horz" lIns="91440" tIns="45720" rIns="91440" bIns="45720" rtlCol="0" anchor="b"/>
+          <a:lstStyle>
+            <a:lvl1pPr algn="r">
+              <a:defRPr sz="1200"/>
+            </a:lvl1pPr>
+          </a:lstStyle>
+          <a:p>
+            <a:fld id="{033ADAB9-3114-432C-9FC2-BA1D697CAF69}" type="slidenum">
+              <a:rPr lang="zh-CN" altLang="en-US" smtClean="0"/>
+              <a:t>‹#›</a:t>
+            </a:fld>
+            <a:endParaRPr lang="zh-CN" altLang="en-US"/>
+          </a:p>
+        </p:txBody>
+      </p:sp>
+    </p:spTree>
+    <p:extLst>
+      <p:ext uri="{BB962C8B-B14F-4D97-AF65-F5344CB8AC3E}">
+        <p14:creationId xmlns:p14="http://schemas.microsoft.com/office/powerpoint/2010/main" val="1001986662"/>
+      </p:ext>
+    </p:extLst>
+  </p:cSld>
+  <p:clrMap bg1="lt1" tx1="dk1" bg2="lt2" tx2="dk2" accent1="accent1" accent2="accent2" accent3="accent3" accent4="accent4" accent5="accent5" accent6="accent6" hlink="hlink" folHlink="folHlink"/>
+  <p:notesStyle>
+    <a:lvl1pPr marL="0" algn="l" defTabSz="914400" rtl="0" eaLnBrk="1" latinLnBrk="0" hangingPunct="1">
+      <a:defRPr sz="1200" kern="1200">
+        <a:solidFill>
+          <a:schemeClr val="tx1"/>
+        </a:solidFill>
+        <a:latin typeface="+mn-lt"/>
+        <a:ea typeface="+mn-ea"/>
+        <a:cs typeface="+mn-cs"/>
+      </a:defRPr>
+    </a:lvl1pPr>
+    <a:lvl2pPr marL="457200" algn="l" defTabSz="914400" rtl="0" eaLnBrk="1" latinLnBrk="0" hangingPunct="1">
+      <a:defRPr sz="1200" kern="1200">
+        <a:solidFill>
+          <a:schemeClr val="tx1"/>
+        </a:solidFill>
+        <a:latin typeface="+mn-lt"/>
+        <a:ea typeface="+mn-ea"/>
+        <a:cs typeface="+mn-cs"/>
+      </a:defRPr>
+    </a:lvl2pPr>
+    <a:lvl3pPr marL="914400" algn="l" defTabSz="914400" rtl="0" eaLnBrk="1" latinLnBrk="0" hangingPunct="1">
+      <a:defRPr sz="1200" kern="1200">
+        <a:solidFill>
+          <a:schemeClr val="tx1"/>
+        </a:solidFill>
+        <a:latin typeface="+mn-lt"/>
+        <a:ea typeface="+mn-ea"/>
+        <a:cs typeface="+mn-cs"/>
+      </a:defRPr>
+    </a:lvl3pPr>
+    <a:lvl4pPr marL="1371600" algn="l" defTabSz="914400" rtl="0" eaLnBrk="1" latinLnBrk="0" hangingPunct="1">
+      <a:defRPr sz="1200" kern="1200">
+        <a:solidFill>
+          <a:schemeClr val="tx1"/>
+        </a:solidFill>
+        <a:latin typeface="+mn-lt"/>
+        <a:ea typeface="+mn-ea"/>
+        <a:cs typeface="+mn-cs"/>
+      </a:defRPr>
+    </a:lvl4pPr>
+    <a:lvl5pPr marL="1828800" algn="l" defTabSz="914400" rtl="0" eaLnBrk="1" latinLnBrk="0" hangingPunct="1">
+      <a:defRPr sz="1200" kern="1200">
+        <a:solidFill>
+          <a:schemeClr val="tx1"/>
+        </a:solidFill>
+        <a:latin typeface="+mn-lt"/>
+        <a:ea typeface="+mn-ea"/>
+        <a:cs typeface="+mn-cs"/>
+      </a:defRPr>
+    </a:lvl5pPr>
+    <a:lvl6pPr marL="2286000" algn="l" defTabSz="914400" rtl="0" eaLnBrk="1" latinLnBrk="0" hangingPunct="1">
+      <a:defRPr sz="1200" kern="1200">
+        <a:solidFill>
+          <a:schemeClr val="tx1"/>
+        </a:solidFill>
+        <a:latin typeface="+mn-lt"/>
+        <a:ea typeface="+mn-ea"/>
+        <a:cs typeface="+mn-cs"/>
+      </a:defRPr>
+    </a:lvl6pPr>
+    <a:lvl7pPr marL="2743200" algn="l" defTabSz="914400" rtl="0" eaLnBrk="1" latinLnBrk="0" hangingPunct="1">
+      <a:defRPr sz="1200" kern="1200">
+        <a:solidFill>
+          <a:schemeClr val="tx1"/>
+        </a:solidFill>
+        <a:latin typeface="+mn-lt"/>
+        <a:ea typeface="+mn-ea"/>
+        <a:cs typeface="+mn-cs"/>
+      </a:defRPr>
+    </a:lvl7pPr>
+    <a:lvl8pPr marL="3200400" algn="l" defTabSz="914400" rtl="0" eaLnBrk="1" latinLnBrk="0" hangingPunct="1">
+      <a:defRPr sz="1200" kern="1200">
+        <a:solidFill>
+          <a:schemeClr val="tx1"/>
+        </a:solidFill>
+        <a:latin typeface="+mn-lt"/>
+        <a:ea typeface="+mn-ea"/>
+        <a:cs typeface="+mn-cs"/>
+      </a:defRPr>
+    </a:lvl8pPr>
+    <a:lvl9pPr marL="3657600" algn="l" defTabSz="914400" rtl="0" eaLnBrk="1" latinLnBrk="0" hangingPunct="1">
+      <a:defRPr sz="1200" kern="1200">
+        <a:solidFill>
+          <a:schemeClr val="tx1"/>
+        </a:solidFill>
+        <a:latin typeface="+mn-lt"/>
+        <a:ea typeface="+mn-ea"/>
+        <a:cs typeface="+mn-cs"/>
+      </a:defRPr>
+    </a:lvl9pPr>
+  </p:notesStyle>
+</p:notesMaster>
+</file>
+
+<file path=ppt/notesSlides/notesSlide1.xml><?xml version="1.0" encoding="utf-8"?>
+<p:notes xmlns:a="http://schemas.openxmlformats.org/drawingml/2006/main" xmlns:r="http://schemas.openxmlformats.org/officeDocument/2006/relationships" xmlns:p="http://schemas.openxmlformats.org/presentationml/2006/main">
+  <p:cSld>
+    <p:spTree>
+      <p:nvGrpSpPr>
+        <p:cNvPr id="1" name=""/>
+        <p:cNvGrpSpPr/>
+        <p:nvPr/>
+      </p:nvGrpSpPr>
+      <p:grpSpPr>
+        <a:xfrm>
+          <a:off x="0" y="0"/>
+          <a:ext cx="0" cy="0"/>
+          <a:chOff x="0" y="0"/>
+          <a:chExt cx="0" cy="0"/>
+        </a:xfrm>
+      </p:grpSpPr>
+      <p:sp>
+        <p:nvSpPr>
+          <p:cNvPr id="2" name="幻灯片图像占位符 1"/>
+          <p:cNvSpPr>
+            <a:spLocks noGrp="1" noRot="1" noChangeAspect="1"/>
+          </p:cNvSpPr>
+          <p:nvPr>
+            <p:ph type="sldImg"/>
+          </p:nvPr>
+        </p:nvSpPr>
+        <p:spPr/>
+      </p:sp>
+      <p:sp>
+        <p:nvSpPr>
+          <p:cNvPr id="3" name="备注占位符 2"/>
+          <p:cNvSpPr>
+            <a:spLocks noGrp="1"/>
+          </p:cNvSpPr>
+          <p:nvPr>
+            <p:ph type="body" idx="1"/>
+          </p:nvPr>
+        </p:nvSpPr>
+        <p:spPr/>
+        <p:txBody>
+          <a:bodyPr/>
+          <a:lstStyle/>
+          <a:p>
+            <a:endParaRPr lang="zh-CN" altLang="en-US" dirty="0"/>
+          </a:p>
+        </p:txBody>
+      </p:sp>
+      <p:sp>
+        <p:nvSpPr>
+          <p:cNvPr id="4" name="灯片编号占位符 3"/>
+          <p:cNvSpPr>
+            <a:spLocks noGrp="1"/>
+          </p:cNvSpPr>
+          <p:nvPr>
+            <p:ph type="sldNum" sz="quarter" idx="5"/>
+          </p:nvPr>
+        </p:nvSpPr>
+        <p:spPr/>
+        <p:txBody>
+          <a:bodyPr/>
+          <a:lstStyle/>
+          <a:p>
+            <a:fld id="{033ADAB9-3114-432C-9FC2-BA1D697CAF69}" type="slidenum">
+              <a:rPr lang="zh-CN" altLang="en-US" smtClean="0"/>
+              <a:t>1</a:t>
+            </a:fld>
+            <a:endParaRPr lang="zh-CN" altLang="en-US"/>
+          </a:p>
+        </p:txBody>
+      </p:sp>
+    </p:spTree>
+    <p:extLst>
+      <p:ext uri="{BB962C8B-B14F-4D97-AF65-F5344CB8AC3E}">
+        <p14:creationId xmlns:p14="http://schemas.microsoft.com/office/powerpoint/2010/main" val="1895917693"/>
+      </p:ext>
+    </p:extLst>
+  </p:cSld>
+  <p:clrMapOvr>
+    <a:masterClrMapping/>
+  </p:clrMapOvr>
+</p:notes>
+</file>
+
 <file path=ppt/slideLayouts/slideLayout1.xml><?xml version="1.0" encoding="utf-8"?>
 <p:sldLayout xmlns:a="http://schemas.openxmlformats.org/drawingml/2006/main" xmlns:r="http://schemas.openxmlformats.org/officeDocument/2006/relationships" xmlns:p="http://schemas.openxmlformats.org/presentationml/2006/main" type="title" preserve="1">
   <p:cSld name="标题幻灯片">
@@ -282,7 +882,7 @@
           <a:p>
             <a:fld id="{581A1311-718C-4E8E-8010-28C99C476D3E}" type="datetimeFigureOut">
               <a:rPr lang="zh-CN" altLang="en-US" smtClean="0"/>
-              <a:t>2025/11/14</a:t>
+              <a:t>2025/11/24</a:t>
             </a:fld>
             <a:endParaRPr lang="zh-CN" altLang="en-US"/>
           </a:p>
@@ -480,7 +1080,7 @@
           <a:p>
             <a:fld id="{581A1311-718C-4E8E-8010-28C99C476D3E}" type="datetimeFigureOut">
               <a:rPr lang="zh-CN" altLang="en-US" smtClean="0"/>
-              <a:t>2025/11/14</a:t>
+              <a:t>2025/11/24</a:t>
             </a:fld>
             <a:endParaRPr lang="zh-CN" altLang="en-US"/>
           </a:p>
@@ -688,7 +1288,7 @@
           <a:p>
             <a:fld id="{581A1311-718C-4E8E-8010-28C99C476D3E}" type="datetimeFigureOut">
               <a:rPr lang="zh-CN" altLang="en-US" smtClean="0"/>
-              <a:t>2025/11/14</a:t>
+              <a:t>2025/11/24</a:t>
             </a:fld>
             <a:endParaRPr lang="zh-CN" altLang="en-US"/>
           </a:p>
@@ -886,7 +1486,7 @@
           <a:p>
             <a:fld id="{581A1311-718C-4E8E-8010-28C99C476D3E}" type="datetimeFigureOut">
               <a:rPr lang="zh-CN" altLang="en-US" smtClean="0"/>
-              <a:t>2025/11/14</a:t>
+              <a:t>2025/11/24</a:t>
             </a:fld>
             <a:endParaRPr lang="zh-CN" altLang="en-US"/>
           </a:p>
@@ -1161,7 +1761,7 @@
           <a:p>
             <a:fld id="{581A1311-718C-4E8E-8010-28C99C476D3E}" type="datetimeFigureOut">
               <a:rPr lang="zh-CN" altLang="en-US" smtClean="0"/>
-              <a:t>2025/11/14</a:t>
+              <a:t>2025/11/24</a:t>
             </a:fld>
             <a:endParaRPr lang="zh-CN" altLang="en-US"/>
           </a:p>
@@ -1426,7 +2026,7 @@
           <a:p>
             <a:fld id="{581A1311-718C-4E8E-8010-28C99C476D3E}" type="datetimeFigureOut">
               <a:rPr lang="zh-CN" altLang="en-US" smtClean="0"/>
-              <a:t>2025/11/14</a:t>
+              <a:t>2025/11/24</a:t>
             </a:fld>
             <a:endParaRPr lang="zh-CN" altLang="en-US"/>
           </a:p>
@@ -1838,7 +2438,7 @@
           <a:p>
             <a:fld id="{581A1311-718C-4E8E-8010-28C99C476D3E}" type="datetimeFigureOut">
               <a:rPr lang="zh-CN" altLang="en-US" smtClean="0"/>
-              <a:t>2025/11/14</a:t>
+              <a:t>2025/11/24</a:t>
             </a:fld>
             <a:endParaRPr lang="zh-CN" altLang="en-US"/>
           </a:p>
@@ -1979,7 +2579,7 @@
           <a:p>
             <a:fld id="{581A1311-718C-4E8E-8010-28C99C476D3E}" type="datetimeFigureOut">
               <a:rPr lang="zh-CN" altLang="en-US" smtClean="0"/>
-              <a:t>2025/11/14</a:t>
+              <a:t>2025/11/24</a:t>
             </a:fld>
             <a:endParaRPr lang="zh-CN" altLang="en-US"/>
           </a:p>
@@ -2092,7 +2692,7 @@
           <a:p>
             <a:fld id="{581A1311-718C-4E8E-8010-28C99C476D3E}" type="datetimeFigureOut">
               <a:rPr lang="zh-CN" altLang="en-US" smtClean="0"/>
-              <a:t>2025/11/14</a:t>
+              <a:t>2025/11/24</a:t>
             </a:fld>
             <a:endParaRPr lang="zh-CN" altLang="en-US"/>
           </a:p>
@@ -2403,7 +3003,7 @@
           <a:p>
             <a:fld id="{581A1311-718C-4E8E-8010-28C99C476D3E}" type="datetimeFigureOut">
               <a:rPr lang="zh-CN" altLang="en-US" smtClean="0"/>
-              <a:t>2025/11/14</a:t>
+              <a:t>2025/11/24</a:t>
             </a:fld>
             <a:endParaRPr lang="zh-CN" altLang="en-US"/>
           </a:p>
@@ -2691,7 +3291,7 @@
           <a:p>
             <a:fld id="{581A1311-718C-4E8E-8010-28C99C476D3E}" type="datetimeFigureOut">
               <a:rPr lang="zh-CN" altLang="en-US" smtClean="0"/>
-              <a:t>2025/11/14</a:t>
+              <a:t>2025/11/24</a:t>
             </a:fld>
             <a:endParaRPr lang="zh-CN" altLang="en-US"/>
           </a:p>
@@ -2932,7 +3532,7 @@
           <a:p>
             <a:fld id="{581A1311-718C-4E8E-8010-28C99C476D3E}" type="datetimeFigureOut">
               <a:rPr lang="zh-CN" altLang="en-US" smtClean="0"/>
-              <a:t>2025/11/14</a:t>
+              <a:t>2025/11/24</a:t>
             </a:fld>
             <a:endParaRPr lang="zh-CN" altLang="en-US"/>
           </a:p>
@@ -3378,7 +3978,7 @@
             <a:avLst/>
           </a:prstGeom>
           <a:solidFill>
-            <a:srgbClr val="177BF5"/>
+            <a:srgbClr val="177DF8"/>
           </a:solidFill>
           <a:ln>
             <a:noFill/>
@@ -3470,11 +4070,65 @@
                 <a:latin typeface="+mn-ea"/>
                 <a:ea typeface="+mn-ea"/>
               </a:rPr>
-              <a:t>标题</a:t>
-            </a:r>
-          </a:p>
-        </p:txBody>
-      </p:sp>
+              <a:t>轻型</a:t>
+            </a:r>
+            <a:r>
+              <a:rPr lang="en-US" altLang="zh-CN" b="1" dirty="0">
+                <a:effectLst>
+                  <a:innerShdw blurRad="114300">
+                    <a:prstClr val="black"/>
+                  </a:innerShdw>
+                </a:effectLst>
+                <a:latin typeface="+mn-ea"/>
+                <a:ea typeface="+mn-ea"/>
+              </a:rPr>
+              <a:t>AGV</a:t>
+            </a:r>
+            <a:r>
+              <a:rPr lang="zh-CN" altLang="en-US" b="1" dirty="0">
+                <a:effectLst>
+                  <a:innerShdw blurRad="114300">
+                    <a:prstClr val="black"/>
+                  </a:innerShdw>
+                </a:effectLst>
+                <a:latin typeface="+mn-ea"/>
+                <a:ea typeface="+mn-ea"/>
+              </a:rPr>
+              <a:t>小车</a:t>
+            </a:r>
+          </a:p>
+        </p:txBody>
+      </p:sp>
+      <p:pic>
+        <p:nvPicPr>
+          <p:cNvPr id="11" name="图片 10">
+            <a:extLst>
+              <a:ext uri="{FF2B5EF4-FFF2-40B4-BE49-F238E27FC236}">
+                <a16:creationId xmlns:a16="http://schemas.microsoft.com/office/drawing/2014/main" id="{D9112190-9BDB-4E61-23A6-C9C747C6078A}"/>
+              </a:ext>
+            </a:extLst>
+          </p:cNvPr>
+          <p:cNvPicPr>
+            <a:picLocks noChangeAspect="1"/>
+          </p:cNvPicPr>
+          <p:nvPr/>
+        </p:nvPicPr>
+        <p:blipFill>
+          <a:blip r:embed="rId3"/>
+          <a:stretch>
+            <a:fillRect/>
+          </a:stretch>
+        </p:blipFill>
+        <p:spPr>
+          <a:xfrm>
+            <a:off x="184195" y="197312"/>
+            <a:ext cx="1741460" cy="586009"/>
+          </a:xfrm>
+          <a:prstGeom prst="rect">
+            <a:avLst/>
+          </a:prstGeom>
+        </p:spPr>
+      </p:pic>
       <p:sp>
         <p:nvSpPr>
           <p:cNvPr id="12" name="矩形 11">
@@ -3562,7 +4216,7 @@
                 </a:solidFill>
                 <a:latin typeface="+mn-ea"/>
               </a:rPr>
-              <a:t>制作人 王小明</a:t>
+              <a:t>制作人 王齐权</a:t>
             </a:r>
           </a:p>
         </p:txBody>
@@ -3605,7 +4259,10 @@
             <a:r>
               <a:rPr lang="en-US" altLang="zh-CN" sz="1400" b="1" dirty="0">
                 <a:solidFill>
-                  <a:srgbClr val="0096B4"/>
+                  <a:schemeClr val="accent4">
+                    <a:lumMod val="95000"/>
+                    <a:lumOff val="5000"/>
+                  </a:schemeClr>
                 </a:solidFill>
                 <a:latin typeface="Arial" panose="020B0604020202020204" pitchFamily="34" charset="0"/>
                 <a:cs typeface="Arial" panose="020B0604020202020204" pitchFamily="34" charset="0"/>
@@ -3615,16 +4272,22 @@
             <a:fld id="{5853BA87-C0A4-4D40-A7D0-264FBDFF6174}" type="datetime9">
               <a:rPr lang="en-US" altLang="zh-CN" sz="1400" b="1" dirty="0" smtClean="0">
                 <a:solidFill>
-                  <a:srgbClr val="0096B4"/>
+                  <a:schemeClr val="accent4">
+                    <a:lumMod val="95000"/>
+                    <a:lumOff val="5000"/>
+                  </a:schemeClr>
                 </a:solidFill>
                 <a:latin typeface="Arial" panose="020B0604020202020204" pitchFamily="34" charset="0"/>
                 <a:cs typeface="Arial" panose="020B0604020202020204" pitchFamily="34" charset="0"/>
               </a:rPr>
-              <a:t>11/14/2025 10:54:57 AM</a:t>
+              <a:t>11/24/2025 5:24:34 PM</a:t>
             </a:fld>
             <a:endParaRPr lang="zh-CN" altLang="en-US" sz="1400" b="1" dirty="0">
               <a:solidFill>
-                <a:srgbClr val="0096B4"/>
+                <a:schemeClr val="accent4">
+                  <a:lumMod val="95000"/>
+                  <a:lumOff val="5000"/>
+                </a:schemeClr>
               </a:solidFill>
               <a:latin typeface="Arial" panose="020B0604020202020204" pitchFamily="34" charset="0"/>
               <a:cs typeface="Arial" panose="020B0604020202020204" pitchFamily="34" charset="0"/>
@@ -3632,43 +4295,6 @@
           </a:p>
         </p:txBody>
       </p:sp>
-      <p:pic>
-        <p:nvPicPr>
-          <p:cNvPr id="2" name="图片 1" descr="徽标&#10;&#10;AI 生成的内容可能不正确。">
-            <a:extLst>
-              <a:ext uri="{FF2B5EF4-FFF2-40B4-BE49-F238E27FC236}">
-                <a16:creationId xmlns:a16="http://schemas.microsoft.com/office/drawing/2014/main" id="{5CC1B96B-F4FD-1310-5BA7-318A63CA8D5C}"/>
-              </a:ext>
-            </a:extLst>
-          </p:cNvPr>
-          <p:cNvPicPr>
-            <a:picLocks/>
-          </p:cNvPicPr>
-          <p:nvPr/>
-        </p:nvPicPr>
-        <p:blipFill>
-          <a:blip r:embed="rId2">
-            <a:extLst>
-              <a:ext uri="{28A0092B-C50C-407E-A947-70E740481C1C}">
-                <a14:useLocalDpi xmlns:a14="http://schemas.microsoft.com/office/drawing/2010/main" val="0"/>
-              </a:ext>
-            </a:extLst>
-          </a:blip>
-          <a:srcRect t="29985" b="27316"/>
-          <a:stretch>
-            <a:fillRect/>
-          </a:stretch>
-        </p:blipFill>
-        <p:spPr>
-          <a:xfrm>
-            <a:off x="184195" y="166221"/>
-            <a:ext cx="1741461" cy="688543"/>
-          </a:xfrm>
-          <a:prstGeom prst="rect">
-            <a:avLst/>
-          </a:prstGeom>
-        </p:spPr>
-      </p:pic>
     </p:spTree>
     <p:extLst>
       <p:ext uri="{BB962C8B-B14F-4D97-AF65-F5344CB8AC3E}">
@@ -3698,7 +4324,7 @@
         <p:cNvPr id="1" name="">
           <a:extLst>
             <a:ext uri="{FF2B5EF4-FFF2-40B4-BE49-F238E27FC236}">
-              <a16:creationId xmlns:a16="http://schemas.microsoft.com/office/drawing/2014/main" id="{E7A20043-3752-6B5B-403D-9898552D5545}"/>
+              <a16:creationId xmlns:a16="http://schemas.microsoft.com/office/drawing/2014/main" id="{82A03F8C-C045-90F0-A222-070B35787551}"/>
             </a:ext>
           </a:extLst>
         </p:cNvPr>
@@ -3713,12 +4339,48 @@
           <a:chExt cx="0" cy="0"/>
         </a:xfrm>
       </p:grpSpPr>
+      <p:pic>
+        <p:nvPicPr>
+          <p:cNvPr id="16" name="图片 15" descr="桌子上的自行车&#10;&#10;AI 生成的内容可能不正确。">
+            <a:extLst>
+              <a:ext uri="{FF2B5EF4-FFF2-40B4-BE49-F238E27FC236}">
+                <a16:creationId xmlns:a16="http://schemas.microsoft.com/office/drawing/2014/main" id="{53F2C2EB-0F6B-A840-8CF6-B741279F1928}"/>
+              </a:ext>
+            </a:extLst>
+          </p:cNvPr>
+          <p:cNvPicPr>
+            <a:picLocks noChangeAspect="1"/>
+          </p:cNvPicPr>
+          <p:nvPr/>
+        </p:nvPicPr>
+        <p:blipFill>
+          <a:blip r:embed="rId2">
+            <a:extLst>
+              <a:ext uri="{28A0092B-C50C-407E-A947-70E740481C1C}">
+                <a14:useLocalDpi xmlns:a14="http://schemas.microsoft.com/office/drawing/2010/main" val="0"/>
+              </a:ext>
+            </a:extLst>
+          </a:blip>
+          <a:stretch>
+            <a:fillRect/>
+          </a:stretch>
+        </p:blipFill>
+        <p:spPr>
+          <a:xfrm>
+            <a:off x="8407400" y="1809894"/>
+            <a:ext cx="3784600" cy="5048106"/>
+          </a:xfrm>
+          <a:prstGeom prst="rect">
+            <a:avLst/>
+          </a:prstGeom>
+        </p:spPr>
+      </p:pic>
       <p:sp>
         <p:nvSpPr>
           <p:cNvPr id="4" name="矩形 3">
             <a:extLst>
               <a:ext uri="{FF2B5EF4-FFF2-40B4-BE49-F238E27FC236}">
-                <a16:creationId xmlns:a16="http://schemas.microsoft.com/office/drawing/2014/main" id="{6D860C2E-D041-938F-7BF3-4F968BF8D321}"/>
+                <a16:creationId xmlns:a16="http://schemas.microsoft.com/office/drawing/2014/main" id="{0C1B2792-69C3-C466-E7EA-417A80EC82BB}"/>
               </a:ext>
             </a:extLst>
           </p:cNvPr>
@@ -3734,7 +4396,7 @@
             <a:avLst/>
           </a:prstGeom>
           <a:solidFill>
-            <a:srgbClr val="177BF5"/>
+            <a:srgbClr val="197DF7"/>
           </a:solidFill>
           <a:ln>
             <a:noFill/>
@@ -3765,12 +4427,42 @@
           </a:p>
         </p:txBody>
       </p:sp>
+      <p:pic>
+        <p:nvPicPr>
+          <p:cNvPr id="5" name="图片 4">
+            <a:extLst>
+              <a:ext uri="{FF2B5EF4-FFF2-40B4-BE49-F238E27FC236}">
+                <a16:creationId xmlns:a16="http://schemas.microsoft.com/office/drawing/2014/main" id="{85C7ACAF-8F2B-8C90-6AD1-DE98EC3207A8}"/>
+              </a:ext>
+            </a:extLst>
+          </p:cNvPr>
+          <p:cNvPicPr>
+            <a:picLocks noChangeAspect="1"/>
+          </p:cNvPicPr>
+          <p:nvPr/>
+        </p:nvPicPr>
+        <p:blipFill>
+          <a:blip r:embed="rId3"/>
+          <a:stretch>
+            <a:fillRect/>
+          </a:stretch>
+        </p:blipFill>
+        <p:spPr>
+          <a:xfrm>
+            <a:off x="184195" y="197312"/>
+            <a:ext cx="1741460" cy="586009"/>
+          </a:xfrm>
+          <a:prstGeom prst="rect">
+            <a:avLst/>
+          </a:prstGeom>
+        </p:spPr>
+      </p:pic>
       <p:sp>
         <p:nvSpPr>
           <p:cNvPr id="6" name="矩形 5">
             <a:extLst>
               <a:ext uri="{FF2B5EF4-FFF2-40B4-BE49-F238E27FC236}">
-                <a16:creationId xmlns:a16="http://schemas.microsoft.com/office/drawing/2014/main" id="{959AC269-712C-6EEF-0FE7-E187850D887E}"/>
+                <a16:creationId xmlns:a16="http://schemas.microsoft.com/office/drawing/2014/main" id="{3841BCEB-F417-F8EE-344B-EB83CCF99B93}"/>
               </a:ext>
             </a:extLst>
           </p:cNvPr>
@@ -3822,7 +4514,7 @@
           <p:cNvPr id="7" name="标题 1">
             <a:extLst>
               <a:ext uri="{FF2B5EF4-FFF2-40B4-BE49-F238E27FC236}">
-                <a16:creationId xmlns:a16="http://schemas.microsoft.com/office/drawing/2014/main" id="{78EB67BA-7F2B-3602-45FC-3077F436A0E4}"/>
+                <a16:creationId xmlns:a16="http://schemas.microsoft.com/office/drawing/2014/main" id="{3A80A810-8913-F220-68A6-39FB751BF7F0}"/>
               </a:ext>
             </a:extLst>
           </p:cNvPr>
@@ -3874,37 +4566,450 @@
           </a:p>
         </p:txBody>
       </p:sp>
+      <p:sp>
+        <p:nvSpPr>
+          <p:cNvPr id="3" name="文本框 2">
+            <a:extLst>
+              <a:ext uri="{FF2B5EF4-FFF2-40B4-BE49-F238E27FC236}">
+                <a16:creationId xmlns:a16="http://schemas.microsoft.com/office/drawing/2014/main" id="{89BED67F-C6E3-54D0-A374-0D2BCA9AD6F1}"/>
+              </a:ext>
+            </a:extLst>
+          </p:cNvPr>
+          <p:cNvSpPr txBox="1"/>
+          <p:nvPr/>
+        </p:nvSpPr>
+        <p:spPr>
+          <a:xfrm>
+            <a:off x="2025282" y="1080655"/>
+            <a:ext cx="3140264" cy="369332"/>
+          </a:xfrm>
+          <a:prstGeom prst="rect">
+            <a:avLst/>
+          </a:prstGeom>
+          <a:noFill/>
+        </p:spPr>
+        <p:txBody>
+          <a:bodyPr wrap="square" rtlCol="0">
+            <a:spAutoFit/>
+          </a:bodyPr>
+          <a:lstStyle/>
+          <a:p>
+            <a:r>
+              <a:rPr lang="zh-CN" altLang="en-US" dirty="0"/>
+              <a:t>此为小车顶部空间利用对比</a:t>
+            </a:r>
+            <a:endParaRPr lang="en-US" altLang="zh-CN" dirty="0"/>
+          </a:p>
+        </p:txBody>
+      </p:sp>
       <p:pic>
         <p:nvPicPr>
-          <p:cNvPr id="2" name="图片 1" descr="徽标&#10;&#10;AI 生成的内容可能不正确。">
-            <a:extLst>
-              <a:ext uri="{FF2B5EF4-FFF2-40B4-BE49-F238E27FC236}">
-                <a16:creationId xmlns:a16="http://schemas.microsoft.com/office/drawing/2014/main" id="{13C66E01-CEF4-4A60-178A-60CF8406C290}"/>
+          <p:cNvPr id="8" name="图片 7" descr="图形用户界面&#10;&#10;AI 生成的内容可能不正确。">
+            <a:extLst>
+              <a:ext uri="{FF2B5EF4-FFF2-40B4-BE49-F238E27FC236}">
+                <a16:creationId xmlns:a16="http://schemas.microsoft.com/office/drawing/2014/main" id="{FC76BB59-EA35-BB89-08C1-6A41ABF10FAE}"/>
               </a:ext>
             </a:extLst>
           </p:cNvPr>
           <p:cNvPicPr>
-            <a:picLocks/>
+            <a:picLocks noChangeAspect="1"/>
           </p:cNvPicPr>
           <p:nvPr/>
         </p:nvPicPr>
         <p:blipFill>
-          <a:blip r:embed="rId2">
+          <a:blip r:embed="rId4">
             <a:extLst>
               <a:ext uri="{28A0092B-C50C-407E-A947-70E740481C1C}">
                 <a14:useLocalDpi xmlns:a14="http://schemas.microsoft.com/office/drawing/2010/main" val="0"/>
               </a:ext>
             </a:extLst>
           </a:blip>
-          <a:srcRect t="29985" b="27316"/>
           <a:stretch>
             <a:fillRect/>
           </a:stretch>
         </p:blipFill>
         <p:spPr>
           <a:xfrm>
-            <a:off x="184195" y="166221"/>
-            <a:ext cx="1741461" cy="688543"/>
+            <a:off x="4960477" y="3933706"/>
+            <a:ext cx="3446922" cy="2924294"/>
+          </a:xfrm>
+          <a:prstGeom prst="rect">
+            <a:avLst/>
+          </a:prstGeom>
+        </p:spPr>
+      </p:pic>
+      <mc:AlternateContent xmlns:mc="http://schemas.openxmlformats.org/markup-compatibility/2006">
+        <mc:Choice xmlns:p14="http://schemas.microsoft.com/office/powerpoint/2010/main" Requires="p14">
+          <p:contentPart p14:bwMode="auto" r:id="rId5">
+            <p14:nvContentPartPr>
+              <p14:cNvPr id="9" name="墨迹 8">
+                <a:extLst>
+                  <a:ext uri="{FF2B5EF4-FFF2-40B4-BE49-F238E27FC236}">
+                    <a16:creationId xmlns:a16="http://schemas.microsoft.com/office/drawing/2014/main" id="{AAF77E09-B848-EE90-83CE-E6BE1D561686}"/>
+                  </a:ext>
+                </a:extLst>
+              </p14:cNvPr>
+              <p14:cNvContentPartPr/>
+              <p14:nvPr/>
+            </p14:nvContentPartPr>
+            <p14:xfrm>
+              <a:off x="5671560" y="4423710"/>
+              <a:ext cx="424440" cy="308520"/>
+            </p14:xfrm>
+          </p:contentPart>
+        </mc:Choice>
+        <mc:Fallback>
+          <p:pic>
+            <p:nvPicPr>
+              <p:cNvPr id="9" name="墨迹 8">
+                <a:extLst>
+                  <a:ext uri="{FF2B5EF4-FFF2-40B4-BE49-F238E27FC236}">
+                    <a16:creationId xmlns:a16="http://schemas.microsoft.com/office/drawing/2014/main" id="{AAF77E09-B848-EE90-83CE-E6BE1D561686}"/>
+                  </a:ext>
+                </a:extLst>
+              </p:cNvPr>
+              <p:cNvPicPr/>
+              <p:nvPr/>
+            </p:nvPicPr>
+            <p:blipFill>
+              <a:blip r:embed="rId6"/>
+              <a:stretch>
+                <a:fillRect/>
+              </a:stretch>
+            </p:blipFill>
+            <p:spPr>
+              <a:xfrm>
+                <a:off x="5665440" y="4417590"/>
+                <a:ext cx="436680" cy="320760"/>
+              </a:xfrm>
+              <a:prstGeom prst="rect">
+                <a:avLst/>
+              </a:prstGeom>
+            </p:spPr>
+          </p:pic>
+        </mc:Fallback>
+      </mc:AlternateContent>
+      <mc:AlternateContent xmlns:mc="http://schemas.openxmlformats.org/markup-compatibility/2006">
+        <mc:Choice xmlns:p14="http://schemas.microsoft.com/office/powerpoint/2010/main" Requires="p14">
+          <p:contentPart p14:bwMode="auto" r:id="rId7">
+            <p14:nvContentPartPr>
+              <p14:cNvPr id="10" name="墨迹 9">
+                <a:extLst>
+                  <a:ext uri="{FF2B5EF4-FFF2-40B4-BE49-F238E27FC236}">
+                    <a16:creationId xmlns:a16="http://schemas.microsoft.com/office/drawing/2014/main" id="{87E026B5-A712-4BB8-B2CA-CDEDC88F31DB}"/>
+                  </a:ext>
+                </a:extLst>
+              </p14:cNvPr>
+              <p14:cNvContentPartPr/>
+              <p14:nvPr/>
+            </p14:nvContentPartPr>
+            <p14:xfrm>
+              <a:off x="9931840" y="2283330"/>
+              <a:ext cx="611280" cy="581400"/>
+            </p14:xfrm>
+          </p:contentPart>
+        </mc:Choice>
+        <mc:Fallback>
+          <p:pic>
+            <p:nvPicPr>
+              <p:cNvPr id="10" name="墨迹 9">
+                <a:extLst>
+                  <a:ext uri="{FF2B5EF4-FFF2-40B4-BE49-F238E27FC236}">
+                    <a16:creationId xmlns:a16="http://schemas.microsoft.com/office/drawing/2014/main" id="{87E026B5-A712-4BB8-B2CA-CDEDC88F31DB}"/>
+                  </a:ext>
+                </a:extLst>
+              </p:cNvPr>
+              <p:cNvPicPr/>
+              <p:nvPr/>
+            </p:nvPicPr>
+            <p:blipFill>
+              <a:blip r:embed="rId8"/>
+              <a:stretch>
+                <a:fillRect/>
+              </a:stretch>
+            </p:blipFill>
+            <p:spPr>
+              <a:xfrm>
+                <a:off x="9925720" y="2277210"/>
+                <a:ext cx="623520" cy="593640"/>
+              </a:xfrm>
+              <a:prstGeom prst="rect">
+                <a:avLst/>
+              </a:prstGeom>
+            </p:spPr>
+          </p:pic>
+        </mc:Fallback>
+      </mc:AlternateContent>
+      <mc:AlternateContent xmlns:mc="http://schemas.openxmlformats.org/markup-compatibility/2006">
+        <mc:Choice xmlns:p14="http://schemas.microsoft.com/office/powerpoint/2010/main" Requires="p14">
+          <p:contentPart p14:bwMode="auto" r:id="rId9">
+            <p14:nvContentPartPr>
+              <p14:cNvPr id="11" name="墨迹 10">
+                <a:extLst>
+                  <a:ext uri="{FF2B5EF4-FFF2-40B4-BE49-F238E27FC236}">
+                    <a16:creationId xmlns:a16="http://schemas.microsoft.com/office/drawing/2014/main" id="{172A7160-13E0-4E47-CAFB-15E615D23D16}"/>
+                  </a:ext>
+                </a:extLst>
+              </p14:cNvPr>
+              <p14:cNvContentPartPr/>
+              <p14:nvPr/>
+            </p14:nvContentPartPr>
+            <p14:xfrm>
+              <a:off x="10102480" y="5851650"/>
+              <a:ext cx="842760" cy="799560"/>
+            </p14:xfrm>
+          </p:contentPart>
+        </mc:Choice>
+        <mc:Fallback>
+          <p:pic>
+            <p:nvPicPr>
+              <p:cNvPr id="11" name="墨迹 10">
+                <a:extLst>
+                  <a:ext uri="{FF2B5EF4-FFF2-40B4-BE49-F238E27FC236}">
+                    <a16:creationId xmlns:a16="http://schemas.microsoft.com/office/drawing/2014/main" id="{172A7160-13E0-4E47-CAFB-15E615D23D16}"/>
+                  </a:ext>
+                </a:extLst>
+              </p:cNvPr>
+              <p:cNvPicPr/>
+              <p:nvPr/>
+            </p:nvPicPr>
+            <p:blipFill>
+              <a:blip r:embed="rId10"/>
+              <a:stretch>
+                <a:fillRect/>
+              </a:stretch>
+            </p:blipFill>
+            <p:spPr>
+              <a:xfrm>
+                <a:off x="10096357" y="5845530"/>
+                <a:ext cx="855005" cy="811800"/>
+              </a:xfrm>
+              <a:prstGeom prst="rect">
+                <a:avLst/>
+              </a:prstGeom>
+            </p:spPr>
+          </p:pic>
+        </mc:Fallback>
+      </mc:AlternateContent>
+      <mc:AlternateContent xmlns:mc="http://schemas.openxmlformats.org/markup-compatibility/2006">
+        <mc:Choice xmlns:p14="http://schemas.microsoft.com/office/powerpoint/2010/main" Requires="p14">
+          <p:contentPart p14:bwMode="auto" r:id="rId11">
+            <p14:nvContentPartPr>
+              <p14:cNvPr id="12" name="墨迹 11">
+                <a:extLst>
+                  <a:ext uri="{FF2B5EF4-FFF2-40B4-BE49-F238E27FC236}">
+                    <a16:creationId xmlns:a16="http://schemas.microsoft.com/office/drawing/2014/main" id="{F39532B9-14E3-9F1E-6A2B-2E2431CB04D6}"/>
+                  </a:ext>
+                </a:extLst>
+              </p14:cNvPr>
+              <p14:cNvContentPartPr/>
+              <p14:nvPr/>
+            </p14:nvContentPartPr>
+            <p14:xfrm>
+              <a:off x="6982360" y="4271610"/>
+              <a:ext cx="381240" cy="460620"/>
+            </p14:xfrm>
+          </p:contentPart>
+        </mc:Choice>
+        <mc:Fallback>
+          <p:pic>
+            <p:nvPicPr>
+              <p:cNvPr id="12" name="墨迹 11">
+                <a:extLst>
+                  <a:ext uri="{FF2B5EF4-FFF2-40B4-BE49-F238E27FC236}">
+                    <a16:creationId xmlns:a16="http://schemas.microsoft.com/office/drawing/2014/main" id="{F39532B9-14E3-9F1E-6A2B-2E2431CB04D6}"/>
+                  </a:ext>
+                </a:extLst>
+              </p:cNvPr>
+              <p:cNvPicPr/>
+              <p:nvPr/>
+            </p:nvPicPr>
+            <p:blipFill>
+              <a:blip r:embed="rId12"/>
+              <a:stretch>
+                <a:fillRect/>
+              </a:stretch>
+            </p:blipFill>
+            <p:spPr>
+              <a:xfrm>
+                <a:off x="6976240" y="4265488"/>
+                <a:ext cx="393480" cy="472865"/>
+              </a:xfrm>
+              <a:prstGeom prst="rect">
+                <a:avLst/>
+              </a:prstGeom>
+            </p:spPr>
+          </p:pic>
+        </mc:Fallback>
+      </mc:AlternateContent>
+      <mc:AlternateContent xmlns:mc="http://schemas.openxmlformats.org/markup-compatibility/2006">
+        <mc:Choice xmlns:p14="http://schemas.microsoft.com/office/powerpoint/2010/main" Requires="p14">
+          <p:contentPart p14:bwMode="auto" r:id="rId13">
+            <p14:nvContentPartPr>
+              <p14:cNvPr id="13" name="墨迹 12">
+                <a:extLst>
+                  <a:ext uri="{FF2B5EF4-FFF2-40B4-BE49-F238E27FC236}">
+                    <a16:creationId xmlns:a16="http://schemas.microsoft.com/office/drawing/2014/main" id="{C2B3528C-9532-8C89-9398-501F941CEF01}"/>
+                  </a:ext>
+                </a:extLst>
+              </p14:cNvPr>
+              <p14:cNvContentPartPr/>
+              <p14:nvPr/>
+            </p14:nvContentPartPr>
+            <p14:xfrm>
+              <a:off x="5452620" y="6262770"/>
+              <a:ext cx="536760" cy="343080"/>
+            </p14:xfrm>
+          </p:contentPart>
+        </mc:Choice>
+        <mc:Fallback>
+          <p:pic>
+            <p:nvPicPr>
+              <p:cNvPr id="13" name="墨迹 12">
+                <a:extLst>
+                  <a:ext uri="{FF2B5EF4-FFF2-40B4-BE49-F238E27FC236}">
+                    <a16:creationId xmlns:a16="http://schemas.microsoft.com/office/drawing/2014/main" id="{C2B3528C-9532-8C89-9398-501F941CEF01}"/>
+                  </a:ext>
+                </a:extLst>
+              </p:cNvPr>
+              <p:cNvPicPr/>
+              <p:nvPr/>
+            </p:nvPicPr>
+            <p:blipFill>
+              <a:blip r:embed="rId14"/>
+              <a:stretch>
+                <a:fillRect/>
+              </a:stretch>
+            </p:blipFill>
+            <p:spPr>
+              <a:xfrm>
+                <a:off x="5446500" y="6256656"/>
+                <a:ext cx="549000" cy="355307"/>
+              </a:xfrm>
+              <a:prstGeom prst="rect">
+                <a:avLst/>
+              </a:prstGeom>
+            </p:spPr>
+          </p:pic>
+        </mc:Fallback>
+      </mc:AlternateContent>
+      <mc:AlternateContent xmlns:mc="http://schemas.openxmlformats.org/markup-compatibility/2006">
+        <mc:Choice xmlns:p14="http://schemas.microsoft.com/office/powerpoint/2010/main" Requires="p14">
+          <p:contentPart p14:bwMode="auto" r:id="rId15">
+            <p14:nvContentPartPr>
+              <p14:cNvPr id="14" name="墨迹 13">
+                <a:extLst>
+                  <a:ext uri="{FF2B5EF4-FFF2-40B4-BE49-F238E27FC236}">
+                    <a16:creationId xmlns:a16="http://schemas.microsoft.com/office/drawing/2014/main" id="{77AA83C2-85A5-3687-D076-072E8EB3E047}"/>
+                  </a:ext>
+                </a:extLst>
+              </p14:cNvPr>
+              <p14:cNvContentPartPr/>
+              <p14:nvPr/>
+            </p14:nvContentPartPr>
+            <p14:xfrm>
+              <a:off x="6836920" y="6279690"/>
+              <a:ext cx="599400" cy="326160"/>
+            </p14:xfrm>
+          </p:contentPart>
+        </mc:Choice>
+        <mc:Fallback>
+          <p:pic>
+            <p:nvPicPr>
+              <p:cNvPr id="14" name="墨迹 13">
+                <a:extLst>
+                  <a:ext uri="{FF2B5EF4-FFF2-40B4-BE49-F238E27FC236}">
+                    <a16:creationId xmlns:a16="http://schemas.microsoft.com/office/drawing/2014/main" id="{77AA83C2-85A5-3687-D076-072E8EB3E047}"/>
+                  </a:ext>
+                </a:extLst>
+              </p:cNvPr>
+              <p:cNvPicPr/>
+              <p:nvPr/>
+            </p:nvPicPr>
+            <p:blipFill>
+              <a:blip r:embed="rId16"/>
+              <a:stretch>
+                <a:fillRect/>
+              </a:stretch>
+            </p:blipFill>
+            <p:spPr>
+              <a:xfrm>
+                <a:off x="6830800" y="6273570"/>
+                <a:ext cx="611640" cy="338400"/>
+              </a:xfrm>
+              <a:prstGeom prst="rect">
+                <a:avLst/>
+              </a:prstGeom>
+            </p:spPr>
+          </p:pic>
+        </mc:Fallback>
+      </mc:AlternateContent>
+      <p:sp>
+        <p:nvSpPr>
+          <p:cNvPr id="15" name="文本框 14">
+            <a:extLst>
+              <a:ext uri="{FF2B5EF4-FFF2-40B4-BE49-F238E27FC236}">
+                <a16:creationId xmlns:a16="http://schemas.microsoft.com/office/drawing/2014/main" id="{72022C0C-4D14-B0E0-2910-6D38301DA40C}"/>
+              </a:ext>
+            </a:extLst>
+          </p:cNvPr>
+          <p:cNvSpPr txBox="1"/>
+          <p:nvPr/>
+        </p:nvSpPr>
+        <p:spPr>
+          <a:xfrm>
+            <a:off x="2018932" y="2000965"/>
+            <a:ext cx="6121768" cy="923330"/>
+          </a:xfrm>
+          <a:prstGeom prst="rect">
+            <a:avLst/>
+          </a:prstGeom>
+          <a:noFill/>
+        </p:spPr>
+        <p:txBody>
+          <a:bodyPr wrap="square" rtlCol="0">
+            <a:spAutoFit/>
+          </a:bodyPr>
+          <a:lstStyle/>
+          <a:p>
+            <a:r>
+              <a:rPr lang="zh-CN" altLang="en-US" dirty="0"/>
+              <a:t>本设计底部螺丝直接与外壳相连接，总体安装比右图红圈标注的地方的螺母连接更易连接（本设计还有很多有代表性的这类设计，只是使用这一典型设计做声明）</a:t>
+            </a:r>
+            <a:endParaRPr lang="en-US" altLang="zh-CN" dirty="0"/>
+          </a:p>
+        </p:txBody>
+      </p:sp>
+      <p:pic>
+        <p:nvPicPr>
+          <p:cNvPr id="17" name="图片 16" descr="图示&#10;&#10;AI 生成的内容可能不正确。">
+            <a:extLst>
+              <a:ext uri="{FF2B5EF4-FFF2-40B4-BE49-F238E27FC236}">
+                <a16:creationId xmlns:a16="http://schemas.microsoft.com/office/drawing/2014/main" id="{794ABE3B-959D-4907-31F6-9693E7F71B66}"/>
+              </a:ext>
+            </a:extLst>
+          </p:cNvPr>
+          <p:cNvPicPr>
+            <a:picLocks noChangeAspect="1"/>
+          </p:cNvPicPr>
+          <p:nvPr/>
+        </p:nvPicPr>
+        <p:blipFill>
+          <a:blip r:embed="rId17">
+            <a:extLst>
+              <a:ext uri="{28A0092B-C50C-407E-A947-70E740481C1C}">
+                <a14:useLocalDpi xmlns:a14="http://schemas.microsoft.com/office/drawing/2010/main" val="0"/>
+              </a:ext>
+            </a:extLst>
+          </a:blip>
+          <a:stretch>
+            <a:fillRect/>
+          </a:stretch>
+        </p:blipFill>
+        <p:spPr>
+          <a:xfrm>
+            <a:off x="2070655" y="4423710"/>
+            <a:ext cx="2882057" cy="2031471"/>
           </a:xfrm>
           <a:prstGeom prst="rect">
             <a:avLst/>
@@ -3914,7 +5019,7 @@
     </p:spTree>
     <p:extLst>
       <p:ext uri="{BB962C8B-B14F-4D97-AF65-F5344CB8AC3E}">
-        <p14:creationId xmlns:p14="http://schemas.microsoft.com/office/powerpoint/2010/main" val="398481103"/>
+        <p14:creationId xmlns:p14="http://schemas.microsoft.com/office/powerpoint/2010/main" val="3679176792"/>
       </p:ext>
     </p:extLst>
   </p:cSld>
@@ -3952,7 +5057,7 @@
         <p:cNvPr id="1" name="">
           <a:extLst>
             <a:ext uri="{FF2B5EF4-FFF2-40B4-BE49-F238E27FC236}">
-              <a16:creationId xmlns:a16="http://schemas.microsoft.com/office/drawing/2014/main" id="{8C3E3B45-CCB9-4C47-4066-6CF2606ED64A}"/>
+              <a16:creationId xmlns:a16="http://schemas.microsoft.com/office/drawing/2014/main" id="{E7A20043-3752-6B5B-403D-9898552D5545}"/>
             </a:ext>
           </a:extLst>
         </p:cNvPr>
@@ -3972,7 +5077,7 @@
           <p:cNvPr id="4" name="矩形 3">
             <a:extLst>
               <a:ext uri="{FF2B5EF4-FFF2-40B4-BE49-F238E27FC236}">
-                <a16:creationId xmlns:a16="http://schemas.microsoft.com/office/drawing/2014/main" id="{B7770353-D84D-1ECA-D72B-2B275BC24BB3}"/>
+                <a16:creationId xmlns:a16="http://schemas.microsoft.com/office/drawing/2014/main" id="{6D860C2E-D041-938F-7BF3-4F968BF8D321}"/>
               </a:ext>
             </a:extLst>
           </p:cNvPr>
@@ -3988,7 +5093,7 @@
             <a:avLst/>
           </a:prstGeom>
           <a:solidFill>
-            <a:srgbClr val="177BF5"/>
+            <a:srgbClr val="197DF7"/>
           </a:solidFill>
           <a:ln>
             <a:noFill/>
@@ -4019,12 +5124,42 @@
           </a:p>
         </p:txBody>
       </p:sp>
+      <p:pic>
+        <p:nvPicPr>
+          <p:cNvPr id="5" name="图片 4">
+            <a:extLst>
+              <a:ext uri="{FF2B5EF4-FFF2-40B4-BE49-F238E27FC236}">
+                <a16:creationId xmlns:a16="http://schemas.microsoft.com/office/drawing/2014/main" id="{9FC4C69D-A9D3-394E-B0FB-D701950D385F}"/>
+              </a:ext>
+            </a:extLst>
+          </p:cNvPr>
+          <p:cNvPicPr>
+            <a:picLocks noChangeAspect="1"/>
+          </p:cNvPicPr>
+          <p:nvPr/>
+        </p:nvPicPr>
+        <p:blipFill>
+          <a:blip r:embed="rId2"/>
+          <a:stretch>
+            <a:fillRect/>
+          </a:stretch>
+        </p:blipFill>
+        <p:spPr>
+          <a:xfrm>
+            <a:off x="184195" y="197312"/>
+            <a:ext cx="1741460" cy="586009"/>
+          </a:xfrm>
+          <a:prstGeom prst="rect">
+            <a:avLst/>
+          </a:prstGeom>
+        </p:spPr>
+      </p:pic>
       <p:sp>
         <p:nvSpPr>
           <p:cNvPr id="6" name="矩形 5">
             <a:extLst>
               <a:ext uri="{FF2B5EF4-FFF2-40B4-BE49-F238E27FC236}">
-                <a16:creationId xmlns:a16="http://schemas.microsoft.com/office/drawing/2014/main" id="{D1BA7F92-D9CE-8A0C-B511-4C88D3ECEE48}"/>
+                <a16:creationId xmlns:a16="http://schemas.microsoft.com/office/drawing/2014/main" id="{959AC269-712C-6EEF-0FE7-E187850D887E}"/>
               </a:ext>
             </a:extLst>
           </p:cNvPr>
@@ -4076,7 +5211,7 @@
           <p:cNvPr id="7" name="标题 1">
             <a:extLst>
               <a:ext uri="{FF2B5EF4-FFF2-40B4-BE49-F238E27FC236}">
-                <a16:creationId xmlns:a16="http://schemas.microsoft.com/office/drawing/2014/main" id="{4242F033-DCD9-F194-93B4-DC4D33BE030F}"/>
+                <a16:creationId xmlns:a16="http://schemas.microsoft.com/office/drawing/2014/main" id="{78EB67BA-7F2B-3602-45FC-3077F436A0E4}"/>
               </a:ext>
             </a:extLst>
           </p:cNvPr>
@@ -4128,37 +5263,196 @@
           </a:p>
         </p:txBody>
       </p:sp>
+      <p:sp>
+        <p:nvSpPr>
+          <p:cNvPr id="3" name="文本框 2">
+            <a:extLst>
+              <a:ext uri="{FF2B5EF4-FFF2-40B4-BE49-F238E27FC236}">
+                <a16:creationId xmlns:a16="http://schemas.microsoft.com/office/drawing/2014/main" id="{FF31735C-40BD-4519-F00D-5955AA9FE67D}"/>
+              </a:ext>
+            </a:extLst>
+          </p:cNvPr>
+          <p:cNvSpPr txBox="1"/>
+          <p:nvPr/>
+        </p:nvSpPr>
+        <p:spPr>
+          <a:xfrm>
+            <a:off x="2463432" y="5647241"/>
+            <a:ext cx="3315068" cy="369332"/>
+          </a:xfrm>
+          <a:prstGeom prst="rect">
+            <a:avLst/>
+          </a:prstGeom>
+          <a:noFill/>
+        </p:spPr>
+        <p:txBody>
+          <a:bodyPr wrap="square" rtlCol="0">
+            <a:spAutoFit/>
+          </a:bodyPr>
+          <a:lstStyle/>
+          <a:p>
+            <a:r>
+              <a:rPr lang="zh-CN" altLang="en-US" dirty="0"/>
+              <a:t>我们设计的布局紧凑结构合理</a:t>
+            </a:r>
+            <a:endParaRPr lang="en-US" altLang="zh-CN" dirty="0"/>
+          </a:p>
+        </p:txBody>
+      </p:sp>
       <p:pic>
         <p:nvPicPr>
-          <p:cNvPr id="2" name="图片 1" descr="徽标&#10;&#10;AI 生成的内容可能不正确。">
-            <a:extLst>
-              <a:ext uri="{FF2B5EF4-FFF2-40B4-BE49-F238E27FC236}">
-                <a16:creationId xmlns:a16="http://schemas.microsoft.com/office/drawing/2014/main" id="{6E82F45E-35AA-FBDA-9C6A-345E95D2DA9E}"/>
+          <p:cNvPr id="8" name="图片 7" descr="桌子上放着几个行李箱&#10;&#10;AI 生成的内容可能不正确。">
+            <a:extLst>
+              <a:ext uri="{FF2B5EF4-FFF2-40B4-BE49-F238E27FC236}">
+                <a16:creationId xmlns:a16="http://schemas.microsoft.com/office/drawing/2014/main" id="{D28099D9-5479-6C4C-8DF0-7D3E6ACFA76A}"/>
               </a:ext>
             </a:extLst>
           </p:cNvPr>
           <p:cNvPicPr>
-            <a:picLocks/>
+            <a:picLocks noChangeAspect="1"/>
           </p:cNvPicPr>
           <p:nvPr/>
         </p:nvPicPr>
         <p:blipFill>
-          <a:blip r:embed="rId2">
+          <a:blip r:embed="rId3">
             <a:extLst>
               <a:ext uri="{28A0092B-C50C-407E-A947-70E740481C1C}">
                 <a14:useLocalDpi xmlns:a14="http://schemas.microsoft.com/office/drawing/2010/main" val="0"/>
               </a:ext>
             </a:extLst>
           </a:blip>
-          <a:srcRect t="29985" b="27316"/>
           <a:stretch>
             <a:fillRect/>
           </a:stretch>
         </p:blipFill>
         <p:spPr>
           <a:xfrm>
-            <a:off x="184195" y="166221"/>
-            <a:ext cx="1741461" cy="688543"/>
+            <a:off x="6096000" y="2430868"/>
+            <a:ext cx="3870856" cy="2902007"/>
+          </a:xfrm>
+          <a:prstGeom prst="rect">
+            <a:avLst/>
+          </a:prstGeom>
+        </p:spPr>
+      </p:pic>
+      <p:sp>
+        <p:nvSpPr>
+          <p:cNvPr id="9" name="文本框 8">
+            <a:extLst>
+              <a:ext uri="{FF2B5EF4-FFF2-40B4-BE49-F238E27FC236}">
+                <a16:creationId xmlns:a16="http://schemas.microsoft.com/office/drawing/2014/main" id="{A538B731-DE51-5CE2-BDC0-6D626EFE2FDC}"/>
+              </a:ext>
+            </a:extLst>
+          </p:cNvPr>
+          <p:cNvSpPr txBox="1"/>
+          <p:nvPr/>
+        </p:nvSpPr>
+        <p:spPr>
+          <a:xfrm>
+            <a:off x="6152782" y="5647241"/>
+            <a:ext cx="3315068" cy="369332"/>
+          </a:xfrm>
+          <a:prstGeom prst="rect">
+            <a:avLst/>
+          </a:prstGeom>
+          <a:noFill/>
+        </p:spPr>
+        <p:txBody>
+          <a:bodyPr wrap="square" rtlCol="0">
+            <a:spAutoFit/>
+          </a:bodyPr>
+          <a:lstStyle/>
+          <a:p>
+            <a:r>
+              <a:rPr lang="zh-CN" altLang="en-US" dirty="0"/>
+              <a:t>原先的较多空间浪费</a:t>
+            </a:r>
+            <a:endParaRPr lang="en-US" altLang="zh-CN" dirty="0"/>
+          </a:p>
+        </p:txBody>
+      </p:sp>
+      <p:sp>
+        <p:nvSpPr>
+          <p:cNvPr id="10" name="文本框 9">
+            <a:extLst>
+              <a:ext uri="{FF2B5EF4-FFF2-40B4-BE49-F238E27FC236}">
+                <a16:creationId xmlns:a16="http://schemas.microsoft.com/office/drawing/2014/main" id="{D05F7EE6-F8C4-A597-FC53-082F9C77DA58}"/>
+              </a:ext>
+            </a:extLst>
+          </p:cNvPr>
+          <p:cNvSpPr txBox="1"/>
+          <p:nvPr/>
+        </p:nvSpPr>
+        <p:spPr>
+          <a:xfrm>
+            <a:off x="2025282" y="1065541"/>
+            <a:ext cx="5663991" cy="707886"/>
+          </a:xfrm>
+          <a:prstGeom prst="rect">
+            <a:avLst/>
+          </a:prstGeom>
+          <a:noFill/>
+        </p:spPr>
+        <p:txBody>
+          <a:bodyPr wrap="square" rtlCol="0">
+            <a:spAutoFit/>
+          </a:bodyPr>
+          <a:lstStyle/>
+          <a:p>
+            <a:r>
+              <a:rPr lang="zh-CN" altLang="en-US" sz="2000" b="1" dirty="0"/>
+              <a:t>此为小车内部结构的对比</a:t>
+            </a:r>
+            <a:r>
+              <a:rPr lang="en-US" altLang="zh-CN" sz="2000" b="1" dirty="0"/>
+              <a:t>,</a:t>
+            </a:r>
+            <a:r>
+              <a:rPr lang="zh-CN" altLang="en-US" sz="2000" b="1" dirty="0"/>
+              <a:t>我们在设计时极大的提高的轻型</a:t>
+            </a:r>
+            <a:r>
+              <a:rPr lang="en-US" altLang="zh-CN" sz="2000" b="1" dirty="0"/>
+              <a:t>AGV</a:t>
+            </a:r>
+            <a:r>
+              <a:rPr lang="zh-CN" altLang="en-US" sz="2000" b="1" dirty="0"/>
+              <a:t>小车的集成度</a:t>
+            </a:r>
+            <a:endParaRPr lang="en-US" altLang="zh-CN" sz="2000" b="1" dirty="0"/>
+          </a:p>
+        </p:txBody>
+      </p:sp>
+      <p:pic>
+        <p:nvPicPr>
+          <p:cNvPr id="11" name="图片 10" descr="图示, 工程绘图&#10;&#10;AI 生成的内容可能不正确。">
+            <a:extLst>
+              <a:ext uri="{FF2B5EF4-FFF2-40B4-BE49-F238E27FC236}">
+                <a16:creationId xmlns:a16="http://schemas.microsoft.com/office/drawing/2014/main" id="{476245EA-4B80-ACE8-C6D3-4266F7675498}"/>
+              </a:ext>
+            </a:extLst>
+          </p:cNvPr>
+          <p:cNvPicPr>
+            <a:picLocks noChangeAspect="1"/>
+          </p:cNvPicPr>
+          <p:nvPr/>
+        </p:nvPicPr>
+        <p:blipFill>
+          <a:blip r:embed="rId4">
+            <a:extLst>
+              <a:ext uri="{28A0092B-C50C-407E-A947-70E740481C1C}">
+                <a14:useLocalDpi xmlns:a14="http://schemas.microsoft.com/office/drawing/2010/main" val="0"/>
+              </a:ext>
+            </a:extLst>
+          </a:blip>
+          <a:stretch>
+            <a:fillRect/>
+          </a:stretch>
+        </p:blipFill>
+        <p:spPr>
+          <a:xfrm>
+            <a:off x="2386369" y="2465938"/>
+            <a:ext cx="3469193" cy="2866937"/>
           </a:xfrm>
           <a:prstGeom prst="rect">
             <a:avLst/>
@@ -4168,7 +5462,7 @@
     </p:spTree>
     <p:extLst>
       <p:ext uri="{BB962C8B-B14F-4D97-AF65-F5344CB8AC3E}">
-        <p14:creationId xmlns:p14="http://schemas.microsoft.com/office/powerpoint/2010/main" val="350244765"/>
+        <p14:creationId xmlns:p14="http://schemas.microsoft.com/office/powerpoint/2010/main" val="398481103"/>
       </p:ext>
     </p:extLst>
   </p:cSld>
@@ -4206,7 +5500,7 @@
         <p:cNvPr id="1" name="">
           <a:extLst>
             <a:ext uri="{FF2B5EF4-FFF2-40B4-BE49-F238E27FC236}">
-              <a16:creationId xmlns:a16="http://schemas.microsoft.com/office/drawing/2014/main" id="{B1ED2D43-DEE3-B75E-637B-B0F4B7AC9999}"/>
+              <a16:creationId xmlns:a16="http://schemas.microsoft.com/office/drawing/2014/main" id="{8C3E3B45-CCB9-4C47-4066-6CF2606ED64A}"/>
             </a:ext>
           </a:extLst>
         </p:cNvPr>
@@ -4226,7 +5520,7 @@
           <p:cNvPr id="4" name="矩形 3">
             <a:extLst>
               <a:ext uri="{FF2B5EF4-FFF2-40B4-BE49-F238E27FC236}">
-                <a16:creationId xmlns:a16="http://schemas.microsoft.com/office/drawing/2014/main" id="{30C7F41B-A665-5E04-71D6-3E29222DA6F3}"/>
+                <a16:creationId xmlns:a16="http://schemas.microsoft.com/office/drawing/2014/main" id="{B7770353-D84D-1ECA-D72B-2B275BC24BB3}"/>
               </a:ext>
             </a:extLst>
           </p:cNvPr>
@@ -4242,7 +5536,7 @@
             <a:avLst/>
           </a:prstGeom>
           <a:solidFill>
-            <a:srgbClr val="177BF5"/>
+            <a:srgbClr val="197DF7"/>
           </a:solidFill>
           <a:ln>
             <a:noFill/>
@@ -4273,12 +5567,42 @@
           </a:p>
         </p:txBody>
       </p:sp>
+      <p:pic>
+        <p:nvPicPr>
+          <p:cNvPr id="5" name="图片 4">
+            <a:extLst>
+              <a:ext uri="{FF2B5EF4-FFF2-40B4-BE49-F238E27FC236}">
+                <a16:creationId xmlns:a16="http://schemas.microsoft.com/office/drawing/2014/main" id="{4763D687-E012-6FBD-F753-CFEA6233DE7F}"/>
+              </a:ext>
+            </a:extLst>
+          </p:cNvPr>
+          <p:cNvPicPr>
+            <a:picLocks noChangeAspect="1"/>
+          </p:cNvPicPr>
+          <p:nvPr/>
+        </p:nvPicPr>
+        <p:blipFill>
+          <a:blip r:embed="rId2"/>
+          <a:stretch>
+            <a:fillRect/>
+          </a:stretch>
+        </p:blipFill>
+        <p:spPr>
+          <a:xfrm>
+            <a:off x="184195" y="197312"/>
+            <a:ext cx="1741460" cy="586009"/>
+          </a:xfrm>
+          <a:prstGeom prst="rect">
+            <a:avLst/>
+          </a:prstGeom>
+        </p:spPr>
+      </p:pic>
       <p:sp>
         <p:nvSpPr>
           <p:cNvPr id="6" name="矩形 5">
             <a:extLst>
               <a:ext uri="{FF2B5EF4-FFF2-40B4-BE49-F238E27FC236}">
-                <a16:creationId xmlns:a16="http://schemas.microsoft.com/office/drawing/2014/main" id="{BD5B362D-720E-5B69-5579-842BC1C1A454}"/>
+                <a16:creationId xmlns:a16="http://schemas.microsoft.com/office/drawing/2014/main" id="{D1BA7F92-D9CE-8A0C-B511-4C88D3ECEE48}"/>
               </a:ext>
             </a:extLst>
           </p:cNvPr>
@@ -4330,7 +5654,7 @@
           <p:cNvPr id="7" name="标题 1">
             <a:extLst>
               <a:ext uri="{FF2B5EF4-FFF2-40B4-BE49-F238E27FC236}">
-                <a16:creationId xmlns:a16="http://schemas.microsoft.com/office/drawing/2014/main" id="{D9D74187-D9FF-008C-4D63-99989B54BF30}"/>
+                <a16:creationId xmlns:a16="http://schemas.microsoft.com/office/drawing/2014/main" id="{4242F033-DCD9-F194-93B4-DC4D33BE030F}"/>
               </a:ext>
             </a:extLst>
           </p:cNvPr>
@@ -4384,45 +5708,134 @@
       </p:sp>
       <p:pic>
         <p:nvPicPr>
-          <p:cNvPr id="2" name="图片 1" descr="徽标&#10;&#10;AI 生成的内容可能不正确。">
-            <a:extLst>
-              <a:ext uri="{FF2B5EF4-FFF2-40B4-BE49-F238E27FC236}">
-                <a16:creationId xmlns:a16="http://schemas.microsoft.com/office/drawing/2014/main" id="{CD2C38C8-149A-BDAE-8668-DA0517A8EF51}"/>
+          <p:cNvPr id="2" name="图片 1" descr="图片包含 游戏机, 电子, 话筒, 桌子&#10;&#10;AI 生成的内容可能不正确。">
+            <a:extLst>
+              <a:ext uri="{FF2B5EF4-FFF2-40B4-BE49-F238E27FC236}">
+                <a16:creationId xmlns:a16="http://schemas.microsoft.com/office/drawing/2014/main" id="{20985C99-B5FA-0B90-D981-B576D4F23944}"/>
               </a:ext>
             </a:extLst>
           </p:cNvPr>
           <p:cNvPicPr>
-            <a:picLocks/>
+            <a:picLocks noChangeAspect="1"/>
           </p:cNvPicPr>
           <p:nvPr/>
         </p:nvPicPr>
         <p:blipFill>
-          <a:blip r:embed="rId2">
+          <a:blip r:embed="rId3">
             <a:extLst>
               <a:ext uri="{28A0092B-C50C-407E-A947-70E740481C1C}">
                 <a14:useLocalDpi xmlns:a14="http://schemas.microsoft.com/office/drawing/2010/main" val="0"/>
               </a:ext>
             </a:extLst>
           </a:blip>
-          <a:srcRect t="29985" b="27316"/>
           <a:stretch>
             <a:fillRect/>
           </a:stretch>
         </p:blipFill>
         <p:spPr>
           <a:xfrm>
-            <a:off x="184195" y="166221"/>
-            <a:ext cx="1741461" cy="688543"/>
+            <a:off x="8074479" y="1080655"/>
+            <a:ext cx="3518401" cy="2136529"/>
           </a:xfrm>
           <a:prstGeom prst="rect">
             <a:avLst/>
           </a:prstGeom>
         </p:spPr>
       </p:pic>
+      <p:pic>
+        <p:nvPicPr>
+          <p:cNvPr id="3" name="图片 2" descr="图形用户界面&#10;&#10;AI 生成的内容可能不正确。">
+            <a:extLst>
+              <a:ext uri="{FF2B5EF4-FFF2-40B4-BE49-F238E27FC236}">
+                <a16:creationId xmlns:a16="http://schemas.microsoft.com/office/drawing/2014/main" id="{AB271C9E-9789-0882-232F-4E92E8F6051B}"/>
+              </a:ext>
+            </a:extLst>
+          </p:cNvPr>
+          <p:cNvPicPr>
+            <a:picLocks noChangeAspect="1"/>
+          </p:cNvPicPr>
+          <p:nvPr/>
+        </p:nvPicPr>
+        <p:blipFill>
+          <a:blip r:embed="rId4">
+            <a:extLst>
+              <a:ext uri="{28A0092B-C50C-407E-A947-70E740481C1C}">
+                <a14:useLocalDpi xmlns:a14="http://schemas.microsoft.com/office/drawing/2010/main" val="0"/>
+              </a:ext>
+            </a:extLst>
+          </a:blip>
+          <a:stretch>
+            <a:fillRect/>
+          </a:stretch>
+        </p:blipFill>
+        <p:spPr>
+          <a:xfrm>
+            <a:off x="8074479" y="3640817"/>
+            <a:ext cx="3174772" cy="2302785"/>
+          </a:xfrm>
+          <a:prstGeom prst="rect">
+            <a:avLst/>
+          </a:prstGeom>
+        </p:spPr>
+      </p:pic>
+      <p:sp>
+        <p:nvSpPr>
+          <p:cNvPr id="9" name="文本框 8">
+            <a:extLst>
+              <a:ext uri="{FF2B5EF4-FFF2-40B4-BE49-F238E27FC236}">
+                <a16:creationId xmlns:a16="http://schemas.microsoft.com/office/drawing/2014/main" id="{F3C35CDF-9F05-3EB5-E5A2-A08F7017EBBA}"/>
+              </a:ext>
+            </a:extLst>
+          </p:cNvPr>
+          <p:cNvSpPr txBox="1"/>
+          <p:nvPr/>
+        </p:nvSpPr>
+        <p:spPr>
+          <a:xfrm>
+            <a:off x="2231406" y="1410255"/>
+            <a:ext cx="4971308" cy="3693319"/>
+          </a:xfrm>
+          <a:prstGeom prst="rect">
+            <a:avLst/>
+          </a:prstGeom>
+          <a:noFill/>
+        </p:spPr>
+        <p:txBody>
+          <a:bodyPr wrap="square">
+            <a:spAutoFit/>
+          </a:bodyPr>
+          <a:lstStyle/>
+          <a:p>
+            <a:r>
+              <a:rPr lang="zh-CN" altLang="en-US" dirty="0"/>
+              <a:t>        </a:t>
+            </a:r>
+            <a:r>
+              <a:rPr lang="zh-CN" altLang="en-US" sz="2400" b="1" dirty="0"/>
+              <a:t>原先的设计使用螺栓进行锁紧并提供纵向拉力，所有力汇集到螺栓上面，受力非常不合理。</a:t>
+            </a:r>
+            <a:endParaRPr lang="en-US" altLang="zh-CN" sz="2400" b="1" dirty="0"/>
+          </a:p>
+          <a:p>
+            <a:r>
+              <a:rPr lang="en-US" altLang="zh-CN" sz="2400" b="1" dirty="0"/>
+              <a:t>      </a:t>
+            </a:r>
+            <a:r>
+              <a:rPr lang="zh-CN" altLang="en-US" sz="2400" b="1" dirty="0"/>
+              <a:t>我们的设计使用悬挂直接与底板解除传导力，不仅螺栓受力更合理，而且支撑架的受力同样更合理。悬挂的顶部直接是支撑架，底盘不传导车体本身重量以外的其他力是非承载式底盘。</a:t>
+            </a:r>
+            <a:endParaRPr lang="en-US" altLang="zh-CN" sz="2400" b="1" dirty="0"/>
+          </a:p>
+          <a:p>
+            <a:endParaRPr lang="en-US" altLang="zh-CN" dirty="0"/>
+          </a:p>
+        </p:txBody>
+      </p:sp>
     </p:spTree>
     <p:extLst>
       <p:ext uri="{BB962C8B-B14F-4D97-AF65-F5344CB8AC3E}">
-        <p14:creationId xmlns:p14="http://schemas.microsoft.com/office/powerpoint/2010/main" val="1071050765"/>
+        <p14:creationId xmlns:p14="http://schemas.microsoft.com/office/powerpoint/2010/main" val="350244765"/>
       </p:ext>
     </p:extLst>
   </p:cSld>
@@ -4496,7 +5909,7 @@
             <a:avLst/>
           </a:prstGeom>
           <a:solidFill>
-            <a:srgbClr val="177BF5"/>
+            <a:srgbClr val="177DF8"/>
           </a:solidFill>
           <a:ln>
             <a:noFill/>
@@ -4531,6 +5944,36 @@
           </a:p>
         </p:txBody>
       </p:sp>
+      <p:pic>
+        <p:nvPicPr>
+          <p:cNvPr id="11" name="图片 10">
+            <a:extLst>
+              <a:ext uri="{FF2B5EF4-FFF2-40B4-BE49-F238E27FC236}">
+                <a16:creationId xmlns:a16="http://schemas.microsoft.com/office/drawing/2014/main" id="{10E42A88-06D6-00B5-9DD2-3BF1F26DD770}"/>
+              </a:ext>
+            </a:extLst>
+          </p:cNvPr>
+          <p:cNvPicPr>
+            <a:picLocks noChangeAspect="1"/>
+          </p:cNvPicPr>
+          <p:nvPr/>
+        </p:nvPicPr>
+        <p:blipFill>
+          <a:blip r:embed="rId2"/>
+          <a:stretch>
+            <a:fillRect/>
+          </a:stretch>
+        </p:blipFill>
+        <p:spPr>
+          <a:xfrm>
+            <a:off x="184195" y="197312"/>
+            <a:ext cx="1741460" cy="586009"/>
+          </a:xfrm>
+          <a:prstGeom prst="rect">
+            <a:avLst/>
+          </a:prstGeom>
+        </p:spPr>
+      </p:pic>
       <p:sp>
         <p:nvSpPr>
           <p:cNvPr id="12" name="矩形 11">
@@ -4545,7 +5988,7 @@
         </p:nvSpPr>
         <p:spPr>
           <a:xfrm>
-            <a:off x="-50800" y="4148807"/>
+            <a:off x="0" y="4148805"/>
             <a:ext cx="12192000" cy="2709193"/>
           </a:xfrm>
           <a:prstGeom prst="rect">
@@ -4678,7 +6121,10 @@
             <a:r>
               <a:rPr lang="en-US" altLang="zh-CN" sz="1400" b="1" dirty="0">
                 <a:solidFill>
-                  <a:srgbClr val="0096B4"/>
+                  <a:schemeClr val="accent4">
+                    <a:lumMod val="95000"/>
+                    <a:lumOff val="5000"/>
+                  </a:schemeClr>
                 </a:solidFill>
                 <a:latin typeface="Arial" panose="020B0604020202020204" pitchFamily="34" charset="0"/>
                 <a:cs typeface="Arial" panose="020B0604020202020204" pitchFamily="34" charset="0"/>
@@ -4688,16 +6134,22 @@
             <a:fld id="{5853BA87-C0A4-4D40-A7D0-264FBDFF6174}" type="datetime9">
               <a:rPr lang="en-US" altLang="zh-CN" sz="1400" b="1" dirty="0" smtClean="0">
                 <a:solidFill>
-                  <a:srgbClr val="0096B4"/>
+                  <a:schemeClr val="accent4">
+                    <a:lumMod val="95000"/>
+                    <a:lumOff val="5000"/>
+                  </a:schemeClr>
                 </a:solidFill>
                 <a:latin typeface="Arial" panose="020B0604020202020204" pitchFamily="34" charset="0"/>
                 <a:cs typeface="Arial" panose="020B0604020202020204" pitchFamily="34" charset="0"/>
               </a:rPr>
-              <a:t>11/14/2025 10:58:08 AM</a:t>
+              <a:t>11/24/2025 5:24:34 PM</a:t>
             </a:fld>
             <a:endParaRPr lang="zh-CN" altLang="en-US" sz="1400" b="1" dirty="0">
               <a:solidFill>
-                <a:srgbClr val="0096B4"/>
+                <a:schemeClr val="accent4">
+                  <a:lumMod val="95000"/>
+                  <a:lumOff val="5000"/>
+                </a:schemeClr>
               </a:solidFill>
               <a:latin typeface="Arial" panose="020B0604020202020204" pitchFamily="34" charset="0"/>
               <a:cs typeface="Arial" panose="020B0604020202020204" pitchFamily="34" charset="0"/>
@@ -4741,43 +6193,6 @@
           </a:p>
         </p:txBody>
       </p:sp>
-      <p:pic>
-        <p:nvPicPr>
-          <p:cNvPr id="2" name="图片 1" descr="徽标&#10;&#10;AI 生成的内容可能不正确。">
-            <a:extLst>
-              <a:ext uri="{FF2B5EF4-FFF2-40B4-BE49-F238E27FC236}">
-                <a16:creationId xmlns:a16="http://schemas.microsoft.com/office/drawing/2014/main" id="{AA3F957F-24AE-94C9-BF68-E0C0B7232515}"/>
-              </a:ext>
-            </a:extLst>
-          </p:cNvPr>
-          <p:cNvPicPr>
-            <a:picLocks/>
-          </p:cNvPicPr>
-          <p:nvPr/>
-        </p:nvPicPr>
-        <p:blipFill>
-          <a:blip r:embed="rId2">
-            <a:extLst>
-              <a:ext uri="{28A0092B-C50C-407E-A947-70E740481C1C}">
-                <a14:useLocalDpi xmlns:a14="http://schemas.microsoft.com/office/drawing/2010/main" val="0"/>
-              </a:ext>
-            </a:extLst>
-          </a:blip>
-          <a:srcRect t="29985" b="27316"/>
-          <a:stretch>
-            <a:fillRect/>
-          </a:stretch>
-        </p:blipFill>
-        <p:spPr>
-          <a:xfrm>
-            <a:off x="184195" y="166221"/>
-            <a:ext cx="1741461" cy="688543"/>
-          </a:xfrm>
-          <a:prstGeom prst="rect">
-            <a:avLst/>
-          </a:prstGeom>
-        </p:spPr>
-      </p:pic>
     </p:spTree>
     <p:extLst>
       <p:ext uri="{BB962C8B-B14F-4D97-AF65-F5344CB8AC3E}">
@@ -4855,7 +6270,7 @@
             <a:avLst/>
           </a:prstGeom>
           <a:solidFill>
-            <a:srgbClr val="177BF5"/>
+            <a:srgbClr val="197DF7"/>
           </a:solidFill>
           <a:ln>
             <a:noFill/>
@@ -4886,6 +6301,36 @@
           </a:p>
         </p:txBody>
       </p:sp>
+      <p:pic>
+        <p:nvPicPr>
+          <p:cNvPr id="5" name="图片 4">
+            <a:extLst>
+              <a:ext uri="{FF2B5EF4-FFF2-40B4-BE49-F238E27FC236}">
+                <a16:creationId xmlns:a16="http://schemas.microsoft.com/office/drawing/2014/main" id="{AEE9DF26-9375-36B1-CF45-4E30B26548C6}"/>
+              </a:ext>
+            </a:extLst>
+          </p:cNvPr>
+          <p:cNvPicPr>
+            <a:picLocks noChangeAspect="1"/>
+          </p:cNvPicPr>
+          <p:nvPr/>
+        </p:nvPicPr>
+        <p:blipFill>
+          <a:blip r:embed="rId2"/>
+          <a:stretch>
+            <a:fillRect/>
+          </a:stretch>
+        </p:blipFill>
+        <p:spPr>
+          <a:xfrm>
+            <a:off x="184195" y="197312"/>
+            <a:ext cx="1741460" cy="586009"/>
+          </a:xfrm>
+          <a:prstGeom prst="rect">
+            <a:avLst/>
+          </a:prstGeom>
+        </p:spPr>
+      </p:pic>
       <p:sp>
         <p:nvSpPr>
           <p:cNvPr id="6" name="矩形 5">
@@ -4997,41 +6442,99 @@
       </p:sp>
       <p:pic>
         <p:nvPicPr>
-          <p:cNvPr id="2" name="图片 1" descr="徽标&#10;&#10;AI 生成的内容可能不正确。">
-            <a:extLst>
-              <a:ext uri="{FF2B5EF4-FFF2-40B4-BE49-F238E27FC236}">
-                <a16:creationId xmlns:a16="http://schemas.microsoft.com/office/drawing/2014/main" id="{B5061354-F9A3-2BE0-ED9C-76C0BCCB0434}"/>
+          <p:cNvPr id="2" name="图片 1" descr="图片包含 游戏机, 桌子, 雪, 男人&#10;&#10;AI 生成的内容可能不正确。">
+            <a:extLst>
+              <a:ext uri="{FF2B5EF4-FFF2-40B4-BE49-F238E27FC236}">
+                <a16:creationId xmlns:a16="http://schemas.microsoft.com/office/drawing/2014/main" id="{93AE0AA5-5D1A-0BF0-9940-5472A97F0772}"/>
               </a:ext>
             </a:extLst>
           </p:cNvPr>
           <p:cNvPicPr>
-            <a:picLocks/>
+            <a:picLocks noChangeAspect="1"/>
           </p:cNvPicPr>
           <p:nvPr/>
         </p:nvPicPr>
         <p:blipFill>
-          <a:blip r:embed="rId2">
+          <a:blip r:embed="rId3">
             <a:extLst>
               <a:ext uri="{28A0092B-C50C-407E-A947-70E740481C1C}">
                 <a14:useLocalDpi xmlns:a14="http://schemas.microsoft.com/office/drawing/2010/main" val="0"/>
               </a:ext>
             </a:extLst>
           </a:blip>
-          <a:srcRect t="29985" b="27316"/>
           <a:stretch>
             <a:fillRect/>
           </a:stretch>
         </p:blipFill>
         <p:spPr>
           <a:xfrm>
-            <a:off x="184195" y="166221"/>
-            <a:ext cx="1741461" cy="688543"/>
+            <a:off x="7029750" y="1796554"/>
+            <a:ext cx="4557897" cy="3605776"/>
           </a:xfrm>
           <a:prstGeom prst="rect">
             <a:avLst/>
           </a:prstGeom>
         </p:spPr>
       </p:pic>
+      <p:sp>
+        <p:nvSpPr>
+          <p:cNvPr id="3" name="文本框 2">
+            <a:extLst>
+              <a:ext uri="{FF2B5EF4-FFF2-40B4-BE49-F238E27FC236}">
+                <a16:creationId xmlns:a16="http://schemas.microsoft.com/office/drawing/2014/main" id="{15B7260E-446B-E167-E7AB-FA6018459274}"/>
+              </a:ext>
+            </a:extLst>
+          </p:cNvPr>
+          <p:cNvSpPr txBox="1"/>
+          <p:nvPr/>
+        </p:nvSpPr>
+        <p:spPr>
+          <a:xfrm>
+            <a:off x="2231406" y="2828835"/>
+            <a:ext cx="4114800" cy="1938992"/>
+          </a:xfrm>
+          <a:prstGeom prst="rect">
+            <a:avLst/>
+          </a:prstGeom>
+          <a:noFill/>
+        </p:spPr>
+        <p:txBody>
+          <a:bodyPr wrap="square" rtlCol="0">
+            <a:spAutoFit/>
+          </a:bodyPr>
+          <a:lstStyle/>
+          <a:p>
+            <a:r>
+              <a:rPr lang="zh-CN" altLang="en-US" sz="2400" b="1" dirty="0"/>
+              <a:t>该轻型</a:t>
+            </a:r>
+            <a:r>
+              <a:rPr lang="en-US" altLang="zh-CN" sz="2400" b="1" dirty="0"/>
+              <a:t>AGV</a:t>
+            </a:r>
+            <a:r>
+              <a:rPr lang="zh-CN" altLang="en-US" sz="2400" b="1" dirty="0"/>
+              <a:t>小车整体尺寸为</a:t>
+            </a:r>
+            <a:r>
+              <a:rPr lang="en-US" altLang="zh-CN" sz="2400" b="1" dirty="0"/>
+              <a:t>517*468.5*242mm,</a:t>
+            </a:r>
+            <a:r>
+              <a:rPr lang="zh-CN" altLang="en-US" sz="2400" b="1" dirty="0"/>
+              <a:t>未达到当时控制体积的目的，横向最大长度超过了同类型产品</a:t>
+            </a:r>
+            <a:r>
+              <a:rPr lang="en-US" altLang="zh-CN" sz="2400" b="1" dirty="0"/>
+              <a:t>500mm</a:t>
+            </a:r>
+            <a:r>
+              <a:rPr lang="zh-CN" altLang="en-US" sz="2400" b="1" dirty="0"/>
+              <a:t>的长度</a:t>
+            </a:r>
+          </a:p>
+        </p:txBody>
+      </p:sp>
     </p:spTree>
     <p:extLst>
       <p:ext uri="{BB962C8B-B14F-4D97-AF65-F5344CB8AC3E}">
@@ -5073,7 +6576,7 @@
         <p:cNvPr id="1" name="">
           <a:extLst>
             <a:ext uri="{FF2B5EF4-FFF2-40B4-BE49-F238E27FC236}">
-              <a16:creationId xmlns:a16="http://schemas.microsoft.com/office/drawing/2014/main" id="{05C4C00F-8887-D131-E19F-062507C39D7A}"/>
+              <a16:creationId xmlns:a16="http://schemas.microsoft.com/office/drawing/2014/main" id="{B1ED2D43-DEE3-B75E-637B-B0F4B7AC9999}"/>
             </a:ext>
           </a:extLst>
         </p:cNvPr>
@@ -5093,7 +6596,7 @@
           <p:cNvPr id="4" name="矩形 3">
             <a:extLst>
               <a:ext uri="{FF2B5EF4-FFF2-40B4-BE49-F238E27FC236}">
-                <a16:creationId xmlns:a16="http://schemas.microsoft.com/office/drawing/2014/main" id="{5D838823-4074-60FD-918B-DE20F96E103C}"/>
+                <a16:creationId xmlns:a16="http://schemas.microsoft.com/office/drawing/2014/main" id="{30C7F41B-A665-5E04-71D6-3E29222DA6F3}"/>
               </a:ext>
             </a:extLst>
           </p:cNvPr>
@@ -5109,7 +6612,7 @@
             <a:avLst/>
           </a:prstGeom>
           <a:solidFill>
-            <a:srgbClr val="177BF5"/>
+            <a:srgbClr val="197DF7"/>
           </a:solidFill>
           <a:ln>
             <a:noFill/>
@@ -5140,12 +6643,42 @@
           </a:p>
         </p:txBody>
       </p:sp>
+      <p:pic>
+        <p:nvPicPr>
+          <p:cNvPr id="5" name="图片 4">
+            <a:extLst>
+              <a:ext uri="{FF2B5EF4-FFF2-40B4-BE49-F238E27FC236}">
+                <a16:creationId xmlns:a16="http://schemas.microsoft.com/office/drawing/2014/main" id="{ED719459-33EF-30D8-A966-CE1F1D1892BD}"/>
+              </a:ext>
+            </a:extLst>
+          </p:cNvPr>
+          <p:cNvPicPr>
+            <a:picLocks noChangeAspect="1"/>
+          </p:cNvPicPr>
+          <p:nvPr/>
+        </p:nvPicPr>
+        <p:blipFill>
+          <a:blip r:embed="rId2"/>
+          <a:stretch>
+            <a:fillRect/>
+          </a:stretch>
+        </p:blipFill>
+        <p:spPr>
+          <a:xfrm>
+            <a:off x="184195" y="197312"/>
+            <a:ext cx="1741460" cy="586009"/>
+          </a:xfrm>
+          <a:prstGeom prst="rect">
+            <a:avLst/>
+          </a:prstGeom>
+        </p:spPr>
+      </p:pic>
       <p:sp>
         <p:nvSpPr>
           <p:cNvPr id="6" name="矩形 5">
             <a:extLst>
               <a:ext uri="{FF2B5EF4-FFF2-40B4-BE49-F238E27FC236}">
-                <a16:creationId xmlns:a16="http://schemas.microsoft.com/office/drawing/2014/main" id="{EC14F729-D65E-9381-2DF8-4FE946E3DAA0}"/>
+                <a16:creationId xmlns:a16="http://schemas.microsoft.com/office/drawing/2014/main" id="{BD5B362D-720E-5B69-5579-842BC1C1A454}"/>
               </a:ext>
             </a:extLst>
           </p:cNvPr>
@@ -5197,7 +6730,7 @@
           <p:cNvPr id="7" name="标题 1">
             <a:extLst>
               <a:ext uri="{FF2B5EF4-FFF2-40B4-BE49-F238E27FC236}">
-                <a16:creationId xmlns:a16="http://schemas.microsoft.com/office/drawing/2014/main" id="{3B989CFC-3E03-0F59-D0E9-0CAA82EC17A0}"/>
+                <a16:creationId xmlns:a16="http://schemas.microsoft.com/office/drawing/2014/main" id="{D9D74187-D9FF-008C-4D63-99989B54BF30}"/>
               </a:ext>
             </a:extLst>
           </p:cNvPr>
@@ -5251,45 +6784,115 @@
       </p:sp>
       <p:pic>
         <p:nvPicPr>
-          <p:cNvPr id="2" name="图片 1" descr="徽标&#10;&#10;AI 生成的内容可能不正确。">
-            <a:extLst>
-              <a:ext uri="{FF2B5EF4-FFF2-40B4-BE49-F238E27FC236}">
-                <a16:creationId xmlns:a16="http://schemas.microsoft.com/office/drawing/2014/main" id="{7E76806C-5B39-1A83-00B9-CD912A7B7456}"/>
+          <p:cNvPr id="3" name="图片 2" descr="电子仪器&#10;&#10;AI 生成的内容可能不正确。">
+            <a:extLst>
+              <a:ext uri="{FF2B5EF4-FFF2-40B4-BE49-F238E27FC236}">
+                <a16:creationId xmlns:a16="http://schemas.microsoft.com/office/drawing/2014/main" id="{189A81CF-32ED-9DC2-0722-810BA23F48C6}"/>
               </a:ext>
             </a:extLst>
           </p:cNvPr>
           <p:cNvPicPr>
-            <a:picLocks/>
+            <a:picLocks noChangeAspect="1"/>
           </p:cNvPicPr>
           <p:nvPr/>
         </p:nvPicPr>
         <p:blipFill>
-          <a:blip r:embed="rId2">
+          <a:blip r:embed="rId3">
             <a:extLst>
               <a:ext uri="{28A0092B-C50C-407E-A947-70E740481C1C}">
                 <a14:useLocalDpi xmlns:a14="http://schemas.microsoft.com/office/drawing/2010/main" val="0"/>
               </a:ext>
             </a:extLst>
           </a:blip>
-          <a:srcRect t="29985" b="27316"/>
           <a:stretch>
             <a:fillRect/>
           </a:stretch>
         </p:blipFill>
         <p:spPr>
           <a:xfrm>
-            <a:off x="184195" y="166221"/>
-            <a:ext cx="1741461" cy="688543"/>
+            <a:off x="7072816" y="1080655"/>
+            <a:ext cx="3960468" cy="2633981"/>
           </a:xfrm>
           <a:prstGeom prst="rect">
             <a:avLst/>
           </a:prstGeom>
         </p:spPr>
       </p:pic>
+      <p:pic>
+        <p:nvPicPr>
+          <p:cNvPr id="9" name="图片 8" descr="图片包含 游戏机, 电脑&#10;&#10;AI 生成的内容可能不正确。">
+            <a:extLst>
+              <a:ext uri="{FF2B5EF4-FFF2-40B4-BE49-F238E27FC236}">
+                <a16:creationId xmlns:a16="http://schemas.microsoft.com/office/drawing/2014/main" id="{B5AE06A1-D796-6C89-D5C1-87BDC229D438}"/>
+              </a:ext>
+            </a:extLst>
+          </p:cNvPr>
+          <p:cNvPicPr>
+            <a:picLocks noChangeAspect="1"/>
+          </p:cNvPicPr>
+          <p:nvPr/>
+        </p:nvPicPr>
+        <p:blipFill>
+          <a:blip r:embed="rId4">
+            <a:extLst>
+              <a:ext uri="{28A0092B-C50C-407E-A947-70E740481C1C}">
+                <a14:useLocalDpi xmlns:a14="http://schemas.microsoft.com/office/drawing/2010/main" val="0"/>
+              </a:ext>
+            </a:extLst>
+          </a:blip>
+          <a:stretch>
+            <a:fillRect/>
+          </a:stretch>
+        </p:blipFill>
+        <p:spPr>
+          <a:xfrm>
+            <a:off x="7021033" y="3688771"/>
+            <a:ext cx="4064035" cy="2753591"/>
+          </a:xfrm>
+          <a:prstGeom prst="rect">
+            <a:avLst/>
+          </a:prstGeom>
+        </p:spPr>
+      </p:pic>
+      <p:sp>
+        <p:nvSpPr>
+          <p:cNvPr id="10" name="文本框 9">
+            <a:extLst>
+              <a:ext uri="{FF2B5EF4-FFF2-40B4-BE49-F238E27FC236}">
+                <a16:creationId xmlns:a16="http://schemas.microsoft.com/office/drawing/2014/main" id="{F7580D5E-0C3E-BD97-DDBD-18A8CE578047}"/>
+              </a:ext>
+            </a:extLst>
+          </p:cNvPr>
+          <p:cNvSpPr txBox="1"/>
+          <p:nvPr/>
+        </p:nvSpPr>
+        <p:spPr>
+          <a:xfrm>
+            <a:off x="2648894" y="2187172"/>
+            <a:ext cx="3447106" cy="1938992"/>
+          </a:xfrm>
+          <a:prstGeom prst="rect">
+            <a:avLst/>
+          </a:prstGeom>
+          <a:noFill/>
+        </p:spPr>
+        <p:txBody>
+          <a:bodyPr wrap="square" rtlCol="0">
+            <a:spAutoFit/>
+          </a:bodyPr>
+          <a:lstStyle/>
+          <a:p>
+            <a:r>
+              <a:rPr lang="zh-CN" altLang="en-US" sz="2400" b="1" dirty="0"/>
+              <a:t>电池盒装配仍有问题，电池盒上沿仍有空隙，小车遇障颠簸可能会使电池盒跃起与顶上螺栓发生碰撞引燃</a:t>
+            </a:r>
+          </a:p>
+        </p:txBody>
+      </p:sp>
     </p:spTree>
     <p:extLst>
       <p:ext uri="{BB962C8B-B14F-4D97-AF65-F5344CB8AC3E}">
-        <p14:creationId xmlns:p14="http://schemas.microsoft.com/office/powerpoint/2010/main" val="3306696841"/>
+        <p14:creationId xmlns:p14="http://schemas.microsoft.com/office/powerpoint/2010/main" val="1071050765"/>
       </p:ext>
     </p:extLst>
   </p:cSld>
@@ -5327,7 +6930,7 @@
         <p:cNvPr id="1" name="">
           <a:extLst>
             <a:ext uri="{FF2B5EF4-FFF2-40B4-BE49-F238E27FC236}">
-              <a16:creationId xmlns:a16="http://schemas.microsoft.com/office/drawing/2014/main" id="{AFD5C2AF-556B-9621-BD57-FBFA6AA27DE6}"/>
+              <a16:creationId xmlns:a16="http://schemas.microsoft.com/office/drawing/2014/main" id="{05C4C00F-8887-D131-E19F-062507C39D7A}"/>
             </a:ext>
           </a:extLst>
         </p:cNvPr>
@@ -5347,7 +6950,7 @@
           <p:cNvPr id="4" name="矩形 3">
             <a:extLst>
               <a:ext uri="{FF2B5EF4-FFF2-40B4-BE49-F238E27FC236}">
-                <a16:creationId xmlns:a16="http://schemas.microsoft.com/office/drawing/2014/main" id="{B0D78FB6-091F-2022-9C78-EB7F20D26C08}"/>
+                <a16:creationId xmlns:a16="http://schemas.microsoft.com/office/drawing/2014/main" id="{5D838823-4074-60FD-918B-DE20F96E103C}"/>
               </a:ext>
             </a:extLst>
           </p:cNvPr>
@@ -5363,7 +6966,7 @@
             <a:avLst/>
           </a:prstGeom>
           <a:solidFill>
-            <a:srgbClr val="177BF5"/>
+            <a:srgbClr val="197DF7"/>
           </a:solidFill>
           <a:ln>
             <a:noFill/>
@@ -5394,12 +6997,42 @@
           </a:p>
         </p:txBody>
       </p:sp>
+      <p:pic>
+        <p:nvPicPr>
+          <p:cNvPr id="5" name="图片 4">
+            <a:extLst>
+              <a:ext uri="{FF2B5EF4-FFF2-40B4-BE49-F238E27FC236}">
+                <a16:creationId xmlns:a16="http://schemas.microsoft.com/office/drawing/2014/main" id="{867DDDE5-88D1-ED94-75DA-6EE20BFB31E4}"/>
+              </a:ext>
+            </a:extLst>
+          </p:cNvPr>
+          <p:cNvPicPr>
+            <a:picLocks noChangeAspect="1"/>
+          </p:cNvPicPr>
+          <p:nvPr/>
+        </p:nvPicPr>
+        <p:blipFill>
+          <a:blip r:embed="rId2"/>
+          <a:stretch>
+            <a:fillRect/>
+          </a:stretch>
+        </p:blipFill>
+        <p:spPr>
+          <a:xfrm>
+            <a:off x="184195" y="197312"/>
+            <a:ext cx="1741460" cy="586009"/>
+          </a:xfrm>
+          <a:prstGeom prst="rect">
+            <a:avLst/>
+          </a:prstGeom>
+        </p:spPr>
+      </p:pic>
       <p:sp>
         <p:nvSpPr>
           <p:cNvPr id="6" name="矩形 5">
             <a:extLst>
               <a:ext uri="{FF2B5EF4-FFF2-40B4-BE49-F238E27FC236}">
-                <a16:creationId xmlns:a16="http://schemas.microsoft.com/office/drawing/2014/main" id="{BADB9CEB-AFB3-56FC-C858-B8B43A79F521}"/>
+                <a16:creationId xmlns:a16="http://schemas.microsoft.com/office/drawing/2014/main" id="{EC14F729-D65E-9381-2DF8-4FE946E3DAA0}"/>
               </a:ext>
             </a:extLst>
           </p:cNvPr>
@@ -5408,7 +7041,7 @@
         </p:nvSpPr>
         <p:spPr>
           <a:xfrm>
-            <a:off x="0" y="1080655"/>
+            <a:off x="-1" y="1080655"/>
             <a:ext cx="2025283" cy="5777345"/>
           </a:xfrm>
           <a:prstGeom prst="rect">
@@ -5451,7 +7084,7 @@
           <p:cNvPr id="7" name="标题 1">
             <a:extLst>
               <a:ext uri="{FF2B5EF4-FFF2-40B4-BE49-F238E27FC236}">
-                <a16:creationId xmlns:a16="http://schemas.microsoft.com/office/drawing/2014/main" id="{85772F1B-21CC-FF92-08CE-8CD64AD83E53}"/>
+                <a16:creationId xmlns:a16="http://schemas.microsoft.com/office/drawing/2014/main" id="{3B989CFC-3E03-0F59-D0E9-0CAA82EC17A0}"/>
               </a:ext>
             </a:extLst>
           </p:cNvPr>
@@ -5505,45 +7138,115 @@
       </p:sp>
       <p:pic>
         <p:nvPicPr>
-          <p:cNvPr id="2" name="图片 1" descr="徽标&#10;&#10;AI 生成的内容可能不正确。">
-            <a:extLst>
-              <a:ext uri="{FF2B5EF4-FFF2-40B4-BE49-F238E27FC236}">
-                <a16:creationId xmlns:a16="http://schemas.microsoft.com/office/drawing/2014/main" id="{8A69AECE-4034-0ECF-5BAE-6438F6D28555}"/>
+          <p:cNvPr id="3" name="图片 2" descr="图片包含 室内, 卡车, 桌子, 小&#10;&#10;AI 生成的内容可能不正确。">
+            <a:extLst>
+              <a:ext uri="{FF2B5EF4-FFF2-40B4-BE49-F238E27FC236}">
+                <a16:creationId xmlns:a16="http://schemas.microsoft.com/office/drawing/2014/main" id="{CB332CEB-BA07-098F-585B-E69782BDF729}"/>
               </a:ext>
             </a:extLst>
           </p:cNvPr>
           <p:cNvPicPr>
-            <a:picLocks/>
+            <a:picLocks noChangeAspect="1"/>
           </p:cNvPicPr>
           <p:nvPr/>
         </p:nvPicPr>
         <p:blipFill>
-          <a:blip r:embed="rId2">
+          <a:blip r:embed="rId3">
             <a:extLst>
               <a:ext uri="{28A0092B-C50C-407E-A947-70E740481C1C}">
                 <a14:useLocalDpi xmlns:a14="http://schemas.microsoft.com/office/drawing/2010/main" val="0"/>
               </a:ext>
             </a:extLst>
           </a:blip>
-          <a:srcRect t="29985" b="27316"/>
           <a:stretch>
             <a:fillRect/>
           </a:stretch>
         </p:blipFill>
         <p:spPr>
           <a:xfrm>
-            <a:off x="184195" y="166221"/>
-            <a:ext cx="1741461" cy="688543"/>
+            <a:off x="7464792" y="1194351"/>
+            <a:ext cx="3102763" cy="2234649"/>
           </a:xfrm>
           <a:prstGeom prst="rect">
             <a:avLst/>
           </a:prstGeom>
         </p:spPr>
       </p:pic>
+      <p:pic>
+        <p:nvPicPr>
+          <p:cNvPr id="9" name="图片 8" descr="图片包含 玩具, 乐高, 盒子, 桌子&#10;&#10;AI 生成的内容可能不正确。">
+            <a:extLst>
+              <a:ext uri="{FF2B5EF4-FFF2-40B4-BE49-F238E27FC236}">
+                <a16:creationId xmlns:a16="http://schemas.microsoft.com/office/drawing/2014/main" id="{193B272B-56B4-F1DD-CC2B-24D91EE6AC3C}"/>
+              </a:ext>
+            </a:extLst>
+          </p:cNvPr>
+          <p:cNvPicPr>
+            <a:picLocks noChangeAspect="1"/>
+          </p:cNvPicPr>
+          <p:nvPr/>
+        </p:nvPicPr>
+        <p:blipFill>
+          <a:blip r:embed="rId4">
+            <a:extLst>
+              <a:ext uri="{28A0092B-C50C-407E-A947-70E740481C1C}">
+                <a14:useLocalDpi xmlns:a14="http://schemas.microsoft.com/office/drawing/2010/main" val="0"/>
+              </a:ext>
+            </a:extLst>
+          </a:blip>
+          <a:stretch>
+            <a:fillRect/>
+          </a:stretch>
+        </p:blipFill>
+        <p:spPr>
+          <a:xfrm>
+            <a:off x="7464792" y="3429000"/>
+            <a:ext cx="3237843" cy="2616730"/>
+          </a:xfrm>
+          <a:prstGeom prst="rect">
+            <a:avLst/>
+          </a:prstGeom>
+        </p:spPr>
+      </p:pic>
+      <p:sp>
+        <p:nvSpPr>
+          <p:cNvPr id="10" name="文本框 9">
+            <a:extLst>
+              <a:ext uri="{FF2B5EF4-FFF2-40B4-BE49-F238E27FC236}">
+                <a16:creationId xmlns:a16="http://schemas.microsoft.com/office/drawing/2014/main" id="{3F64EFBA-C31A-AE01-54FE-32C7D857DA6B}"/>
+              </a:ext>
+            </a:extLst>
+          </p:cNvPr>
+          <p:cNvSpPr txBox="1"/>
+          <p:nvPr/>
+        </p:nvSpPr>
+        <p:spPr>
+          <a:xfrm>
+            <a:off x="2670464" y="2430267"/>
+            <a:ext cx="3501736" cy="1569660"/>
+          </a:xfrm>
+          <a:prstGeom prst="rect">
+            <a:avLst/>
+          </a:prstGeom>
+          <a:noFill/>
+        </p:spPr>
+        <p:txBody>
+          <a:bodyPr wrap="square" rtlCol="0">
+            <a:spAutoFit/>
+          </a:bodyPr>
+          <a:lstStyle/>
+          <a:p>
+            <a:r>
+              <a:rPr lang="zh-CN" altLang="en-US" sz="2400" b="1" dirty="0"/>
+              <a:t>小车内壳有前后两壳拼接而成，螺栓需要从内部加装，这使得组装十分不便利</a:t>
+            </a:r>
+          </a:p>
+        </p:txBody>
+      </p:sp>
     </p:spTree>
     <p:extLst>
       <p:ext uri="{BB962C8B-B14F-4D97-AF65-F5344CB8AC3E}">
-        <p14:creationId xmlns:p14="http://schemas.microsoft.com/office/powerpoint/2010/main" val="2300556188"/>
+        <p14:creationId xmlns:p14="http://schemas.microsoft.com/office/powerpoint/2010/main" val="3306696841"/>
       </p:ext>
     </p:extLst>
   </p:cSld>
@@ -5581,7 +7284,7 @@
         <p:cNvPr id="1" name="">
           <a:extLst>
             <a:ext uri="{FF2B5EF4-FFF2-40B4-BE49-F238E27FC236}">
-              <a16:creationId xmlns:a16="http://schemas.microsoft.com/office/drawing/2014/main" id="{5664D61C-98BC-1000-D73F-057D499198A6}"/>
+              <a16:creationId xmlns:a16="http://schemas.microsoft.com/office/drawing/2014/main" id="{996B166B-DF22-82F8-A374-B42F4283E0D2}"/>
             </a:ext>
           </a:extLst>
         </p:cNvPr>
@@ -5598,10 +7301,10 @@
       </p:grpSpPr>
       <p:sp>
         <p:nvSpPr>
-          <p:cNvPr id="4" name="矩形 3">
-            <a:extLst>
-              <a:ext uri="{FF2B5EF4-FFF2-40B4-BE49-F238E27FC236}">
-                <a16:creationId xmlns:a16="http://schemas.microsoft.com/office/drawing/2014/main" id="{3B0E8B1B-EAA7-F736-1500-1CA149A1E8DD}"/>
+          <p:cNvPr id="9" name="矩形 8">
+            <a:extLst>
+              <a:ext uri="{FF2B5EF4-FFF2-40B4-BE49-F238E27FC236}">
+                <a16:creationId xmlns:a16="http://schemas.microsoft.com/office/drawing/2014/main" id="{AB853696-25E0-648F-25C1-4C1C045C864A}"/>
               </a:ext>
             </a:extLst>
           </p:cNvPr>
@@ -5610,14 +7313,14 @@
         </p:nvSpPr>
         <p:spPr>
           <a:xfrm>
-            <a:off x="0" y="944628"/>
-            <a:ext cx="2025283" cy="5913372"/>
+            <a:off x="0" y="4053249"/>
+            <a:ext cx="12192000" cy="2709193"/>
           </a:xfrm>
           <a:prstGeom prst="rect">
             <a:avLst/>
           </a:prstGeom>
           <a:solidFill>
-            <a:srgbClr val="177BF5"/>
+            <a:srgbClr val="177DF8"/>
           </a:solidFill>
           <a:ln>
             <a:noFill/>
@@ -5644,16 +7347,50 @@
           <a:lstStyle/>
           <a:p>
             <a:pPr algn="ctr"/>
-            <a:endParaRPr lang="zh-CN" altLang="en-US"/>
-          </a:p>
-        </p:txBody>
-      </p:sp>
-      <p:sp>
-        <p:nvSpPr>
-          <p:cNvPr id="6" name="矩形 5">
-            <a:extLst>
-              <a:ext uri="{FF2B5EF4-FFF2-40B4-BE49-F238E27FC236}">
-                <a16:creationId xmlns:a16="http://schemas.microsoft.com/office/drawing/2014/main" id="{C08E07A2-384C-ACA1-2AA8-0EFE0C555FBF}"/>
+            <a:r>
+              <a:rPr lang="en-US" altLang="zh-CN" dirty="0"/>
+              <a:t>·</a:t>
+            </a:r>
+            <a:endParaRPr lang="zh-CN" altLang="en-US" dirty="0"/>
+          </a:p>
+        </p:txBody>
+      </p:sp>
+      <p:pic>
+        <p:nvPicPr>
+          <p:cNvPr id="11" name="图片 10">
+            <a:extLst>
+              <a:ext uri="{FF2B5EF4-FFF2-40B4-BE49-F238E27FC236}">
+                <a16:creationId xmlns:a16="http://schemas.microsoft.com/office/drawing/2014/main" id="{41EFA7DE-FEF6-E362-B42B-D411307F9313}"/>
+              </a:ext>
+            </a:extLst>
+          </p:cNvPr>
+          <p:cNvPicPr>
+            <a:picLocks noChangeAspect="1"/>
+          </p:cNvPicPr>
+          <p:nvPr/>
+        </p:nvPicPr>
+        <p:blipFill>
+          <a:blip r:embed="rId2"/>
+          <a:stretch>
+            <a:fillRect/>
+          </a:stretch>
+        </p:blipFill>
+        <p:spPr>
+          <a:xfrm>
+            <a:off x="184195" y="197312"/>
+            <a:ext cx="1741460" cy="586009"/>
+          </a:xfrm>
+          <a:prstGeom prst="rect">
+            <a:avLst/>
+          </a:prstGeom>
+        </p:spPr>
+      </p:pic>
+      <p:sp>
+        <p:nvSpPr>
+          <p:cNvPr id="12" name="矩形 11">
+            <a:extLst>
+              <a:ext uri="{FF2B5EF4-FFF2-40B4-BE49-F238E27FC236}">
+                <a16:creationId xmlns:a16="http://schemas.microsoft.com/office/drawing/2014/main" id="{1A2F2127-8289-3911-873B-B8B458DCDD53}"/>
               </a:ext>
             </a:extLst>
           </p:cNvPr>
@@ -5662,8 +7399,8 @@
         </p:nvSpPr>
         <p:spPr>
           <a:xfrm>
-            <a:off x="-1" y="1080655"/>
-            <a:ext cx="2025283" cy="5777345"/>
+            <a:off x="0" y="4148805"/>
+            <a:ext cx="12192000" cy="2709193"/>
           </a:xfrm>
           <a:prstGeom prst="rect">
             <a:avLst/>
@@ -5702,102 +7439,158 @@
       </p:sp>
       <p:sp>
         <p:nvSpPr>
-          <p:cNvPr id="7" name="标题 1">
-            <a:extLst>
-              <a:ext uri="{FF2B5EF4-FFF2-40B4-BE49-F238E27FC236}">
-                <a16:creationId xmlns:a16="http://schemas.microsoft.com/office/drawing/2014/main" id="{20C251A3-3BA2-59F8-0319-81AA282CB128}"/>
-              </a:ext>
-            </a:extLst>
-          </p:cNvPr>
-          <p:cNvSpPr txBox="1">
-            <a:spLocks/>
+          <p:cNvPr id="13" name="副标题 2">
+            <a:extLst>
+              <a:ext uri="{FF2B5EF4-FFF2-40B4-BE49-F238E27FC236}">
+                <a16:creationId xmlns:a16="http://schemas.microsoft.com/office/drawing/2014/main" id="{D0674884-996F-82E0-017A-4ECABC69ECB0}"/>
+              </a:ext>
+            </a:extLst>
+          </p:cNvPr>
+          <p:cNvSpPr>
+            <a:spLocks noGrp="1"/>
           </p:cNvSpPr>
-          <p:nvPr/>
-        </p:nvSpPr>
-        <p:spPr>
-          <a:xfrm>
-            <a:off x="2231406" y="197312"/>
-            <a:ext cx="4412506" cy="647777"/>
-          </a:xfrm>
-          <a:prstGeom prst="rect">
-            <a:avLst/>
-          </a:prstGeom>
-        </p:spPr>
-        <p:txBody>
-          <a:bodyPr vert="horz" lIns="91440" tIns="45720" rIns="91440" bIns="45720" rtlCol="0" anchor="ctr">
+          <p:nvPr>
+            <p:ph type="subTitle" idx="1"/>
+          </p:nvPr>
+        </p:nvSpPr>
+        <p:spPr>
+          <a:xfrm>
+            <a:off x="8227751" y="4900655"/>
+            <a:ext cx="3517260" cy="1205494"/>
+          </a:xfrm>
+        </p:spPr>
+        <p:txBody>
+          <a:bodyPr>
             <a:normAutofit/>
           </a:bodyPr>
-          <a:lstStyle>
-            <a:lvl1pPr algn="l" defTabSz="914400" rtl="0" eaLnBrk="1" latinLnBrk="0" hangingPunct="1">
-              <a:lnSpc>
-                <a:spcPct val="90000"/>
-              </a:lnSpc>
-              <a:spcBef>
-                <a:spcPct val="0"/>
-              </a:spcBef>
-              <a:buNone/>
-              <a:defRPr sz="4400" kern="1200">
+          <a:lstStyle/>
+          <a:p>
+            <a:r>
+              <a:rPr lang="zh-CN" altLang="en-US" sz="3200" b="1" dirty="0">
                 <a:solidFill>
-                  <a:schemeClr val="tx1"/>
+                  <a:schemeClr val="bg1"/>
                 </a:solidFill>
-                <a:latin typeface="+mj-lt"/>
-                <a:ea typeface="+mj-ea"/>
-                <a:cs typeface="+mj-cs"/>
-              </a:defRPr>
-            </a:lvl1pPr>
-          </a:lstStyle>
-          <a:p>
-            <a:r>
-              <a:rPr lang="zh-CN" altLang="en-US" sz="4000" b="1" dirty="0">
                 <a:latin typeface="+mn-ea"/>
-                <a:ea typeface="+mn-ea"/>
               </a:rPr>
-              <a:t>主要设计难点</a:t>
-            </a:r>
-          </a:p>
-        </p:txBody>
-      </p:sp>
-      <p:pic>
-        <p:nvPicPr>
-          <p:cNvPr id="2" name="图片 1" descr="徽标&#10;&#10;AI 生成的内容可能不正确。">
-            <a:extLst>
-              <a:ext uri="{FF2B5EF4-FFF2-40B4-BE49-F238E27FC236}">
-                <a16:creationId xmlns:a16="http://schemas.microsoft.com/office/drawing/2014/main" id="{0E2EF0C2-B482-72A2-E97F-8759F4886884}"/>
-              </a:ext>
-            </a:extLst>
-          </p:cNvPr>
-          <p:cNvPicPr>
-            <a:picLocks/>
-          </p:cNvPicPr>
-          <p:nvPr/>
-        </p:nvPicPr>
-        <p:blipFill>
-          <a:blip r:embed="rId2">
-            <a:extLst>
-              <a:ext uri="{28A0092B-C50C-407E-A947-70E740481C1C}">
-                <a14:useLocalDpi xmlns:a14="http://schemas.microsoft.com/office/drawing/2010/main" val="0"/>
-              </a:ext>
-            </a:extLst>
-          </a:blip>
-          <a:srcRect t="29985" b="27316"/>
-          <a:stretch>
-            <a:fillRect/>
-          </a:stretch>
-        </p:blipFill>
-        <p:spPr>
-          <a:xfrm>
-            <a:off x="184195" y="166221"/>
-            <a:ext cx="1741461" cy="688543"/>
-          </a:xfrm>
-          <a:prstGeom prst="rect">
-            <a:avLst/>
-          </a:prstGeom>
-        </p:spPr>
-      </p:pic>
+              <a:t>接下来需要做部分未达到的遗憾</a:t>
+            </a:r>
+          </a:p>
+        </p:txBody>
+      </p:sp>
+      <p:sp>
+        <p:nvSpPr>
+          <p:cNvPr id="14" name="Text Placeholder 1">
+            <a:extLst>
+              <a:ext uri="{FF2B5EF4-FFF2-40B4-BE49-F238E27FC236}">
+                <a16:creationId xmlns:a16="http://schemas.microsoft.com/office/drawing/2014/main" id="{5A6E5C74-36FF-DC30-7F88-FEE1AE672704}"/>
+              </a:ext>
+            </a:extLst>
+          </p:cNvPr>
+          <p:cNvSpPr>
+            <a:spLocks noChangeArrowheads="1"/>
+          </p:cNvSpPr>
+          <p:nvPr/>
+        </p:nvSpPr>
+        <p:spPr bwMode="auto">
+          <a:xfrm>
+            <a:off x="184195" y="6106149"/>
+            <a:ext cx="5721796" cy="440494"/>
+          </a:xfrm>
+          <a:prstGeom prst="rect">
+            <a:avLst/>
+          </a:prstGeom>
+          <a:noFill/>
+          <a:ln w="9525">
+            <a:noFill/>
+            <a:bevel/>
+          </a:ln>
+        </p:spPr>
+        <p:txBody>
+          <a:bodyPr anchor="ctr"/>
+          <a:lstStyle/>
+          <a:p>
+            <a:pPr eaLnBrk="1" hangingPunct="1">
+              <a:defRPr/>
+            </a:pPr>
+            <a:r>
+              <a:rPr lang="en-US" altLang="zh-CN" sz="1400" b="1" dirty="0">
+                <a:solidFill>
+                  <a:schemeClr val="accent4">
+                    <a:lumMod val="95000"/>
+                    <a:lumOff val="5000"/>
+                  </a:schemeClr>
+                </a:solidFill>
+                <a:latin typeface="Arial" panose="020B0604020202020204" pitchFamily="34" charset="0"/>
+                <a:cs typeface="Arial" panose="020B0604020202020204" pitchFamily="34" charset="0"/>
+              </a:rPr>
+              <a:t>Prepared by AIR-Tech@ </a:t>
+            </a:r>
+            <a:fld id="{5853BA87-C0A4-4D40-A7D0-264FBDFF6174}" type="datetime9">
+              <a:rPr lang="en-US" altLang="zh-CN" sz="1400" b="1" dirty="0" smtClean="0">
+                <a:solidFill>
+                  <a:schemeClr val="accent4">
+                    <a:lumMod val="95000"/>
+                    <a:lumOff val="5000"/>
+                  </a:schemeClr>
+                </a:solidFill>
+                <a:latin typeface="Arial" panose="020B0604020202020204" pitchFamily="34" charset="0"/>
+                <a:cs typeface="Arial" panose="020B0604020202020204" pitchFamily="34" charset="0"/>
+              </a:rPr>
+              <a:t>11/24/2025 5:24:34 PM</a:t>
+            </a:fld>
+            <a:endParaRPr lang="zh-CN" altLang="en-US" sz="1400" b="1" dirty="0">
+              <a:solidFill>
+                <a:schemeClr val="accent4">
+                  <a:lumMod val="95000"/>
+                  <a:lumOff val="5000"/>
+                </a:schemeClr>
+              </a:solidFill>
+              <a:latin typeface="Arial" panose="020B0604020202020204" pitchFamily="34" charset="0"/>
+              <a:cs typeface="Arial" panose="020B0604020202020204" pitchFamily="34" charset="0"/>
+            </a:endParaRPr>
+          </a:p>
+        </p:txBody>
+      </p:sp>
+      <p:sp>
+        <p:nvSpPr>
+          <p:cNvPr id="4" name="文本框 3">
+            <a:extLst>
+              <a:ext uri="{FF2B5EF4-FFF2-40B4-BE49-F238E27FC236}">
+                <a16:creationId xmlns:a16="http://schemas.microsoft.com/office/drawing/2014/main" id="{DAC67AC4-919A-C2E0-F471-E99DB7D5C825}"/>
+              </a:ext>
+            </a:extLst>
+          </p:cNvPr>
+          <p:cNvSpPr txBox="1"/>
+          <p:nvPr/>
+        </p:nvSpPr>
+        <p:spPr>
+          <a:xfrm>
+            <a:off x="3045093" y="2249386"/>
+            <a:ext cx="6094902" cy="1015663"/>
+          </a:xfrm>
+          <a:prstGeom prst="rect">
+            <a:avLst/>
+          </a:prstGeom>
+          <a:noFill/>
+        </p:spPr>
+        <p:txBody>
+          <a:bodyPr wrap="square">
+            <a:spAutoFit/>
+          </a:bodyPr>
+          <a:lstStyle/>
+          <a:p>
+            <a:pPr algn="ctr"/>
+            <a:r>
+              <a:rPr lang="zh-CN" altLang="en-US" sz="6000" b="1" dirty="0"/>
+              <a:t>接下来的规划</a:t>
+            </a:r>
+          </a:p>
+        </p:txBody>
+      </p:sp>
     </p:spTree>
     <p:extLst>
       <p:ext uri="{BB962C8B-B14F-4D97-AF65-F5344CB8AC3E}">
-        <p14:creationId xmlns:p14="http://schemas.microsoft.com/office/powerpoint/2010/main" val="3393810164"/>
+        <p14:creationId xmlns:p14="http://schemas.microsoft.com/office/powerpoint/2010/main" val="2995445147"/>
       </p:ext>
     </p:extLst>
   </p:cSld>
@@ -5835,7 +7628,7 @@
         <p:cNvPr id="1" name="">
           <a:extLst>
             <a:ext uri="{FF2B5EF4-FFF2-40B4-BE49-F238E27FC236}">
-              <a16:creationId xmlns:a16="http://schemas.microsoft.com/office/drawing/2014/main" id="{996B166B-DF22-82F8-A374-B42F4283E0D2}"/>
+              <a16:creationId xmlns:a16="http://schemas.microsoft.com/office/drawing/2014/main" id="{3083B666-6CF1-A393-0663-AD1A9AC885CD}"/>
             </a:ext>
           </a:extLst>
         </p:cNvPr>
@@ -5852,10 +7645,10 @@
       </p:grpSpPr>
       <p:sp>
         <p:nvSpPr>
-          <p:cNvPr id="9" name="矩形 8">
-            <a:extLst>
-              <a:ext uri="{FF2B5EF4-FFF2-40B4-BE49-F238E27FC236}">
-                <a16:creationId xmlns:a16="http://schemas.microsoft.com/office/drawing/2014/main" id="{AB853696-25E0-648F-25C1-4C1C045C864A}"/>
+          <p:cNvPr id="4" name="矩形 3">
+            <a:extLst>
+              <a:ext uri="{FF2B5EF4-FFF2-40B4-BE49-F238E27FC236}">
+                <a16:creationId xmlns:a16="http://schemas.microsoft.com/office/drawing/2014/main" id="{8E621D31-4CB9-B274-8807-DA2D65816D1C}"/>
               </a:ext>
             </a:extLst>
           </p:cNvPr>
@@ -5864,14 +7657,14 @@
         </p:nvSpPr>
         <p:spPr>
           <a:xfrm>
-            <a:off x="0" y="4053249"/>
-            <a:ext cx="12192000" cy="2709193"/>
+            <a:off x="0" y="944628"/>
+            <a:ext cx="2025283" cy="5913372"/>
           </a:xfrm>
           <a:prstGeom prst="rect">
             <a:avLst/>
           </a:prstGeom>
           <a:solidFill>
-            <a:srgbClr val="177BF5"/>
+            <a:srgbClr val="197DF7"/>
           </a:solidFill>
           <a:ln>
             <a:noFill/>
@@ -5898,20 +7691,46 @@
           <a:lstStyle/>
           <a:p>
             <a:pPr algn="ctr"/>
-            <a:r>
-              <a:rPr lang="en-US" altLang="zh-CN" dirty="0"/>
-              <a:t>·</a:t>
-            </a:r>
-            <a:endParaRPr lang="zh-CN" altLang="en-US" dirty="0"/>
-          </a:p>
-        </p:txBody>
-      </p:sp>
-      <p:sp>
-        <p:nvSpPr>
-          <p:cNvPr id="12" name="矩形 11">
-            <a:extLst>
-              <a:ext uri="{FF2B5EF4-FFF2-40B4-BE49-F238E27FC236}">
-                <a16:creationId xmlns:a16="http://schemas.microsoft.com/office/drawing/2014/main" id="{1A2F2127-8289-3911-873B-B8B458DCDD53}"/>
+            <a:endParaRPr lang="zh-CN" altLang="en-US"/>
+          </a:p>
+        </p:txBody>
+      </p:sp>
+      <p:pic>
+        <p:nvPicPr>
+          <p:cNvPr id="5" name="图片 4">
+            <a:extLst>
+              <a:ext uri="{FF2B5EF4-FFF2-40B4-BE49-F238E27FC236}">
+                <a16:creationId xmlns:a16="http://schemas.microsoft.com/office/drawing/2014/main" id="{74EFAC7E-ED01-F63E-5E85-42EF43E01DCD}"/>
+              </a:ext>
+            </a:extLst>
+          </p:cNvPr>
+          <p:cNvPicPr>
+            <a:picLocks noChangeAspect="1"/>
+          </p:cNvPicPr>
+          <p:nvPr/>
+        </p:nvPicPr>
+        <p:blipFill>
+          <a:blip r:embed="rId2"/>
+          <a:stretch>
+            <a:fillRect/>
+          </a:stretch>
+        </p:blipFill>
+        <p:spPr>
+          <a:xfrm>
+            <a:off x="184195" y="197312"/>
+            <a:ext cx="1741460" cy="586009"/>
+          </a:xfrm>
+          <a:prstGeom prst="rect">
+            <a:avLst/>
+          </a:prstGeom>
+        </p:spPr>
+      </p:pic>
+      <p:sp>
+        <p:nvSpPr>
+          <p:cNvPr id="6" name="矩形 5">
+            <a:extLst>
+              <a:ext uri="{FF2B5EF4-FFF2-40B4-BE49-F238E27FC236}">
+                <a16:creationId xmlns:a16="http://schemas.microsoft.com/office/drawing/2014/main" id="{95533B91-FB62-3FF3-6962-B25DAA8A4A9F}"/>
               </a:ext>
             </a:extLst>
           </p:cNvPr>
@@ -5920,8 +7739,8 @@
         </p:nvSpPr>
         <p:spPr>
           <a:xfrm>
-            <a:off x="0" y="4148807"/>
-            <a:ext cx="12192000" cy="2709193"/>
+            <a:off x="-1" y="1080655"/>
+            <a:ext cx="2025283" cy="5777345"/>
           </a:xfrm>
           <a:prstGeom prst="rect">
             <a:avLst/>
@@ -5960,186 +7779,126 @@
       </p:sp>
       <p:sp>
         <p:nvSpPr>
-          <p:cNvPr id="13" name="副标题 2">
-            <a:extLst>
-              <a:ext uri="{FF2B5EF4-FFF2-40B4-BE49-F238E27FC236}">
-                <a16:creationId xmlns:a16="http://schemas.microsoft.com/office/drawing/2014/main" id="{D0674884-996F-82E0-017A-4ECABC69ECB0}"/>
-              </a:ext>
-            </a:extLst>
-          </p:cNvPr>
-          <p:cNvSpPr>
-            <a:spLocks noGrp="1"/>
+          <p:cNvPr id="7" name="标题 1">
+            <a:extLst>
+              <a:ext uri="{FF2B5EF4-FFF2-40B4-BE49-F238E27FC236}">
+                <a16:creationId xmlns:a16="http://schemas.microsoft.com/office/drawing/2014/main" id="{BDF3B1CF-7975-4412-98F0-32FF72F44D38}"/>
+              </a:ext>
+            </a:extLst>
+          </p:cNvPr>
+          <p:cNvSpPr txBox="1">
+            <a:spLocks/>
           </p:cNvSpPr>
-          <p:nvPr>
-            <p:ph type="subTitle" idx="1"/>
-          </p:nvPr>
-        </p:nvSpPr>
-        <p:spPr>
-          <a:xfrm>
-            <a:off x="8227751" y="4900655"/>
-            <a:ext cx="3517260" cy="1205494"/>
-          </a:xfrm>
-        </p:spPr>
-        <p:txBody>
-          <a:bodyPr>
+          <p:nvPr/>
+        </p:nvSpPr>
+        <p:spPr>
+          <a:xfrm>
+            <a:off x="2231406" y="197312"/>
+            <a:ext cx="4412506" cy="647777"/>
+          </a:xfrm>
+          <a:prstGeom prst="rect">
+            <a:avLst/>
+          </a:prstGeom>
+        </p:spPr>
+        <p:txBody>
+          <a:bodyPr vert="horz" lIns="91440" tIns="45720" rIns="91440" bIns="45720" rtlCol="0" anchor="ctr">
             <a:normAutofit/>
           </a:bodyPr>
-          <a:lstStyle/>
-          <a:p>
-            <a:r>
-              <a:rPr lang="zh-CN" altLang="en-US" sz="3200" b="1" dirty="0">
+          <a:lstStyle>
+            <a:lvl1pPr algn="l" defTabSz="914400" rtl="0" eaLnBrk="1" latinLnBrk="0" hangingPunct="1">
+              <a:lnSpc>
+                <a:spcPct val="90000"/>
+              </a:lnSpc>
+              <a:spcBef>
+                <a:spcPct val="0"/>
+              </a:spcBef>
+              <a:buNone/>
+              <a:defRPr sz="4400" kern="1200">
                 <a:solidFill>
-                  <a:schemeClr val="bg1"/>
+                  <a:schemeClr val="tx1"/>
                 </a:solidFill>
+                <a:latin typeface="+mj-lt"/>
+                <a:ea typeface="+mj-ea"/>
+                <a:cs typeface="+mj-cs"/>
+              </a:defRPr>
+            </a:lvl1pPr>
+          </a:lstStyle>
+          <a:p>
+            <a:r>
+              <a:rPr lang="zh-CN" altLang="en-US" sz="4000" b="1" dirty="0">
                 <a:latin typeface="+mn-ea"/>
+                <a:ea typeface="+mn-ea"/>
               </a:rPr>
-              <a:t>接下来需要做部分未达到的遗憾</a:t>
-            </a:r>
-          </a:p>
-        </p:txBody>
-      </p:sp>
-      <p:sp>
-        <p:nvSpPr>
-          <p:cNvPr id="14" name="Text Placeholder 1">
-            <a:extLst>
-              <a:ext uri="{FF2B5EF4-FFF2-40B4-BE49-F238E27FC236}">
-                <a16:creationId xmlns:a16="http://schemas.microsoft.com/office/drawing/2014/main" id="{5A6E5C74-36FF-DC30-7F88-FEE1AE672704}"/>
-              </a:ext>
-            </a:extLst>
-          </p:cNvPr>
-          <p:cNvSpPr>
-            <a:spLocks noChangeArrowheads="1"/>
-          </p:cNvSpPr>
-          <p:nvPr/>
-        </p:nvSpPr>
-        <p:spPr bwMode="auto">
-          <a:xfrm>
-            <a:off x="184195" y="6106149"/>
-            <a:ext cx="5721796" cy="440494"/>
+              <a:t>接下来的规划</a:t>
+            </a:r>
+          </a:p>
+        </p:txBody>
+      </p:sp>
+      <p:sp>
+        <p:nvSpPr>
+          <p:cNvPr id="2" name="文本框 1">
+            <a:extLst>
+              <a:ext uri="{FF2B5EF4-FFF2-40B4-BE49-F238E27FC236}">
+                <a16:creationId xmlns:a16="http://schemas.microsoft.com/office/drawing/2014/main" id="{9B10A87C-D886-BAFC-D2FB-D35FCA0FCC73}"/>
+              </a:ext>
+            </a:extLst>
+          </p:cNvPr>
+          <p:cNvSpPr txBox="1"/>
+          <p:nvPr/>
+        </p:nvSpPr>
+        <p:spPr>
+          <a:xfrm>
+            <a:off x="2369127" y="1983009"/>
+            <a:ext cx="5008418" cy="1569660"/>
           </a:xfrm>
           <a:prstGeom prst="rect">
             <a:avLst/>
           </a:prstGeom>
           <a:noFill/>
-          <a:ln w="9525">
-            <a:noFill/>
-            <a:bevel/>
-          </a:ln>
-        </p:spPr>
-        <p:txBody>
-          <a:bodyPr anchor="ctr"/>
-          <a:lstStyle/>
-          <a:p>
-            <a:pPr eaLnBrk="1" hangingPunct="1">
-              <a:defRPr/>
-            </a:pPr>
-            <a:r>
-              <a:rPr lang="en-US" altLang="zh-CN" sz="1400" b="1" dirty="0">
-                <a:solidFill>
-                  <a:srgbClr val="0096B4"/>
-                </a:solidFill>
-                <a:latin typeface="Arial" panose="020B0604020202020204" pitchFamily="34" charset="0"/>
-                <a:cs typeface="Arial" panose="020B0604020202020204" pitchFamily="34" charset="0"/>
-              </a:rPr>
-              <a:t>Prepared by AIR-Tech@ </a:t>
-            </a:r>
-            <a:fld id="{5853BA87-C0A4-4D40-A7D0-264FBDFF6174}" type="datetime9">
-              <a:rPr lang="en-US" altLang="zh-CN" sz="1400" b="1" dirty="0" smtClean="0">
-                <a:solidFill>
-                  <a:srgbClr val="0096B4"/>
-                </a:solidFill>
-                <a:latin typeface="Arial" panose="020B0604020202020204" pitchFamily="34" charset="0"/>
-                <a:cs typeface="Arial" panose="020B0604020202020204" pitchFamily="34" charset="0"/>
-              </a:rPr>
-              <a:t>11/14/2025 10:59:11 AM</a:t>
-            </a:fld>
-            <a:endParaRPr lang="zh-CN" altLang="en-US" sz="1400" b="1" dirty="0">
-              <a:solidFill>
-                <a:srgbClr val="0096B4"/>
-              </a:solidFill>
-              <a:latin typeface="Arial" panose="020B0604020202020204" pitchFamily="34" charset="0"/>
-              <a:cs typeface="Arial" panose="020B0604020202020204" pitchFamily="34" charset="0"/>
-            </a:endParaRPr>
-          </a:p>
-        </p:txBody>
-      </p:sp>
-      <p:sp>
-        <p:nvSpPr>
-          <p:cNvPr id="4" name="文本框 3">
-            <a:extLst>
-              <a:ext uri="{FF2B5EF4-FFF2-40B4-BE49-F238E27FC236}">
-                <a16:creationId xmlns:a16="http://schemas.microsoft.com/office/drawing/2014/main" id="{DAC67AC4-919A-C2E0-F471-E99DB7D5C825}"/>
-              </a:ext>
-            </a:extLst>
-          </p:cNvPr>
-          <p:cNvSpPr txBox="1"/>
-          <p:nvPr/>
-        </p:nvSpPr>
-        <p:spPr>
-          <a:xfrm>
-            <a:off x="3045093" y="2249386"/>
-            <a:ext cx="6094902" cy="1015663"/>
-          </a:xfrm>
-          <a:prstGeom prst="rect">
-            <a:avLst/>
-          </a:prstGeom>
-          <a:noFill/>
-        </p:spPr>
-        <p:txBody>
-          <a:bodyPr wrap="square">
+        </p:spPr>
+        <p:txBody>
+          <a:bodyPr wrap="square" rtlCol="0">
             <a:spAutoFit/>
           </a:bodyPr>
           <a:lstStyle/>
           <a:p>
-            <a:pPr algn="ctr"/>
-            <a:r>
-              <a:rPr lang="zh-CN" altLang="en-US" sz="6000" b="1" dirty="0"/>
-              <a:t>接下来的规划</a:t>
-            </a:r>
-          </a:p>
-        </p:txBody>
-      </p:sp>
-      <p:pic>
-        <p:nvPicPr>
-          <p:cNvPr id="2" name="图片 1" descr="徽标&#10;&#10;AI 生成的内容可能不正确。">
-            <a:extLst>
-              <a:ext uri="{FF2B5EF4-FFF2-40B4-BE49-F238E27FC236}">
-                <a16:creationId xmlns:a16="http://schemas.microsoft.com/office/drawing/2014/main" id="{D479C517-B26F-2B51-F795-C70E5193054B}"/>
-              </a:ext>
-            </a:extLst>
-          </p:cNvPr>
-          <p:cNvPicPr>
-            <a:picLocks/>
-          </p:cNvPicPr>
-          <p:nvPr/>
-        </p:nvPicPr>
-        <p:blipFill>
-          <a:blip r:embed="rId2">
-            <a:extLst>
-              <a:ext uri="{28A0092B-C50C-407E-A947-70E740481C1C}">
-                <a14:useLocalDpi xmlns:a14="http://schemas.microsoft.com/office/drawing/2010/main" val="0"/>
-              </a:ext>
-            </a:extLst>
-          </a:blip>
-          <a:srcRect t="29985" b="27316"/>
-          <a:stretch>
-            <a:fillRect/>
-          </a:stretch>
-        </p:blipFill>
-        <p:spPr>
-          <a:xfrm>
-            <a:off x="184195" y="166221"/>
-            <a:ext cx="1741461" cy="688543"/>
-          </a:xfrm>
-          <a:prstGeom prst="rect">
-            <a:avLst/>
-          </a:prstGeom>
-        </p:spPr>
-      </p:pic>
+            <a:r>
+              <a:rPr lang="en-US" altLang="zh-CN" sz="2400" b="1" dirty="0"/>
+              <a:t>1</a:t>
+            </a:r>
+            <a:r>
+              <a:rPr lang="zh-CN" altLang="en-US" sz="2400" b="1" dirty="0"/>
+              <a:t>、继续改进模型设计问题</a:t>
+            </a:r>
+            <a:endParaRPr lang="en-US" altLang="zh-CN" sz="2400" b="1" dirty="0"/>
+          </a:p>
+          <a:p>
+            <a:endParaRPr lang="en-US" altLang="zh-CN" sz="2400" b="1" dirty="0"/>
+          </a:p>
+          <a:p>
+            <a:r>
+              <a:rPr lang="en-US" altLang="zh-CN" sz="2400" b="1" dirty="0"/>
+              <a:t>2</a:t>
+            </a:r>
+            <a:r>
+              <a:rPr lang="zh-CN" altLang="en-US" sz="2400" b="1" dirty="0"/>
+              <a:t>、第二版</a:t>
+            </a:r>
+            <a:r>
+              <a:rPr lang="en-US" altLang="zh-CN" sz="2400" b="1" dirty="0"/>
+              <a:t>BOM</a:t>
+            </a:r>
+            <a:r>
+              <a:rPr lang="zh-CN" altLang="en-US" sz="2400" b="1" dirty="0"/>
+              <a:t>完成（分成机械电器两个）</a:t>
+            </a:r>
+          </a:p>
+        </p:txBody>
+      </p:sp>
     </p:spTree>
     <p:extLst>
       <p:ext uri="{BB962C8B-B14F-4D97-AF65-F5344CB8AC3E}">
-        <p14:creationId xmlns:p14="http://schemas.microsoft.com/office/powerpoint/2010/main" val="2995445147"/>
+        <p14:creationId xmlns:p14="http://schemas.microsoft.com/office/powerpoint/2010/main" val="782037625"/>
       </p:ext>
     </p:extLst>
   </p:cSld>
@@ -6177,7 +7936,7 @@
         <p:cNvPr id="1" name="">
           <a:extLst>
             <a:ext uri="{FF2B5EF4-FFF2-40B4-BE49-F238E27FC236}">
-              <a16:creationId xmlns:a16="http://schemas.microsoft.com/office/drawing/2014/main" id="{3083B666-6CF1-A393-0663-AD1A9AC885CD}"/>
+              <a16:creationId xmlns:a16="http://schemas.microsoft.com/office/drawing/2014/main" id="{CDEFE05B-7645-F94F-C588-20C92F4E643A}"/>
             </a:ext>
           </a:extLst>
         </p:cNvPr>
@@ -6194,10 +7953,10 @@
       </p:grpSpPr>
       <p:sp>
         <p:nvSpPr>
-          <p:cNvPr id="4" name="矩形 3">
-            <a:extLst>
-              <a:ext uri="{FF2B5EF4-FFF2-40B4-BE49-F238E27FC236}">
-                <a16:creationId xmlns:a16="http://schemas.microsoft.com/office/drawing/2014/main" id="{8E621D31-4CB9-B274-8807-DA2D65816D1C}"/>
+          <p:cNvPr id="9" name="矩形 8">
+            <a:extLst>
+              <a:ext uri="{FF2B5EF4-FFF2-40B4-BE49-F238E27FC236}">
+                <a16:creationId xmlns:a16="http://schemas.microsoft.com/office/drawing/2014/main" id="{BF484ED5-7D05-E6FB-7077-019C0E601A5D}"/>
               </a:ext>
             </a:extLst>
           </p:cNvPr>
@@ -6206,14 +7965,14 @@
         </p:nvSpPr>
         <p:spPr>
           <a:xfrm>
-            <a:off x="0" y="944628"/>
-            <a:ext cx="2025283" cy="5913372"/>
+            <a:off x="0" y="4053249"/>
+            <a:ext cx="12192000" cy="2709193"/>
           </a:xfrm>
           <a:prstGeom prst="rect">
             <a:avLst/>
           </a:prstGeom>
           <a:solidFill>
-            <a:srgbClr val="177BF5"/>
+            <a:srgbClr val="177DF8"/>
           </a:solidFill>
           <a:ln>
             <a:noFill/>
@@ -6240,16 +7999,50 @@
           <a:lstStyle/>
           <a:p>
             <a:pPr algn="ctr"/>
-            <a:endParaRPr lang="zh-CN" altLang="en-US"/>
-          </a:p>
-        </p:txBody>
-      </p:sp>
-      <p:sp>
-        <p:nvSpPr>
-          <p:cNvPr id="6" name="矩形 5">
-            <a:extLst>
-              <a:ext uri="{FF2B5EF4-FFF2-40B4-BE49-F238E27FC236}">
-                <a16:creationId xmlns:a16="http://schemas.microsoft.com/office/drawing/2014/main" id="{95533B91-FB62-3FF3-6962-B25DAA8A4A9F}"/>
+            <a:r>
+              <a:rPr lang="en-US" altLang="zh-CN" dirty="0"/>
+              <a:t>·</a:t>
+            </a:r>
+            <a:endParaRPr lang="zh-CN" altLang="en-US" dirty="0"/>
+          </a:p>
+        </p:txBody>
+      </p:sp>
+      <p:pic>
+        <p:nvPicPr>
+          <p:cNvPr id="11" name="图片 10">
+            <a:extLst>
+              <a:ext uri="{FF2B5EF4-FFF2-40B4-BE49-F238E27FC236}">
+                <a16:creationId xmlns:a16="http://schemas.microsoft.com/office/drawing/2014/main" id="{480F4548-9FA0-22E8-7EB7-2A8472CFA137}"/>
+              </a:ext>
+            </a:extLst>
+          </p:cNvPr>
+          <p:cNvPicPr>
+            <a:picLocks noChangeAspect="1"/>
+          </p:cNvPicPr>
+          <p:nvPr/>
+        </p:nvPicPr>
+        <p:blipFill>
+          <a:blip r:embed="rId2"/>
+          <a:stretch>
+            <a:fillRect/>
+          </a:stretch>
+        </p:blipFill>
+        <p:spPr>
+          <a:xfrm>
+            <a:off x="184195" y="197312"/>
+            <a:ext cx="1741460" cy="586009"/>
+          </a:xfrm>
+          <a:prstGeom prst="rect">
+            <a:avLst/>
+          </a:prstGeom>
+        </p:spPr>
+      </p:pic>
+      <p:sp>
+        <p:nvSpPr>
+          <p:cNvPr id="12" name="矩形 11">
+            <a:extLst>
+              <a:ext uri="{FF2B5EF4-FFF2-40B4-BE49-F238E27FC236}">
+                <a16:creationId xmlns:a16="http://schemas.microsoft.com/office/drawing/2014/main" id="{91729F9D-AE1B-2A1B-F0C9-5D7752704456}"/>
               </a:ext>
             </a:extLst>
           </p:cNvPr>
@@ -6258,8 +8051,8 @@
         </p:nvSpPr>
         <p:spPr>
           <a:xfrm>
-            <a:off x="-1" y="1080655"/>
-            <a:ext cx="2025283" cy="5777345"/>
+            <a:off x="0" y="4148805"/>
+            <a:ext cx="12192000" cy="2709193"/>
           </a:xfrm>
           <a:prstGeom prst="rect">
             <a:avLst/>
@@ -6298,102 +8091,118 @@
       </p:sp>
       <p:sp>
         <p:nvSpPr>
-          <p:cNvPr id="7" name="标题 1">
-            <a:extLst>
-              <a:ext uri="{FF2B5EF4-FFF2-40B4-BE49-F238E27FC236}">
-                <a16:creationId xmlns:a16="http://schemas.microsoft.com/office/drawing/2014/main" id="{BDF3B1CF-7975-4412-98F0-32FF72F44D38}"/>
-              </a:ext>
-            </a:extLst>
-          </p:cNvPr>
-          <p:cNvSpPr txBox="1">
-            <a:spLocks/>
+          <p:cNvPr id="14" name="Text Placeholder 1">
+            <a:extLst>
+              <a:ext uri="{FF2B5EF4-FFF2-40B4-BE49-F238E27FC236}">
+                <a16:creationId xmlns:a16="http://schemas.microsoft.com/office/drawing/2014/main" id="{41521101-0052-C9AE-2B42-EE4744E6012B}"/>
+              </a:ext>
+            </a:extLst>
+          </p:cNvPr>
+          <p:cNvSpPr>
+            <a:spLocks noChangeArrowheads="1"/>
           </p:cNvSpPr>
           <p:nvPr/>
         </p:nvSpPr>
-        <p:spPr>
-          <a:xfrm>
-            <a:off x="2231406" y="197312"/>
-            <a:ext cx="4412506" cy="647777"/>
-          </a:xfrm>
-          <a:prstGeom prst="rect">
-            <a:avLst/>
-          </a:prstGeom>
-        </p:spPr>
-        <p:txBody>
-          <a:bodyPr vert="horz" lIns="91440" tIns="45720" rIns="91440" bIns="45720" rtlCol="0" anchor="ctr">
-            <a:normAutofit/>
+        <p:spPr bwMode="auto">
+          <a:xfrm>
+            <a:off x="184195" y="6106149"/>
+            <a:ext cx="5721796" cy="440494"/>
+          </a:xfrm>
+          <a:prstGeom prst="rect">
+            <a:avLst/>
+          </a:prstGeom>
+          <a:noFill/>
+          <a:ln w="9525">
+            <a:noFill/>
+            <a:bevel/>
+          </a:ln>
+        </p:spPr>
+        <p:txBody>
+          <a:bodyPr anchor="ctr"/>
+          <a:lstStyle/>
+          <a:p>
+            <a:pPr eaLnBrk="1" hangingPunct="1">
+              <a:defRPr/>
+            </a:pPr>
+            <a:r>
+              <a:rPr lang="en-US" altLang="zh-CN" sz="1400" b="1" dirty="0">
+                <a:solidFill>
+                  <a:schemeClr val="accent4">
+                    <a:lumMod val="95000"/>
+                    <a:lumOff val="5000"/>
+                  </a:schemeClr>
+                </a:solidFill>
+                <a:latin typeface="Arial" panose="020B0604020202020204" pitchFamily="34" charset="0"/>
+                <a:cs typeface="Arial" panose="020B0604020202020204" pitchFamily="34" charset="0"/>
+              </a:rPr>
+              <a:t>Prepared by AIR-Tech@ </a:t>
+            </a:r>
+            <a:fld id="{5853BA87-C0A4-4D40-A7D0-264FBDFF6174}" type="datetime9">
+              <a:rPr lang="en-US" altLang="zh-CN" sz="1400" b="1" dirty="0" smtClean="0">
+                <a:solidFill>
+                  <a:schemeClr val="accent4">
+                    <a:lumMod val="95000"/>
+                    <a:lumOff val="5000"/>
+                  </a:schemeClr>
+                </a:solidFill>
+                <a:latin typeface="Arial" panose="020B0604020202020204" pitchFamily="34" charset="0"/>
+                <a:cs typeface="Arial" panose="020B0604020202020204" pitchFamily="34" charset="0"/>
+              </a:rPr>
+              <a:t>11/24/2025 5:24:34 PM</a:t>
+            </a:fld>
+            <a:endParaRPr lang="zh-CN" altLang="en-US" sz="1400" b="1" dirty="0">
+              <a:solidFill>
+                <a:schemeClr val="accent4">
+                  <a:lumMod val="95000"/>
+                  <a:lumOff val="5000"/>
+                </a:schemeClr>
+              </a:solidFill>
+              <a:latin typeface="Arial" panose="020B0604020202020204" pitchFamily="34" charset="0"/>
+              <a:cs typeface="Arial" panose="020B0604020202020204" pitchFamily="34" charset="0"/>
+            </a:endParaRPr>
+          </a:p>
+        </p:txBody>
+      </p:sp>
+      <p:sp>
+        <p:nvSpPr>
+          <p:cNvPr id="4" name="文本框 3">
+            <a:extLst>
+              <a:ext uri="{FF2B5EF4-FFF2-40B4-BE49-F238E27FC236}">
+                <a16:creationId xmlns:a16="http://schemas.microsoft.com/office/drawing/2014/main" id="{78611506-9CF2-CED6-0673-98E0CC70569D}"/>
+              </a:ext>
+            </a:extLst>
+          </p:cNvPr>
+          <p:cNvSpPr txBox="1"/>
+          <p:nvPr/>
+        </p:nvSpPr>
+        <p:spPr>
+          <a:xfrm>
+            <a:off x="3045093" y="2249386"/>
+            <a:ext cx="6094902" cy="1015663"/>
+          </a:xfrm>
+          <a:prstGeom prst="rect">
+            <a:avLst/>
+          </a:prstGeom>
+          <a:noFill/>
+        </p:spPr>
+        <p:txBody>
+          <a:bodyPr wrap="square">
+            <a:spAutoFit/>
           </a:bodyPr>
-          <a:lstStyle>
-            <a:lvl1pPr algn="l" defTabSz="914400" rtl="0" eaLnBrk="1" latinLnBrk="0" hangingPunct="1">
-              <a:lnSpc>
-                <a:spcPct val="90000"/>
-              </a:lnSpc>
-              <a:spcBef>
-                <a:spcPct val="0"/>
-              </a:spcBef>
-              <a:buNone/>
-              <a:defRPr sz="4400" kern="1200">
-                <a:solidFill>
-                  <a:schemeClr val="tx1"/>
-                </a:solidFill>
-                <a:latin typeface="+mj-lt"/>
-                <a:ea typeface="+mj-ea"/>
-                <a:cs typeface="+mj-cs"/>
-              </a:defRPr>
-            </a:lvl1pPr>
-          </a:lstStyle>
-          <a:p>
-            <a:r>
-              <a:rPr lang="zh-CN" altLang="en-US" sz="4000" b="1" dirty="0">
-                <a:latin typeface="+mn-ea"/>
-                <a:ea typeface="+mn-ea"/>
-              </a:rPr>
-              <a:t>接下来的规划</a:t>
-            </a:r>
-          </a:p>
-        </p:txBody>
-      </p:sp>
-      <p:pic>
-        <p:nvPicPr>
-          <p:cNvPr id="2" name="图片 1" descr="徽标&#10;&#10;AI 生成的内容可能不正确。">
-            <a:extLst>
-              <a:ext uri="{FF2B5EF4-FFF2-40B4-BE49-F238E27FC236}">
-                <a16:creationId xmlns:a16="http://schemas.microsoft.com/office/drawing/2014/main" id="{2F1D7FFF-1DBB-093E-4127-CA20C94203E3}"/>
-              </a:ext>
-            </a:extLst>
-          </p:cNvPr>
-          <p:cNvPicPr>
-            <a:picLocks/>
-          </p:cNvPicPr>
-          <p:nvPr/>
-        </p:nvPicPr>
-        <p:blipFill>
-          <a:blip r:embed="rId2">
-            <a:extLst>
-              <a:ext uri="{28A0092B-C50C-407E-A947-70E740481C1C}">
-                <a14:useLocalDpi xmlns:a14="http://schemas.microsoft.com/office/drawing/2010/main" val="0"/>
-              </a:ext>
-            </a:extLst>
-          </a:blip>
-          <a:srcRect t="29985" b="27316"/>
-          <a:stretch>
-            <a:fillRect/>
-          </a:stretch>
-        </p:blipFill>
-        <p:spPr>
-          <a:xfrm>
-            <a:off x="184195" y="166221"/>
-            <a:ext cx="1741461" cy="688543"/>
-          </a:xfrm>
-          <a:prstGeom prst="rect">
-            <a:avLst/>
-          </a:prstGeom>
-        </p:spPr>
-      </p:pic>
+          <a:lstStyle/>
+          <a:p>
+            <a:pPr algn="ctr"/>
+            <a:r>
+              <a:rPr lang="zh-CN" altLang="en-US" sz="6000" b="1" dirty="0"/>
+              <a:t>总结与展望</a:t>
+            </a:r>
+          </a:p>
+        </p:txBody>
+      </p:sp>
     </p:spTree>
     <p:extLst>
       <p:ext uri="{BB962C8B-B14F-4D97-AF65-F5344CB8AC3E}">
-        <p14:creationId xmlns:p14="http://schemas.microsoft.com/office/powerpoint/2010/main" val="782037625"/>
+        <p14:creationId xmlns:p14="http://schemas.microsoft.com/office/powerpoint/2010/main" val="1155721585"/>
       </p:ext>
     </p:extLst>
   </p:cSld>
@@ -6467,7 +8276,7 @@
             <a:avLst/>
           </a:prstGeom>
           <a:solidFill>
-            <a:srgbClr val="177BF5"/>
+            <a:srgbClr val="197DF7"/>
           </a:solidFill>
           <a:ln>
             <a:noFill/>
@@ -6498,6 +8307,36 @@
           </a:p>
         </p:txBody>
       </p:sp>
+      <p:pic>
+        <p:nvPicPr>
+          <p:cNvPr id="5" name="图片 4">
+            <a:extLst>
+              <a:ext uri="{FF2B5EF4-FFF2-40B4-BE49-F238E27FC236}">
+                <a16:creationId xmlns:a16="http://schemas.microsoft.com/office/drawing/2014/main" id="{E20D75DF-7757-7B5C-0233-988E6CC61BA9}"/>
+              </a:ext>
+            </a:extLst>
+          </p:cNvPr>
+          <p:cNvPicPr>
+            <a:picLocks noChangeAspect="1"/>
+          </p:cNvPicPr>
+          <p:nvPr/>
+        </p:nvPicPr>
+        <p:blipFill>
+          <a:blip r:embed="rId2"/>
+          <a:stretch>
+            <a:fillRect/>
+          </a:stretch>
+        </p:blipFill>
+        <p:spPr>
+          <a:xfrm>
+            <a:off x="184195" y="197312"/>
+            <a:ext cx="1741460" cy="586009"/>
+          </a:xfrm>
+          <a:prstGeom prst="rect">
+            <a:avLst/>
+          </a:prstGeom>
+        </p:spPr>
+      </p:pic>
       <p:sp>
         <p:nvSpPr>
           <p:cNvPr id="6" name="矩形 5">
@@ -6622,14 +8461,14 @@
         </p:nvSpPr>
         <p:spPr>
           <a:xfrm>
-            <a:off x="1610015" y="2458115"/>
+            <a:off x="1617673" y="2502367"/>
             <a:ext cx="136026" cy="143584"/>
           </a:xfrm>
           <a:prstGeom prst="rect">
             <a:avLst/>
           </a:prstGeom>
           <a:solidFill>
-            <a:srgbClr val="177BF5"/>
+            <a:schemeClr val="bg2"/>
           </a:solidFill>
           <a:ln>
             <a:noFill/>
@@ -6674,14 +8513,14 @@
         </p:nvSpPr>
         <p:spPr>
           <a:xfrm>
-            <a:off x="1610015" y="3318693"/>
+            <a:off x="1617673" y="3980238"/>
             <a:ext cx="136026" cy="143584"/>
           </a:xfrm>
           <a:prstGeom prst="rect">
             <a:avLst/>
           </a:prstGeom>
           <a:solidFill>
-            <a:srgbClr val="177BF5"/>
+            <a:schemeClr val="bg2"/>
           </a:solidFill>
           <a:ln>
             <a:noFill/>
@@ -6708,7 +8547,7 @@
           <a:lstStyle/>
           <a:p>
             <a:pPr algn="ctr"/>
-            <a:endParaRPr lang="zh-CN" altLang="en-US"/>
+            <a:endParaRPr lang="zh-CN" altLang="en-US" dirty="0"/>
           </a:p>
         </p:txBody>
       </p:sp>
@@ -6726,14 +8565,14 @@
         </p:nvSpPr>
         <p:spPr>
           <a:xfrm>
-            <a:off x="1610015" y="4179271"/>
+            <a:off x="1617673" y="4714894"/>
             <a:ext cx="136026" cy="143584"/>
           </a:xfrm>
           <a:prstGeom prst="rect">
             <a:avLst/>
           </a:prstGeom>
           <a:solidFill>
-            <a:srgbClr val="177BF5"/>
+            <a:schemeClr val="bg2"/>
           </a:solidFill>
           <a:ln>
             <a:noFill/>
@@ -6760,7 +8599,7 @@
           <a:lstStyle/>
           <a:p>
             <a:pPr algn="ctr"/>
-            <a:endParaRPr lang="zh-CN" altLang="en-US"/>
+            <a:endParaRPr lang="zh-CN" altLang="en-US" dirty="0"/>
           </a:p>
         </p:txBody>
       </p:sp>
@@ -6778,14 +8617,14 @@
         </p:nvSpPr>
         <p:spPr>
           <a:xfrm>
-            <a:off x="1610015" y="5039849"/>
+            <a:off x="1630530" y="5460708"/>
             <a:ext cx="136026" cy="143584"/>
           </a:xfrm>
           <a:prstGeom prst="rect">
             <a:avLst/>
           </a:prstGeom>
           <a:solidFill>
-            <a:srgbClr val="177BF5"/>
+            <a:schemeClr val="bg2"/>
           </a:solidFill>
           <a:ln>
             <a:noFill/>
@@ -6812,7 +8651,7 @@
           <a:lstStyle/>
           <a:p>
             <a:pPr algn="ctr"/>
-            <a:endParaRPr lang="zh-CN" altLang="en-US"/>
+            <a:endParaRPr lang="zh-CN" altLang="en-US" dirty="0"/>
           </a:p>
         </p:txBody>
       </p:sp>
@@ -6830,7 +8669,7 @@
         </p:nvSpPr>
         <p:spPr>
           <a:xfrm>
-            <a:off x="2270877" y="3098097"/>
+            <a:off x="2270872" y="3759643"/>
             <a:ext cx="6127845" cy="584775"/>
           </a:xfrm>
           <a:prstGeom prst="rect">
@@ -6869,7 +8708,7 @@
         </p:nvSpPr>
         <p:spPr>
           <a:xfrm>
-            <a:off x="2270875" y="3958675"/>
+            <a:off x="2270872" y="4499878"/>
             <a:ext cx="6127845" cy="584775"/>
           </a:xfrm>
           <a:prstGeom prst="rect">
@@ -6908,7 +8747,7 @@
         </p:nvSpPr>
         <p:spPr>
           <a:xfrm>
-            <a:off x="2270876" y="4819253"/>
+            <a:off x="2270872" y="5240113"/>
             <a:ext cx="6127845" cy="584775"/>
           </a:xfrm>
           <a:prstGeom prst="rect">
@@ -6986,7 +8825,7 @@
         </p:nvSpPr>
         <p:spPr>
           <a:xfrm>
-            <a:off x="2270876" y="5679831"/>
+            <a:off x="2270872" y="5980348"/>
             <a:ext cx="6127845" cy="584775"/>
           </a:xfrm>
           <a:prstGeom prst="rect">
@@ -7024,15 +8863,15 @@
           <p:nvPr/>
         </p:nvSpPr>
         <p:spPr>
-          <a:xfrm>
-            <a:off x="1610015" y="5900427"/>
-            <a:ext cx="136026" cy="143584"/>
+          <a:xfrm flipV="1">
+            <a:off x="1617673" y="6200943"/>
+            <a:ext cx="136026" cy="143583"/>
           </a:xfrm>
           <a:prstGeom prst="rect">
             <a:avLst/>
           </a:prstGeom>
           <a:solidFill>
-            <a:srgbClr val="177BF5"/>
+            <a:schemeClr val="bg2"/>
           </a:solidFill>
           <a:ln>
             <a:noFill/>
@@ -7063,93 +8902,51 @@
           </a:p>
         </p:txBody>
       </p:sp>
-      <p:pic>
-        <p:nvPicPr>
-          <p:cNvPr id="5" name="图片 4" descr="徽标&#10;&#10;AI 生成的内容可能不正确。">
-            <a:extLst>
-              <a:ext uri="{FF2B5EF4-FFF2-40B4-BE49-F238E27FC236}">
-                <a16:creationId xmlns:a16="http://schemas.microsoft.com/office/drawing/2014/main" id="{23FDCDAC-9819-1467-236D-5C581296920A}"/>
-              </a:ext>
-            </a:extLst>
-          </p:cNvPr>
-          <p:cNvPicPr>
-            <a:picLocks/>
-          </p:cNvPicPr>
-          <p:nvPr/>
-        </p:nvPicPr>
-        <p:blipFill>
-          <a:blip r:embed="rId2">
-            <a:extLst>
-              <a:ext uri="{28A0092B-C50C-407E-A947-70E740481C1C}">
-                <a14:useLocalDpi xmlns:a14="http://schemas.microsoft.com/office/drawing/2010/main" val="0"/>
-              </a:ext>
-            </a:extLst>
-          </a:blip>
-          <a:srcRect t="29985" b="27316"/>
-          <a:stretch>
-            <a:fillRect/>
-          </a:stretch>
-        </p:blipFill>
-        <p:spPr>
-          <a:xfrm>
-            <a:off x="184195" y="166221"/>
-            <a:ext cx="1741461" cy="688543"/>
-          </a:xfrm>
-          <a:prstGeom prst="rect">
-            <a:avLst/>
-          </a:prstGeom>
-        </p:spPr>
-      </p:pic>
-    </p:spTree>
-    <p:extLst>
-      <p:ext uri="{BB962C8B-B14F-4D97-AF65-F5344CB8AC3E}">
-        <p14:creationId xmlns:p14="http://schemas.microsoft.com/office/powerpoint/2010/main" val="3670835586"/>
-      </p:ext>
-    </p:extLst>
-  </p:cSld>
-  <p:clrMapOvr>
-    <a:masterClrMapping/>
-  </p:clrMapOvr>
-</p:sld>
-</file>
-
-<file path=ppt/slides/slide20.xml><?xml version="1.0" encoding="utf-8"?>
-<p:sld xmlns:a="http://schemas.openxmlformats.org/drawingml/2006/main" xmlns:r="http://schemas.openxmlformats.org/officeDocument/2006/relationships" xmlns:p="http://schemas.openxmlformats.org/presentationml/2006/main">
-  <p:cSld>
-    <p:bg>
-      <p:bgPr>
-        <a:solidFill>
-          <a:srgbClr val="FFFCF7"/>
-        </a:solidFill>
-        <a:effectLst/>
-      </p:bgPr>
-    </p:bg>
-    <p:spTree>
-      <p:nvGrpSpPr>
-        <p:cNvPr id="1" name="">
-          <a:extLst>
-            <a:ext uri="{FF2B5EF4-FFF2-40B4-BE49-F238E27FC236}">
-              <a16:creationId xmlns:a16="http://schemas.microsoft.com/office/drawing/2014/main" id="{ED2B1A5F-3FC7-633D-B33F-CF6F83561894}"/>
-            </a:ext>
-          </a:extLst>
-        </p:cNvPr>
-        <p:cNvGrpSpPr/>
-        <p:nvPr/>
-      </p:nvGrpSpPr>
-      <p:grpSpPr>
-        <a:xfrm>
-          <a:off x="0" y="0"/>
-          <a:ext cx="0" cy="0"/>
-          <a:chOff x="0" y="0"/>
-          <a:chExt cx="0" cy="0"/>
-        </a:xfrm>
-      </p:grpSpPr>
-      <p:sp>
-        <p:nvSpPr>
-          <p:cNvPr id="4" name="矩形 3">
-            <a:extLst>
-              <a:ext uri="{FF2B5EF4-FFF2-40B4-BE49-F238E27FC236}">
-                <a16:creationId xmlns:a16="http://schemas.microsoft.com/office/drawing/2014/main" id="{090CE197-3686-4B01-5C90-04CEC9212F5F}"/>
+      <p:sp>
+        <p:nvSpPr>
+          <p:cNvPr id="8" name="文本框 7">
+            <a:extLst>
+              <a:ext uri="{FF2B5EF4-FFF2-40B4-BE49-F238E27FC236}">
+                <a16:creationId xmlns:a16="http://schemas.microsoft.com/office/drawing/2014/main" id="{B415A74D-9B3E-9BF0-FF30-F5C861CB7D04}"/>
+              </a:ext>
+            </a:extLst>
+          </p:cNvPr>
+          <p:cNvSpPr txBox="1"/>
+          <p:nvPr/>
+        </p:nvSpPr>
+        <p:spPr>
+          <a:xfrm>
+            <a:off x="2270872" y="3019408"/>
+            <a:ext cx="6127845" cy="584775"/>
+          </a:xfrm>
+          <a:prstGeom prst="rect">
+            <a:avLst/>
+          </a:prstGeom>
+          <a:noFill/>
+        </p:spPr>
+        <p:txBody>
+          <a:bodyPr wrap="square" rtlCol="0">
+            <a:spAutoFit/>
+          </a:bodyPr>
+          <a:lstStyle/>
+          <a:p>
+            <a:r>
+              <a:rPr lang="zh-CN" altLang="en-US" sz="3200" b="1" dirty="0">
+                <a:solidFill>
+                  <a:srgbClr val="0048CE"/>
+                </a:solidFill>
+              </a:rPr>
+              <a:t>整体概览</a:t>
+            </a:r>
+          </a:p>
+        </p:txBody>
+      </p:sp>
+      <p:sp>
+        <p:nvSpPr>
+          <p:cNvPr id="17" name="矩形 16">
+            <a:extLst>
+              <a:ext uri="{FF2B5EF4-FFF2-40B4-BE49-F238E27FC236}">
+                <a16:creationId xmlns:a16="http://schemas.microsoft.com/office/drawing/2014/main" id="{CC78B4C2-74CE-9039-A986-6AFA32F48575}"/>
               </a:ext>
             </a:extLst>
           </p:cNvPr>
@@ -7158,14 +8955,14 @@
         </p:nvSpPr>
         <p:spPr>
           <a:xfrm>
-            <a:off x="0" y="944628"/>
-            <a:ext cx="2025283" cy="5913372"/>
+            <a:off x="1610015" y="3245582"/>
+            <a:ext cx="136026" cy="143584"/>
           </a:xfrm>
           <a:prstGeom prst="rect">
             <a:avLst/>
           </a:prstGeom>
           <a:solidFill>
-            <a:srgbClr val="177BF5"/>
+            <a:schemeClr val="bg2"/>
           </a:solidFill>
           <a:ln>
             <a:noFill/>
@@ -7196,988 +8993,20 @@
           </a:p>
         </p:txBody>
       </p:sp>
-      <p:sp>
-        <p:nvSpPr>
-          <p:cNvPr id="6" name="矩形 5">
-            <a:extLst>
-              <a:ext uri="{FF2B5EF4-FFF2-40B4-BE49-F238E27FC236}">
-                <a16:creationId xmlns:a16="http://schemas.microsoft.com/office/drawing/2014/main" id="{096CA2C9-4BE2-578F-9DDE-F5950D93ED03}"/>
-              </a:ext>
-            </a:extLst>
-          </p:cNvPr>
-          <p:cNvSpPr/>
-          <p:nvPr/>
-        </p:nvSpPr>
-        <p:spPr>
-          <a:xfrm>
-            <a:off x="-1" y="1080655"/>
-            <a:ext cx="2025283" cy="5777345"/>
-          </a:xfrm>
-          <a:prstGeom prst="rect">
-            <a:avLst/>
-          </a:prstGeom>
-          <a:solidFill>
-            <a:srgbClr val="0048CE"/>
-          </a:solidFill>
-          <a:ln>
-            <a:noFill/>
-          </a:ln>
-        </p:spPr>
-        <p:style>
-          <a:lnRef idx="2">
-            <a:schemeClr val="accent1">
-              <a:shade val="15000"/>
-            </a:schemeClr>
-          </a:lnRef>
-          <a:fillRef idx="1">
-            <a:schemeClr val="accent1"/>
-          </a:fillRef>
-          <a:effectRef idx="0">
-            <a:schemeClr val="accent1"/>
-          </a:effectRef>
-          <a:fontRef idx="minor">
-            <a:schemeClr val="lt1"/>
-          </a:fontRef>
-        </p:style>
-        <p:txBody>
-          <a:bodyPr rtlCol="0" anchor="ctr"/>
-          <a:lstStyle/>
-          <a:p>
-            <a:pPr algn="ctr"/>
-            <a:endParaRPr lang="zh-CN" altLang="en-US"/>
-          </a:p>
-        </p:txBody>
-      </p:sp>
-      <p:sp>
-        <p:nvSpPr>
-          <p:cNvPr id="7" name="标题 1">
-            <a:extLst>
-              <a:ext uri="{FF2B5EF4-FFF2-40B4-BE49-F238E27FC236}">
-                <a16:creationId xmlns:a16="http://schemas.microsoft.com/office/drawing/2014/main" id="{7BED06A0-CA3B-ADCD-8694-DA8FD461B51E}"/>
-              </a:ext>
-            </a:extLst>
-          </p:cNvPr>
-          <p:cNvSpPr txBox="1">
-            <a:spLocks/>
-          </p:cNvSpPr>
-          <p:nvPr/>
-        </p:nvSpPr>
-        <p:spPr>
-          <a:xfrm>
-            <a:off x="2231406" y="197312"/>
-            <a:ext cx="4412506" cy="647777"/>
-          </a:xfrm>
-          <a:prstGeom prst="rect">
-            <a:avLst/>
-          </a:prstGeom>
-        </p:spPr>
-        <p:txBody>
-          <a:bodyPr vert="horz" lIns="91440" tIns="45720" rIns="91440" bIns="45720" rtlCol="0" anchor="ctr">
-            <a:normAutofit/>
-          </a:bodyPr>
-          <a:lstStyle>
-            <a:lvl1pPr algn="l" defTabSz="914400" rtl="0" eaLnBrk="1" latinLnBrk="0" hangingPunct="1">
-              <a:lnSpc>
-                <a:spcPct val="90000"/>
-              </a:lnSpc>
-              <a:spcBef>
-                <a:spcPct val="0"/>
-              </a:spcBef>
-              <a:buNone/>
-              <a:defRPr sz="4400" kern="1200">
-                <a:solidFill>
-                  <a:schemeClr val="tx1"/>
-                </a:solidFill>
-                <a:latin typeface="+mj-lt"/>
-                <a:ea typeface="+mj-ea"/>
-                <a:cs typeface="+mj-cs"/>
-              </a:defRPr>
-            </a:lvl1pPr>
-          </a:lstStyle>
-          <a:p>
-            <a:r>
-              <a:rPr lang="zh-CN" altLang="en-US" sz="4000" b="1" dirty="0">
-                <a:latin typeface="+mn-ea"/>
-                <a:ea typeface="+mn-ea"/>
-              </a:rPr>
-              <a:t>接下来的规划</a:t>
-            </a:r>
-          </a:p>
-        </p:txBody>
-      </p:sp>
-      <p:pic>
-        <p:nvPicPr>
-          <p:cNvPr id="2" name="图片 1" descr="徽标&#10;&#10;AI 生成的内容可能不正确。">
-            <a:extLst>
-              <a:ext uri="{FF2B5EF4-FFF2-40B4-BE49-F238E27FC236}">
-                <a16:creationId xmlns:a16="http://schemas.microsoft.com/office/drawing/2014/main" id="{2121F946-A03C-5F56-A4C7-A01BD4814C86}"/>
-              </a:ext>
-            </a:extLst>
-          </p:cNvPr>
-          <p:cNvPicPr>
-            <a:picLocks/>
-          </p:cNvPicPr>
-          <p:nvPr/>
-        </p:nvPicPr>
-        <p:blipFill>
-          <a:blip r:embed="rId2">
-            <a:extLst>
-              <a:ext uri="{28A0092B-C50C-407E-A947-70E740481C1C}">
-                <a14:useLocalDpi xmlns:a14="http://schemas.microsoft.com/office/drawing/2010/main" val="0"/>
-              </a:ext>
-            </a:extLst>
-          </a:blip>
-          <a:srcRect t="29985" b="27316"/>
-          <a:stretch>
-            <a:fillRect/>
-          </a:stretch>
-        </p:blipFill>
-        <p:spPr>
-          <a:xfrm>
-            <a:off x="184195" y="166221"/>
-            <a:ext cx="1741461" cy="688543"/>
-          </a:xfrm>
-          <a:prstGeom prst="rect">
-            <a:avLst/>
-          </a:prstGeom>
-        </p:spPr>
-      </p:pic>
     </p:spTree>
     <p:extLst>
       <p:ext uri="{BB962C8B-B14F-4D97-AF65-F5344CB8AC3E}">
-        <p14:creationId xmlns:p14="http://schemas.microsoft.com/office/powerpoint/2010/main" val="1975532276"/>
+        <p14:creationId xmlns:p14="http://schemas.microsoft.com/office/powerpoint/2010/main" val="3670835586"/>
       </p:ext>
     </p:extLst>
   </p:cSld>
   <p:clrMapOvr>
     <a:masterClrMapping/>
   </p:clrMapOvr>
-  <mc:AlternateContent xmlns:mc="http://schemas.openxmlformats.org/markup-compatibility/2006" xmlns:p159="http://schemas.microsoft.com/office/powerpoint/2015/09/main">
-    <mc:Choice Requires="p159">
-      <p:transition xmlns:p14="http://schemas.microsoft.com/office/powerpoint/2010/main" spd="slow" p14:dur="2000">
-        <p159:morph option="byObject"/>
-      </p:transition>
-    </mc:Choice>
-    <mc:Fallback xmlns="">
-      <p:transition spd="slow">
-        <p:fade/>
-      </p:transition>
-    </mc:Fallback>
-  </mc:AlternateContent>
 </p:sld>
 </file>
 
-<file path=ppt/slides/slide21.xml><?xml version="1.0" encoding="utf-8"?>
-<p:sld xmlns:a="http://schemas.openxmlformats.org/drawingml/2006/main" xmlns:r="http://schemas.openxmlformats.org/officeDocument/2006/relationships" xmlns:p="http://schemas.openxmlformats.org/presentationml/2006/main">
-  <p:cSld>
-    <p:bg>
-      <p:bgPr>
-        <a:solidFill>
-          <a:srgbClr val="FFFCF7"/>
-        </a:solidFill>
-        <a:effectLst/>
-      </p:bgPr>
-    </p:bg>
-    <p:spTree>
-      <p:nvGrpSpPr>
-        <p:cNvPr id="1" name="">
-          <a:extLst>
-            <a:ext uri="{FF2B5EF4-FFF2-40B4-BE49-F238E27FC236}">
-              <a16:creationId xmlns:a16="http://schemas.microsoft.com/office/drawing/2014/main" id="{3E64057B-4949-9E0C-F8BF-AAA443B3FF01}"/>
-            </a:ext>
-          </a:extLst>
-        </p:cNvPr>
-        <p:cNvGrpSpPr/>
-        <p:nvPr/>
-      </p:nvGrpSpPr>
-      <p:grpSpPr>
-        <a:xfrm>
-          <a:off x="0" y="0"/>
-          <a:ext cx="0" cy="0"/>
-          <a:chOff x="0" y="0"/>
-          <a:chExt cx="0" cy="0"/>
-        </a:xfrm>
-      </p:grpSpPr>
-      <p:sp>
-        <p:nvSpPr>
-          <p:cNvPr id="4" name="矩形 3">
-            <a:extLst>
-              <a:ext uri="{FF2B5EF4-FFF2-40B4-BE49-F238E27FC236}">
-                <a16:creationId xmlns:a16="http://schemas.microsoft.com/office/drawing/2014/main" id="{F982514C-FE75-458B-0E8C-FA5BD22DD885}"/>
-              </a:ext>
-            </a:extLst>
-          </p:cNvPr>
-          <p:cNvSpPr/>
-          <p:nvPr/>
-        </p:nvSpPr>
-        <p:spPr>
-          <a:xfrm>
-            <a:off x="0" y="944628"/>
-            <a:ext cx="2025283" cy="5913372"/>
-          </a:xfrm>
-          <a:prstGeom prst="rect">
-            <a:avLst/>
-          </a:prstGeom>
-          <a:solidFill>
-            <a:srgbClr val="177BF5"/>
-          </a:solidFill>
-          <a:ln>
-            <a:noFill/>
-          </a:ln>
-        </p:spPr>
-        <p:style>
-          <a:lnRef idx="2">
-            <a:schemeClr val="accent1">
-              <a:shade val="15000"/>
-            </a:schemeClr>
-          </a:lnRef>
-          <a:fillRef idx="1">
-            <a:schemeClr val="accent1"/>
-          </a:fillRef>
-          <a:effectRef idx="0">
-            <a:schemeClr val="accent1"/>
-          </a:effectRef>
-          <a:fontRef idx="minor">
-            <a:schemeClr val="lt1"/>
-          </a:fontRef>
-        </p:style>
-        <p:txBody>
-          <a:bodyPr rtlCol="0" anchor="ctr"/>
-          <a:lstStyle/>
-          <a:p>
-            <a:pPr algn="ctr"/>
-            <a:endParaRPr lang="zh-CN" altLang="en-US"/>
-          </a:p>
-        </p:txBody>
-      </p:sp>
-      <p:sp>
-        <p:nvSpPr>
-          <p:cNvPr id="6" name="矩形 5">
-            <a:extLst>
-              <a:ext uri="{FF2B5EF4-FFF2-40B4-BE49-F238E27FC236}">
-                <a16:creationId xmlns:a16="http://schemas.microsoft.com/office/drawing/2014/main" id="{BA3999D6-8ECA-0A7E-5CBB-EC754869089B}"/>
-              </a:ext>
-            </a:extLst>
-          </p:cNvPr>
-          <p:cNvSpPr/>
-          <p:nvPr/>
-        </p:nvSpPr>
-        <p:spPr>
-          <a:xfrm>
-            <a:off x="-1" y="1080655"/>
-            <a:ext cx="2025283" cy="5777345"/>
-          </a:xfrm>
-          <a:prstGeom prst="rect">
-            <a:avLst/>
-          </a:prstGeom>
-          <a:solidFill>
-            <a:srgbClr val="0048CE"/>
-          </a:solidFill>
-          <a:ln>
-            <a:noFill/>
-          </a:ln>
-        </p:spPr>
-        <p:style>
-          <a:lnRef idx="2">
-            <a:schemeClr val="accent1">
-              <a:shade val="15000"/>
-            </a:schemeClr>
-          </a:lnRef>
-          <a:fillRef idx="1">
-            <a:schemeClr val="accent1"/>
-          </a:fillRef>
-          <a:effectRef idx="0">
-            <a:schemeClr val="accent1"/>
-          </a:effectRef>
-          <a:fontRef idx="minor">
-            <a:schemeClr val="lt1"/>
-          </a:fontRef>
-        </p:style>
-        <p:txBody>
-          <a:bodyPr rtlCol="0" anchor="ctr"/>
-          <a:lstStyle/>
-          <a:p>
-            <a:pPr algn="ctr"/>
-            <a:endParaRPr lang="zh-CN" altLang="en-US"/>
-          </a:p>
-        </p:txBody>
-      </p:sp>
-      <p:sp>
-        <p:nvSpPr>
-          <p:cNvPr id="7" name="标题 1">
-            <a:extLst>
-              <a:ext uri="{FF2B5EF4-FFF2-40B4-BE49-F238E27FC236}">
-                <a16:creationId xmlns:a16="http://schemas.microsoft.com/office/drawing/2014/main" id="{EA80CDD0-CBF4-00D2-6768-4E8332415377}"/>
-              </a:ext>
-            </a:extLst>
-          </p:cNvPr>
-          <p:cNvSpPr txBox="1">
-            <a:spLocks/>
-          </p:cNvSpPr>
-          <p:nvPr/>
-        </p:nvSpPr>
-        <p:spPr>
-          <a:xfrm>
-            <a:off x="2231406" y="197312"/>
-            <a:ext cx="4412506" cy="647777"/>
-          </a:xfrm>
-          <a:prstGeom prst="rect">
-            <a:avLst/>
-          </a:prstGeom>
-        </p:spPr>
-        <p:txBody>
-          <a:bodyPr vert="horz" lIns="91440" tIns="45720" rIns="91440" bIns="45720" rtlCol="0" anchor="ctr">
-            <a:normAutofit/>
-          </a:bodyPr>
-          <a:lstStyle>
-            <a:lvl1pPr algn="l" defTabSz="914400" rtl="0" eaLnBrk="1" latinLnBrk="0" hangingPunct="1">
-              <a:lnSpc>
-                <a:spcPct val="90000"/>
-              </a:lnSpc>
-              <a:spcBef>
-                <a:spcPct val="0"/>
-              </a:spcBef>
-              <a:buNone/>
-              <a:defRPr sz="4400" kern="1200">
-                <a:solidFill>
-                  <a:schemeClr val="tx1"/>
-                </a:solidFill>
-                <a:latin typeface="+mj-lt"/>
-                <a:ea typeface="+mj-ea"/>
-                <a:cs typeface="+mj-cs"/>
-              </a:defRPr>
-            </a:lvl1pPr>
-          </a:lstStyle>
-          <a:p>
-            <a:r>
-              <a:rPr lang="zh-CN" altLang="en-US" sz="4000" b="1" dirty="0">
-                <a:latin typeface="+mn-ea"/>
-                <a:ea typeface="+mn-ea"/>
-              </a:rPr>
-              <a:t>接下来的规划</a:t>
-            </a:r>
-          </a:p>
-        </p:txBody>
-      </p:sp>
-      <p:pic>
-        <p:nvPicPr>
-          <p:cNvPr id="2" name="图片 1" descr="徽标&#10;&#10;AI 生成的内容可能不正确。">
-            <a:extLst>
-              <a:ext uri="{FF2B5EF4-FFF2-40B4-BE49-F238E27FC236}">
-                <a16:creationId xmlns:a16="http://schemas.microsoft.com/office/drawing/2014/main" id="{D5019EFD-ED7A-6836-CBB9-E8E85CEE20DA}"/>
-              </a:ext>
-            </a:extLst>
-          </p:cNvPr>
-          <p:cNvPicPr>
-            <a:picLocks/>
-          </p:cNvPicPr>
-          <p:nvPr/>
-        </p:nvPicPr>
-        <p:blipFill>
-          <a:blip r:embed="rId2">
-            <a:extLst>
-              <a:ext uri="{28A0092B-C50C-407E-A947-70E740481C1C}">
-                <a14:useLocalDpi xmlns:a14="http://schemas.microsoft.com/office/drawing/2010/main" val="0"/>
-              </a:ext>
-            </a:extLst>
-          </a:blip>
-          <a:srcRect t="29985" b="27316"/>
-          <a:stretch>
-            <a:fillRect/>
-          </a:stretch>
-        </p:blipFill>
-        <p:spPr>
-          <a:xfrm>
-            <a:off x="184195" y="166221"/>
-            <a:ext cx="1741461" cy="688543"/>
-          </a:xfrm>
-          <a:prstGeom prst="rect">
-            <a:avLst/>
-          </a:prstGeom>
-        </p:spPr>
-      </p:pic>
-    </p:spTree>
-    <p:extLst>
-      <p:ext uri="{BB962C8B-B14F-4D97-AF65-F5344CB8AC3E}">
-        <p14:creationId xmlns:p14="http://schemas.microsoft.com/office/powerpoint/2010/main" val="1211966660"/>
-      </p:ext>
-    </p:extLst>
-  </p:cSld>
-  <p:clrMapOvr>
-    <a:masterClrMapping/>
-  </p:clrMapOvr>
-  <mc:AlternateContent xmlns:mc="http://schemas.openxmlformats.org/markup-compatibility/2006" xmlns:p159="http://schemas.microsoft.com/office/powerpoint/2015/09/main">
-    <mc:Choice Requires="p159">
-      <p:transition xmlns:p14="http://schemas.microsoft.com/office/powerpoint/2010/main" spd="slow" p14:dur="2000">
-        <p159:morph option="byObject"/>
-      </p:transition>
-    </mc:Choice>
-    <mc:Fallback xmlns="">
-      <p:transition spd="slow">
-        <p:fade/>
-      </p:transition>
-    </mc:Fallback>
-  </mc:AlternateContent>
-</p:sld>
-</file>
-
-<file path=ppt/slides/slide22.xml><?xml version="1.0" encoding="utf-8"?>
-<p:sld xmlns:a="http://schemas.openxmlformats.org/drawingml/2006/main" xmlns:r="http://schemas.openxmlformats.org/officeDocument/2006/relationships" xmlns:p="http://schemas.openxmlformats.org/presentationml/2006/main">
-  <p:cSld>
-    <p:bg>
-      <p:bgPr>
-        <a:solidFill>
-          <a:srgbClr val="FFFCF7"/>
-        </a:solidFill>
-        <a:effectLst/>
-      </p:bgPr>
-    </p:bg>
-    <p:spTree>
-      <p:nvGrpSpPr>
-        <p:cNvPr id="1" name="">
-          <a:extLst>
-            <a:ext uri="{FF2B5EF4-FFF2-40B4-BE49-F238E27FC236}">
-              <a16:creationId xmlns:a16="http://schemas.microsoft.com/office/drawing/2014/main" id="{223B01EE-E148-643D-97C7-397A549AD695}"/>
-            </a:ext>
-          </a:extLst>
-        </p:cNvPr>
-        <p:cNvGrpSpPr/>
-        <p:nvPr/>
-      </p:nvGrpSpPr>
-      <p:grpSpPr>
-        <a:xfrm>
-          <a:off x="0" y="0"/>
-          <a:ext cx="0" cy="0"/>
-          <a:chOff x="0" y="0"/>
-          <a:chExt cx="0" cy="0"/>
-        </a:xfrm>
-      </p:grpSpPr>
-      <p:sp>
-        <p:nvSpPr>
-          <p:cNvPr id="4" name="矩形 3">
-            <a:extLst>
-              <a:ext uri="{FF2B5EF4-FFF2-40B4-BE49-F238E27FC236}">
-                <a16:creationId xmlns:a16="http://schemas.microsoft.com/office/drawing/2014/main" id="{DA2B449D-C3F2-3DAF-525A-14F8CBC5027A}"/>
-              </a:ext>
-            </a:extLst>
-          </p:cNvPr>
-          <p:cNvSpPr/>
-          <p:nvPr/>
-        </p:nvSpPr>
-        <p:spPr>
-          <a:xfrm>
-            <a:off x="0" y="944628"/>
-            <a:ext cx="2025283" cy="5913372"/>
-          </a:xfrm>
-          <a:prstGeom prst="rect">
-            <a:avLst/>
-          </a:prstGeom>
-          <a:solidFill>
-            <a:srgbClr val="177BF5"/>
-          </a:solidFill>
-          <a:ln>
-            <a:noFill/>
-          </a:ln>
-        </p:spPr>
-        <p:style>
-          <a:lnRef idx="2">
-            <a:schemeClr val="accent1">
-              <a:shade val="15000"/>
-            </a:schemeClr>
-          </a:lnRef>
-          <a:fillRef idx="1">
-            <a:schemeClr val="accent1"/>
-          </a:fillRef>
-          <a:effectRef idx="0">
-            <a:schemeClr val="accent1"/>
-          </a:effectRef>
-          <a:fontRef idx="minor">
-            <a:schemeClr val="lt1"/>
-          </a:fontRef>
-        </p:style>
-        <p:txBody>
-          <a:bodyPr rtlCol="0" anchor="ctr"/>
-          <a:lstStyle/>
-          <a:p>
-            <a:pPr algn="ctr"/>
-            <a:endParaRPr lang="zh-CN" altLang="en-US"/>
-          </a:p>
-        </p:txBody>
-      </p:sp>
-      <p:sp>
-        <p:nvSpPr>
-          <p:cNvPr id="6" name="矩形 5">
-            <a:extLst>
-              <a:ext uri="{FF2B5EF4-FFF2-40B4-BE49-F238E27FC236}">
-                <a16:creationId xmlns:a16="http://schemas.microsoft.com/office/drawing/2014/main" id="{0C72CE05-CF5B-D4CB-4665-EB78128FABBF}"/>
-              </a:ext>
-            </a:extLst>
-          </p:cNvPr>
-          <p:cNvSpPr/>
-          <p:nvPr/>
-        </p:nvSpPr>
-        <p:spPr>
-          <a:xfrm>
-            <a:off x="-1" y="1080655"/>
-            <a:ext cx="2025283" cy="5777345"/>
-          </a:xfrm>
-          <a:prstGeom prst="rect">
-            <a:avLst/>
-          </a:prstGeom>
-          <a:solidFill>
-            <a:srgbClr val="0048CE"/>
-          </a:solidFill>
-          <a:ln>
-            <a:noFill/>
-          </a:ln>
-        </p:spPr>
-        <p:style>
-          <a:lnRef idx="2">
-            <a:schemeClr val="accent1">
-              <a:shade val="15000"/>
-            </a:schemeClr>
-          </a:lnRef>
-          <a:fillRef idx="1">
-            <a:schemeClr val="accent1"/>
-          </a:fillRef>
-          <a:effectRef idx="0">
-            <a:schemeClr val="accent1"/>
-          </a:effectRef>
-          <a:fontRef idx="minor">
-            <a:schemeClr val="lt1"/>
-          </a:fontRef>
-        </p:style>
-        <p:txBody>
-          <a:bodyPr rtlCol="0" anchor="ctr"/>
-          <a:lstStyle/>
-          <a:p>
-            <a:pPr algn="ctr"/>
-            <a:endParaRPr lang="zh-CN" altLang="en-US"/>
-          </a:p>
-        </p:txBody>
-      </p:sp>
-      <p:sp>
-        <p:nvSpPr>
-          <p:cNvPr id="7" name="标题 1">
-            <a:extLst>
-              <a:ext uri="{FF2B5EF4-FFF2-40B4-BE49-F238E27FC236}">
-                <a16:creationId xmlns:a16="http://schemas.microsoft.com/office/drawing/2014/main" id="{329C5D16-56F4-F83B-85B4-C6596A765F2C}"/>
-              </a:ext>
-            </a:extLst>
-          </p:cNvPr>
-          <p:cNvSpPr txBox="1">
-            <a:spLocks/>
-          </p:cNvSpPr>
-          <p:nvPr/>
-        </p:nvSpPr>
-        <p:spPr>
-          <a:xfrm>
-            <a:off x="2231406" y="197312"/>
-            <a:ext cx="4412506" cy="647777"/>
-          </a:xfrm>
-          <a:prstGeom prst="rect">
-            <a:avLst/>
-          </a:prstGeom>
-        </p:spPr>
-        <p:txBody>
-          <a:bodyPr vert="horz" lIns="91440" tIns="45720" rIns="91440" bIns="45720" rtlCol="0" anchor="ctr">
-            <a:normAutofit/>
-          </a:bodyPr>
-          <a:lstStyle>
-            <a:lvl1pPr algn="l" defTabSz="914400" rtl="0" eaLnBrk="1" latinLnBrk="0" hangingPunct="1">
-              <a:lnSpc>
-                <a:spcPct val="90000"/>
-              </a:lnSpc>
-              <a:spcBef>
-                <a:spcPct val="0"/>
-              </a:spcBef>
-              <a:buNone/>
-              <a:defRPr sz="4400" kern="1200">
-                <a:solidFill>
-                  <a:schemeClr val="tx1"/>
-                </a:solidFill>
-                <a:latin typeface="+mj-lt"/>
-                <a:ea typeface="+mj-ea"/>
-                <a:cs typeface="+mj-cs"/>
-              </a:defRPr>
-            </a:lvl1pPr>
-          </a:lstStyle>
-          <a:p>
-            <a:r>
-              <a:rPr lang="zh-CN" altLang="en-US" sz="4000" b="1" dirty="0">
-                <a:latin typeface="+mn-ea"/>
-                <a:ea typeface="+mn-ea"/>
-              </a:rPr>
-              <a:t>接下来的规划</a:t>
-            </a:r>
-          </a:p>
-        </p:txBody>
-      </p:sp>
-      <p:pic>
-        <p:nvPicPr>
-          <p:cNvPr id="2" name="图片 1" descr="徽标&#10;&#10;AI 生成的内容可能不正确。">
-            <a:extLst>
-              <a:ext uri="{FF2B5EF4-FFF2-40B4-BE49-F238E27FC236}">
-                <a16:creationId xmlns:a16="http://schemas.microsoft.com/office/drawing/2014/main" id="{EC19D602-CD34-259A-F331-2BF243A9F7FD}"/>
-              </a:ext>
-            </a:extLst>
-          </p:cNvPr>
-          <p:cNvPicPr>
-            <a:picLocks/>
-          </p:cNvPicPr>
-          <p:nvPr/>
-        </p:nvPicPr>
-        <p:blipFill>
-          <a:blip r:embed="rId2">
-            <a:extLst>
-              <a:ext uri="{28A0092B-C50C-407E-A947-70E740481C1C}">
-                <a14:useLocalDpi xmlns:a14="http://schemas.microsoft.com/office/drawing/2010/main" val="0"/>
-              </a:ext>
-            </a:extLst>
-          </a:blip>
-          <a:srcRect t="29985" b="27316"/>
-          <a:stretch>
-            <a:fillRect/>
-          </a:stretch>
-        </p:blipFill>
-        <p:spPr>
-          <a:xfrm>
-            <a:off x="184195" y="166221"/>
-            <a:ext cx="1741461" cy="688543"/>
-          </a:xfrm>
-          <a:prstGeom prst="rect">
-            <a:avLst/>
-          </a:prstGeom>
-        </p:spPr>
-      </p:pic>
-    </p:spTree>
-    <p:extLst>
-      <p:ext uri="{BB962C8B-B14F-4D97-AF65-F5344CB8AC3E}">
-        <p14:creationId xmlns:p14="http://schemas.microsoft.com/office/powerpoint/2010/main" val="2176991520"/>
-      </p:ext>
-    </p:extLst>
-  </p:cSld>
-  <p:clrMapOvr>
-    <a:masterClrMapping/>
-  </p:clrMapOvr>
-  <mc:AlternateContent xmlns:mc="http://schemas.openxmlformats.org/markup-compatibility/2006" xmlns:p159="http://schemas.microsoft.com/office/powerpoint/2015/09/main">
-    <mc:Choice Requires="p159">
-      <p:transition xmlns:p14="http://schemas.microsoft.com/office/powerpoint/2010/main" spd="slow" p14:dur="2000">
-        <p159:morph option="byObject"/>
-      </p:transition>
-    </mc:Choice>
-    <mc:Fallback xmlns="">
-      <p:transition spd="slow">
-        <p:fade/>
-      </p:transition>
-    </mc:Fallback>
-  </mc:AlternateContent>
-</p:sld>
-</file>
-
-<file path=ppt/slides/slide23.xml><?xml version="1.0" encoding="utf-8"?>
-<p:sld xmlns:a="http://schemas.openxmlformats.org/drawingml/2006/main" xmlns:r="http://schemas.openxmlformats.org/officeDocument/2006/relationships" xmlns:p="http://schemas.openxmlformats.org/presentationml/2006/main">
-  <p:cSld>
-    <p:bg>
-      <p:bgPr>
-        <a:solidFill>
-          <a:srgbClr val="FFFCF7"/>
-        </a:solidFill>
-        <a:effectLst/>
-      </p:bgPr>
-    </p:bg>
-    <p:spTree>
-      <p:nvGrpSpPr>
-        <p:cNvPr id="1" name="">
-          <a:extLst>
-            <a:ext uri="{FF2B5EF4-FFF2-40B4-BE49-F238E27FC236}">
-              <a16:creationId xmlns:a16="http://schemas.microsoft.com/office/drawing/2014/main" id="{CDEFE05B-7645-F94F-C588-20C92F4E643A}"/>
-            </a:ext>
-          </a:extLst>
-        </p:cNvPr>
-        <p:cNvGrpSpPr/>
-        <p:nvPr/>
-      </p:nvGrpSpPr>
-      <p:grpSpPr>
-        <a:xfrm>
-          <a:off x="0" y="0"/>
-          <a:ext cx="0" cy="0"/>
-          <a:chOff x="0" y="0"/>
-          <a:chExt cx="0" cy="0"/>
-        </a:xfrm>
-      </p:grpSpPr>
-      <p:sp>
-        <p:nvSpPr>
-          <p:cNvPr id="9" name="矩形 8">
-            <a:extLst>
-              <a:ext uri="{FF2B5EF4-FFF2-40B4-BE49-F238E27FC236}">
-                <a16:creationId xmlns:a16="http://schemas.microsoft.com/office/drawing/2014/main" id="{BF484ED5-7D05-E6FB-7077-019C0E601A5D}"/>
-              </a:ext>
-            </a:extLst>
-          </p:cNvPr>
-          <p:cNvSpPr/>
-          <p:nvPr/>
-        </p:nvSpPr>
-        <p:spPr>
-          <a:xfrm>
-            <a:off x="0" y="4053249"/>
-            <a:ext cx="12192000" cy="2709193"/>
-          </a:xfrm>
-          <a:prstGeom prst="rect">
-            <a:avLst/>
-          </a:prstGeom>
-          <a:solidFill>
-            <a:srgbClr val="177BF5"/>
-          </a:solidFill>
-          <a:ln>
-            <a:noFill/>
-          </a:ln>
-        </p:spPr>
-        <p:style>
-          <a:lnRef idx="2">
-            <a:schemeClr val="accent1">
-              <a:shade val="15000"/>
-            </a:schemeClr>
-          </a:lnRef>
-          <a:fillRef idx="1">
-            <a:schemeClr val="accent1"/>
-          </a:fillRef>
-          <a:effectRef idx="0">
-            <a:schemeClr val="accent1"/>
-          </a:effectRef>
-          <a:fontRef idx="minor">
-            <a:schemeClr val="lt1"/>
-          </a:fontRef>
-        </p:style>
-        <p:txBody>
-          <a:bodyPr rtlCol="0" anchor="ctr"/>
-          <a:lstStyle/>
-          <a:p>
-            <a:pPr algn="ctr"/>
-            <a:r>
-              <a:rPr lang="en-US" altLang="zh-CN" dirty="0"/>
-              <a:t>·</a:t>
-            </a:r>
-            <a:endParaRPr lang="zh-CN" altLang="en-US" dirty="0"/>
-          </a:p>
-        </p:txBody>
-      </p:sp>
-      <p:sp>
-        <p:nvSpPr>
-          <p:cNvPr id="12" name="矩形 11">
-            <a:extLst>
-              <a:ext uri="{FF2B5EF4-FFF2-40B4-BE49-F238E27FC236}">
-                <a16:creationId xmlns:a16="http://schemas.microsoft.com/office/drawing/2014/main" id="{91729F9D-AE1B-2A1B-F0C9-5D7752704456}"/>
-              </a:ext>
-            </a:extLst>
-          </p:cNvPr>
-          <p:cNvSpPr/>
-          <p:nvPr/>
-        </p:nvSpPr>
-        <p:spPr>
-          <a:xfrm>
-            <a:off x="0" y="4148805"/>
-            <a:ext cx="12192000" cy="2709193"/>
-          </a:xfrm>
-          <a:prstGeom prst="rect">
-            <a:avLst/>
-          </a:prstGeom>
-          <a:solidFill>
-            <a:srgbClr val="0048CE"/>
-          </a:solidFill>
-          <a:ln>
-            <a:noFill/>
-          </a:ln>
-        </p:spPr>
-        <p:style>
-          <a:lnRef idx="2">
-            <a:schemeClr val="accent1">
-              <a:shade val="15000"/>
-            </a:schemeClr>
-          </a:lnRef>
-          <a:fillRef idx="1">
-            <a:schemeClr val="accent1"/>
-          </a:fillRef>
-          <a:effectRef idx="0">
-            <a:schemeClr val="accent1"/>
-          </a:effectRef>
-          <a:fontRef idx="minor">
-            <a:schemeClr val="lt1"/>
-          </a:fontRef>
-        </p:style>
-        <p:txBody>
-          <a:bodyPr rtlCol="0" anchor="ctr"/>
-          <a:lstStyle/>
-          <a:p>
-            <a:pPr algn="ctr"/>
-            <a:endParaRPr lang="zh-CN" altLang="en-US"/>
-          </a:p>
-        </p:txBody>
-      </p:sp>
-      <p:sp>
-        <p:nvSpPr>
-          <p:cNvPr id="14" name="Text Placeholder 1">
-            <a:extLst>
-              <a:ext uri="{FF2B5EF4-FFF2-40B4-BE49-F238E27FC236}">
-                <a16:creationId xmlns:a16="http://schemas.microsoft.com/office/drawing/2014/main" id="{41521101-0052-C9AE-2B42-EE4744E6012B}"/>
-              </a:ext>
-            </a:extLst>
-          </p:cNvPr>
-          <p:cNvSpPr>
-            <a:spLocks noChangeArrowheads="1"/>
-          </p:cNvSpPr>
-          <p:nvPr/>
-        </p:nvSpPr>
-        <p:spPr bwMode="auto">
-          <a:xfrm>
-            <a:off x="184195" y="6106149"/>
-            <a:ext cx="5721796" cy="440494"/>
-          </a:xfrm>
-          <a:prstGeom prst="rect">
-            <a:avLst/>
-          </a:prstGeom>
-          <a:noFill/>
-          <a:ln w="9525">
-            <a:noFill/>
-            <a:bevel/>
-          </a:ln>
-        </p:spPr>
-        <p:txBody>
-          <a:bodyPr anchor="ctr"/>
-          <a:lstStyle/>
-          <a:p>
-            <a:pPr eaLnBrk="1" hangingPunct="1">
-              <a:defRPr/>
-            </a:pPr>
-            <a:r>
-              <a:rPr lang="en-US" altLang="zh-CN" sz="1400" b="1" dirty="0">
-                <a:solidFill>
-                  <a:srgbClr val="0096B4"/>
-                </a:solidFill>
-                <a:latin typeface="Arial" panose="020B0604020202020204" pitchFamily="34" charset="0"/>
-                <a:cs typeface="Arial" panose="020B0604020202020204" pitchFamily="34" charset="0"/>
-              </a:rPr>
-              <a:t>Prepared by AIR-Tech@ </a:t>
-            </a:r>
-            <a:fld id="{5853BA87-C0A4-4D40-A7D0-264FBDFF6174}" type="datetime9">
-              <a:rPr lang="en-US" altLang="zh-CN" sz="1400" b="1" dirty="0" smtClean="0">
-                <a:solidFill>
-                  <a:srgbClr val="0096B4"/>
-                </a:solidFill>
-                <a:latin typeface="Arial" panose="020B0604020202020204" pitchFamily="34" charset="0"/>
-                <a:cs typeface="Arial" panose="020B0604020202020204" pitchFamily="34" charset="0"/>
-              </a:rPr>
-              <a:t>11/14/2025 11:00:18 AM</a:t>
-            </a:fld>
-            <a:endParaRPr lang="zh-CN" altLang="en-US" sz="1400" b="1" dirty="0">
-              <a:solidFill>
-                <a:srgbClr val="0096B4"/>
-              </a:solidFill>
-              <a:latin typeface="Arial" panose="020B0604020202020204" pitchFamily="34" charset="0"/>
-              <a:cs typeface="Arial" panose="020B0604020202020204" pitchFamily="34" charset="0"/>
-            </a:endParaRPr>
-          </a:p>
-        </p:txBody>
-      </p:sp>
-      <p:sp>
-        <p:nvSpPr>
-          <p:cNvPr id="4" name="文本框 3">
-            <a:extLst>
-              <a:ext uri="{FF2B5EF4-FFF2-40B4-BE49-F238E27FC236}">
-                <a16:creationId xmlns:a16="http://schemas.microsoft.com/office/drawing/2014/main" id="{78611506-9CF2-CED6-0673-98E0CC70569D}"/>
-              </a:ext>
-            </a:extLst>
-          </p:cNvPr>
-          <p:cNvSpPr txBox="1"/>
-          <p:nvPr/>
-        </p:nvSpPr>
-        <p:spPr>
-          <a:xfrm>
-            <a:off x="3045093" y="2249386"/>
-            <a:ext cx="6094902" cy="1015663"/>
-          </a:xfrm>
-          <a:prstGeom prst="rect">
-            <a:avLst/>
-          </a:prstGeom>
-          <a:noFill/>
-        </p:spPr>
-        <p:txBody>
-          <a:bodyPr wrap="square">
-            <a:spAutoFit/>
-          </a:bodyPr>
-          <a:lstStyle/>
-          <a:p>
-            <a:pPr algn="ctr"/>
-            <a:r>
-              <a:rPr lang="zh-CN" altLang="en-US" sz="6000" b="1" dirty="0"/>
-              <a:t>总结与展望</a:t>
-            </a:r>
-          </a:p>
-        </p:txBody>
-      </p:sp>
-      <p:pic>
-        <p:nvPicPr>
-          <p:cNvPr id="2" name="图片 1" descr="徽标&#10;&#10;AI 生成的内容可能不正确。">
-            <a:extLst>
-              <a:ext uri="{FF2B5EF4-FFF2-40B4-BE49-F238E27FC236}">
-                <a16:creationId xmlns:a16="http://schemas.microsoft.com/office/drawing/2014/main" id="{19297531-6A0F-36BF-9120-D184A0E0E289}"/>
-              </a:ext>
-            </a:extLst>
-          </p:cNvPr>
-          <p:cNvPicPr>
-            <a:picLocks/>
-          </p:cNvPicPr>
-          <p:nvPr/>
-        </p:nvPicPr>
-        <p:blipFill>
-          <a:blip r:embed="rId2">
-            <a:extLst>
-              <a:ext uri="{28A0092B-C50C-407E-A947-70E740481C1C}">
-                <a14:useLocalDpi xmlns:a14="http://schemas.microsoft.com/office/drawing/2010/main" val="0"/>
-              </a:ext>
-            </a:extLst>
-          </a:blip>
-          <a:srcRect t="29985" b="27316"/>
-          <a:stretch>
-            <a:fillRect/>
-          </a:stretch>
-        </p:blipFill>
-        <p:spPr>
-          <a:xfrm>
-            <a:off x="184195" y="166221"/>
-            <a:ext cx="1741461" cy="688543"/>
-          </a:xfrm>
-          <a:prstGeom prst="rect">
-            <a:avLst/>
-          </a:prstGeom>
-        </p:spPr>
-      </p:pic>
-    </p:spTree>
-    <p:extLst>
-      <p:ext uri="{BB962C8B-B14F-4D97-AF65-F5344CB8AC3E}">
-        <p14:creationId xmlns:p14="http://schemas.microsoft.com/office/powerpoint/2010/main" val="1155721585"/>
-      </p:ext>
-    </p:extLst>
-  </p:cSld>
-  <p:clrMapOvr>
-    <a:masterClrMapping/>
-  </p:clrMapOvr>
-  <mc:AlternateContent xmlns:mc="http://schemas.openxmlformats.org/markup-compatibility/2006" xmlns:p159="http://schemas.microsoft.com/office/powerpoint/2015/09/main">
-    <mc:Choice Requires="p159">
-      <p:transition xmlns:p14="http://schemas.microsoft.com/office/powerpoint/2010/main" spd="slow" p14:dur="2000">
-        <p159:morph option="byObject"/>
-      </p:transition>
-    </mc:Choice>
-    <mc:Fallback xmlns="">
-      <p:transition spd="slow">
-        <p:fade/>
-      </p:transition>
-    </mc:Fallback>
-  </mc:AlternateContent>
-</p:sld>
-</file>
-
-<file path=ppt/slides/slide24.xml><?xml version="1.0" encoding="utf-8"?>
+<file path=ppt/slides/slide20.xml><?xml version="1.0" encoding="utf-8"?>
 <p:sld xmlns:a="http://schemas.openxmlformats.org/drawingml/2006/main" xmlns:r="http://schemas.openxmlformats.org/officeDocument/2006/relationships" xmlns:p="http://schemas.openxmlformats.org/presentationml/2006/main">
   <p:cSld>
     <p:bg>
@@ -8229,7 +9058,7 @@
             <a:avLst/>
           </a:prstGeom>
           <a:solidFill>
-            <a:srgbClr val="177BF5"/>
+            <a:srgbClr val="197DF7"/>
           </a:solidFill>
           <a:ln>
             <a:noFill/>
@@ -8260,6 +9089,36 @@
           </a:p>
         </p:txBody>
       </p:sp>
+      <p:pic>
+        <p:nvPicPr>
+          <p:cNvPr id="5" name="图片 4">
+            <a:extLst>
+              <a:ext uri="{FF2B5EF4-FFF2-40B4-BE49-F238E27FC236}">
+                <a16:creationId xmlns:a16="http://schemas.microsoft.com/office/drawing/2014/main" id="{AFA0F46C-3724-3D13-B529-BF623E714D86}"/>
+              </a:ext>
+            </a:extLst>
+          </p:cNvPr>
+          <p:cNvPicPr>
+            <a:picLocks noChangeAspect="1"/>
+          </p:cNvPicPr>
+          <p:nvPr/>
+        </p:nvPicPr>
+        <p:blipFill>
+          <a:blip r:embed="rId2"/>
+          <a:stretch>
+            <a:fillRect/>
+          </a:stretch>
+        </p:blipFill>
+        <p:spPr>
+          <a:xfrm>
+            <a:off x="184195" y="197312"/>
+            <a:ext cx="1741460" cy="586009"/>
+          </a:xfrm>
+          <a:prstGeom prst="rect">
+            <a:avLst/>
+          </a:prstGeom>
+        </p:spPr>
+      </p:pic>
       <p:sp>
         <p:nvSpPr>
           <p:cNvPr id="6" name="矩形 5">
@@ -8371,41 +9230,102 @@
       </p:sp>
       <p:pic>
         <p:nvPicPr>
-          <p:cNvPr id="2" name="图片 1" descr="徽标&#10;&#10;AI 生成的内容可能不正确。">
-            <a:extLst>
-              <a:ext uri="{FF2B5EF4-FFF2-40B4-BE49-F238E27FC236}">
-                <a16:creationId xmlns:a16="http://schemas.microsoft.com/office/drawing/2014/main" id="{FFB78861-4A09-C437-C68A-84D150DD9691}"/>
+          <p:cNvPr id="3" name="图片 2" descr="图片包含 游戏机, 桌子, 雪, 男人&#10;&#10;AI 生成的内容可能不正确。">
+            <a:extLst>
+              <a:ext uri="{FF2B5EF4-FFF2-40B4-BE49-F238E27FC236}">
+                <a16:creationId xmlns:a16="http://schemas.microsoft.com/office/drawing/2014/main" id="{CCEAF2CD-7E7E-749B-42B1-68B7E410907A}"/>
               </a:ext>
             </a:extLst>
           </p:cNvPr>
           <p:cNvPicPr>
-            <a:picLocks/>
+            <a:picLocks noChangeAspect="1"/>
           </p:cNvPicPr>
           <p:nvPr/>
         </p:nvPicPr>
         <p:blipFill>
-          <a:blip r:embed="rId2">
+          <a:blip r:embed="rId3">
             <a:extLst>
               <a:ext uri="{28A0092B-C50C-407E-A947-70E740481C1C}">
                 <a14:useLocalDpi xmlns:a14="http://schemas.microsoft.com/office/drawing/2010/main" val="0"/>
               </a:ext>
             </a:extLst>
           </a:blip>
-          <a:srcRect t="29985" b="27316"/>
           <a:stretch>
             <a:fillRect/>
           </a:stretch>
         </p:blipFill>
         <p:spPr>
           <a:xfrm>
-            <a:off x="184195" y="166221"/>
-            <a:ext cx="1741461" cy="688543"/>
+            <a:off x="7445459" y="1902171"/>
+            <a:ext cx="4150795" cy="3283715"/>
           </a:xfrm>
           <a:prstGeom prst="rect">
             <a:avLst/>
           </a:prstGeom>
         </p:spPr>
       </p:pic>
+      <p:sp>
+        <p:nvSpPr>
+          <p:cNvPr id="8" name="文本框 7">
+            <a:extLst>
+              <a:ext uri="{FF2B5EF4-FFF2-40B4-BE49-F238E27FC236}">
+                <a16:creationId xmlns:a16="http://schemas.microsoft.com/office/drawing/2014/main" id="{BAE3558D-D35A-C60C-11A6-B38B328580EF}"/>
+              </a:ext>
+            </a:extLst>
+          </p:cNvPr>
+          <p:cNvSpPr txBox="1"/>
+          <p:nvPr/>
+        </p:nvSpPr>
+        <p:spPr>
+          <a:xfrm>
+            <a:off x="2466276" y="1693718"/>
+            <a:ext cx="4318988" cy="3754874"/>
+          </a:xfrm>
+          <a:prstGeom prst="rect">
+            <a:avLst/>
+          </a:prstGeom>
+          <a:noFill/>
+        </p:spPr>
+        <p:txBody>
+          <a:bodyPr wrap="square" rtlCol="0">
+            <a:spAutoFit/>
+          </a:bodyPr>
+          <a:lstStyle/>
+          <a:p>
+            <a:r>
+              <a:rPr lang="zh-CN" altLang="en-US" sz="2000" b="1" dirty="0"/>
+              <a:t>       本轻型</a:t>
+            </a:r>
+            <a:r>
+              <a:rPr lang="en-US" altLang="zh-CN" sz="2000" b="1" dirty="0"/>
+              <a:t>AGV</a:t>
+            </a:r>
+            <a:r>
+              <a:rPr lang="zh-CN" altLang="en-US" sz="2000" b="1" dirty="0"/>
+              <a:t>小车设计项目旨在为迎宾机器人设计一个移动底盘。本轻型</a:t>
+            </a:r>
+            <a:r>
+              <a:rPr lang="en-US" altLang="zh-CN" sz="2000" b="1" dirty="0"/>
+              <a:t>AGV</a:t>
+            </a:r>
+            <a:r>
+              <a:rPr lang="zh-CN" altLang="en-US" sz="2000" b="1" dirty="0"/>
+              <a:t>小车设计项目已顺利完成阶段性目标，核心技术指标达到预期，为后续产业化发展奠定了坚实基础。项目实施过程中积累的技术经验与问题反思，将为后续优化提供重要支撑。未来，团队将以技术创新为核心，以市场需求为导向，持续提升产品性能与应用价值，推动轻型</a:t>
+            </a:r>
+            <a:r>
+              <a:rPr lang="en-US" altLang="zh-CN" sz="2000" b="1" dirty="0"/>
+              <a:t>AGV</a:t>
+            </a:r>
+            <a:r>
+              <a:rPr lang="zh-CN" altLang="en-US" sz="2000" b="1" dirty="0"/>
+              <a:t>小车在更多领域的普及应用</a:t>
+            </a:r>
+          </a:p>
+          <a:p>
+            <a:endParaRPr lang="zh-CN" altLang="en-US" dirty="0"/>
+          </a:p>
+        </p:txBody>
+      </p:sp>
     </p:spTree>
     <p:extLst>
       <p:ext uri="{BB962C8B-B14F-4D97-AF65-F5344CB8AC3E}">
@@ -8483,7 +9403,7 @@
             <a:avLst/>
           </a:prstGeom>
           <a:solidFill>
-            <a:srgbClr val="177BF5"/>
+            <a:srgbClr val="177DF8"/>
           </a:solidFill>
           <a:ln>
             <a:noFill/>
@@ -8518,6 +9438,36 @@
           </a:p>
         </p:txBody>
       </p:sp>
+      <p:pic>
+        <p:nvPicPr>
+          <p:cNvPr id="11" name="图片 10">
+            <a:extLst>
+              <a:ext uri="{FF2B5EF4-FFF2-40B4-BE49-F238E27FC236}">
+                <a16:creationId xmlns:a16="http://schemas.microsoft.com/office/drawing/2014/main" id="{8222DAA1-1BAE-0CE8-9C77-2C3E82A80B4A}"/>
+              </a:ext>
+            </a:extLst>
+          </p:cNvPr>
+          <p:cNvPicPr>
+            <a:picLocks noChangeAspect="1"/>
+          </p:cNvPicPr>
+          <p:nvPr/>
+        </p:nvPicPr>
+        <p:blipFill>
+          <a:blip r:embed="rId2"/>
+          <a:stretch>
+            <a:fillRect/>
+          </a:stretch>
+        </p:blipFill>
+        <p:spPr>
+          <a:xfrm>
+            <a:off x="184195" y="197312"/>
+            <a:ext cx="1741460" cy="586009"/>
+          </a:xfrm>
+          <a:prstGeom prst="rect">
+            <a:avLst/>
+          </a:prstGeom>
+        </p:spPr>
+      </p:pic>
       <p:sp>
         <p:nvSpPr>
           <p:cNvPr id="12" name="矩形 11">
@@ -8665,7 +9615,10 @@
             <a:r>
               <a:rPr lang="en-US" altLang="zh-CN" sz="1400" b="1" dirty="0">
                 <a:solidFill>
-                  <a:srgbClr val="0096B4"/>
+                  <a:schemeClr val="accent4">
+                    <a:lumMod val="95000"/>
+                    <a:lumOff val="5000"/>
+                  </a:schemeClr>
                 </a:solidFill>
                 <a:latin typeface="Arial" panose="020B0604020202020204" pitchFamily="34" charset="0"/>
                 <a:cs typeface="Arial" panose="020B0604020202020204" pitchFamily="34" charset="0"/>
@@ -8675,16 +9628,22 @@
             <a:fld id="{5853BA87-C0A4-4D40-A7D0-264FBDFF6174}" type="datetime9">
               <a:rPr lang="en-US" altLang="zh-CN" sz="1400" b="1" dirty="0" smtClean="0">
                 <a:solidFill>
-                  <a:srgbClr val="0096B4"/>
+                  <a:schemeClr val="accent4">
+                    <a:lumMod val="95000"/>
+                    <a:lumOff val="5000"/>
+                  </a:schemeClr>
                 </a:solidFill>
                 <a:latin typeface="Arial" panose="020B0604020202020204" pitchFamily="34" charset="0"/>
                 <a:cs typeface="Arial" panose="020B0604020202020204" pitchFamily="34" charset="0"/>
               </a:rPr>
-              <a:t>11/14/2025 10:56:04 AM</a:t>
+              <a:t>11/24/2025 5:24:34 PM</a:t>
             </a:fld>
             <a:endParaRPr lang="zh-CN" altLang="en-US" sz="1400" b="1" dirty="0">
               <a:solidFill>
-                <a:srgbClr val="0096B4"/>
+                <a:schemeClr val="accent4">
+                  <a:lumMod val="95000"/>
+                  <a:lumOff val="5000"/>
+                </a:schemeClr>
               </a:solidFill>
               <a:latin typeface="Arial" panose="020B0604020202020204" pitchFamily="34" charset="0"/>
               <a:cs typeface="Arial" panose="020B0604020202020204" pitchFamily="34" charset="0"/>
@@ -8728,43 +9687,6 @@
           </a:p>
         </p:txBody>
       </p:sp>
-      <p:pic>
-        <p:nvPicPr>
-          <p:cNvPr id="2" name="图片 1" descr="徽标&#10;&#10;AI 生成的内容可能不正确。">
-            <a:extLst>
-              <a:ext uri="{FF2B5EF4-FFF2-40B4-BE49-F238E27FC236}">
-                <a16:creationId xmlns:a16="http://schemas.microsoft.com/office/drawing/2014/main" id="{900EBE30-110E-570C-A17B-1357D01287EF}"/>
-              </a:ext>
-            </a:extLst>
-          </p:cNvPr>
-          <p:cNvPicPr>
-            <a:picLocks/>
-          </p:cNvPicPr>
-          <p:nvPr/>
-        </p:nvPicPr>
-        <p:blipFill>
-          <a:blip r:embed="rId2">
-            <a:extLst>
-              <a:ext uri="{28A0092B-C50C-407E-A947-70E740481C1C}">
-                <a14:useLocalDpi xmlns:a14="http://schemas.microsoft.com/office/drawing/2010/main" val="0"/>
-              </a:ext>
-            </a:extLst>
-          </a:blip>
-          <a:srcRect t="29985" b="27316"/>
-          <a:stretch>
-            <a:fillRect/>
-          </a:stretch>
-        </p:blipFill>
-        <p:spPr>
-          <a:xfrm>
-            <a:off x="184195" y="166221"/>
-            <a:ext cx="1741461" cy="688543"/>
-          </a:xfrm>
-          <a:prstGeom prst="rect">
-            <a:avLst/>
-          </a:prstGeom>
-        </p:spPr>
-      </p:pic>
     </p:spTree>
     <p:extLst>
       <p:ext uri="{BB962C8B-B14F-4D97-AF65-F5344CB8AC3E}">
@@ -8842,7 +9764,7 @@
             <a:avLst/>
           </a:prstGeom>
           <a:solidFill>
-            <a:srgbClr val="177BF5"/>
+            <a:srgbClr val="197DF7"/>
           </a:solidFill>
           <a:ln>
             <a:noFill/>
@@ -8873,6 +9795,36 @@
           </a:p>
         </p:txBody>
       </p:sp>
+      <p:pic>
+        <p:nvPicPr>
+          <p:cNvPr id="5" name="图片 4">
+            <a:extLst>
+              <a:ext uri="{FF2B5EF4-FFF2-40B4-BE49-F238E27FC236}">
+                <a16:creationId xmlns:a16="http://schemas.microsoft.com/office/drawing/2014/main" id="{7F5C1BFD-5B9B-CC07-B205-F26AF16842FD}"/>
+              </a:ext>
+            </a:extLst>
+          </p:cNvPr>
+          <p:cNvPicPr>
+            <a:picLocks noChangeAspect="1"/>
+          </p:cNvPicPr>
+          <p:nvPr/>
+        </p:nvPicPr>
+        <p:blipFill>
+          <a:blip r:embed="rId2"/>
+          <a:stretch>
+            <a:fillRect/>
+          </a:stretch>
+        </p:blipFill>
+        <p:spPr>
+          <a:xfrm>
+            <a:off x="184195" y="197312"/>
+            <a:ext cx="1741460" cy="586009"/>
+          </a:xfrm>
+          <a:prstGeom prst="rect">
+            <a:avLst/>
+          </a:prstGeom>
+        </p:spPr>
+      </p:pic>
       <p:sp>
         <p:nvSpPr>
           <p:cNvPr id="6" name="矩形 5">
@@ -8982,43 +9934,179 @@
           </a:p>
         </p:txBody>
       </p:sp>
-      <p:pic>
-        <p:nvPicPr>
-          <p:cNvPr id="2" name="图片 1" descr="徽标&#10;&#10;AI 生成的内容可能不正确。">
-            <a:extLst>
-              <a:ext uri="{FF2B5EF4-FFF2-40B4-BE49-F238E27FC236}">
-                <a16:creationId xmlns:a16="http://schemas.microsoft.com/office/drawing/2014/main" id="{CC053D65-26B9-B441-0558-973847037A37}"/>
-              </a:ext>
-            </a:extLst>
-          </p:cNvPr>
-          <p:cNvPicPr>
-            <a:picLocks/>
-          </p:cNvPicPr>
-          <p:nvPr/>
-        </p:nvPicPr>
-        <p:blipFill>
-          <a:blip r:embed="rId2">
-            <a:extLst>
-              <a:ext uri="{28A0092B-C50C-407E-A947-70E740481C1C}">
-                <a14:useLocalDpi xmlns:a14="http://schemas.microsoft.com/office/drawing/2010/main" val="0"/>
-              </a:ext>
-            </a:extLst>
-          </a:blip>
-          <a:srcRect t="29985" b="27316"/>
-          <a:stretch>
-            <a:fillRect/>
-          </a:stretch>
-        </p:blipFill>
-        <p:spPr>
-          <a:xfrm>
-            <a:off x="184195" y="166221"/>
-            <a:ext cx="1741461" cy="688543"/>
-          </a:xfrm>
-          <a:prstGeom prst="rect">
-            <a:avLst/>
-          </a:prstGeom>
-        </p:spPr>
-      </p:pic>
+      <p:sp>
+        <p:nvSpPr>
+          <p:cNvPr id="2" name="文本框 1">
+            <a:extLst>
+              <a:ext uri="{FF2B5EF4-FFF2-40B4-BE49-F238E27FC236}">
+                <a16:creationId xmlns:a16="http://schemas.microsoft.com/office/drawing/2014/main" id="{63167D66-DB01-A6BA-FE43-8E527789EB18}"/>
+              </a:ext>
+            </a:extLst>
+          </p:cNvPr>
+          <p:cNvSpPr txBox="1"/>
+          <p:nvPr/>
+        </p:nvSpPr>
+        <p:spPr>
+          <a:xfrm>
+            <a:off x="2361964" y="1406012"/>
+            <a:ext cx="8563896" cy="1292662"/>
+          </a:xfrm>
+          <a:prstGeom prst="rect">
+            <a:avLst/>
+          </a:prstGeom>
+          <a:noFill/>
+        </p:spPr>
+        <p:txBody>
+          <a:bodyPr wrap="square" rtlCol="0">
+            <a:spAutoFit/>
+          </a:bodyPr>
+          <a:lstStyle/>
+          <a:p>
+            <a:r>
+              <a:rPr lang="zh-CN" altLang="en-US" sz="2400" b="1" dirty="0"/>
+              <a:t>主负责人：陈煜暄</a:t>
+            </a:r>
+            <a:endParaRPr lang="en-US" altLang="zh-CN" sz="2400" b="1" dirty="0"/>
+          </a:p>
+          <a:p>
+            <a:endParaRPr lang="en-US" altLang="zh-CN" dirty="0"/>
+          </a:p>
+          <a:p>
+            <a:endParaRPr lang="en-US" altLang="zh-CN" dirty="0"/>
+          </a:p>
+          <a:p>
+            <a:endParaRPr lang="en-US" altLang="zh-CN" dirty="0"/>
+          </a:p>
+        </p:txBody>
+      </p:sp>
+      <p:sp>
+        <p:nvSpPr>
+          <p:cNvPr id="8" name="文本框 7">
+            <a:extLst>
+              <a:ext uri="{FF2B5EF4-FFF2-40B4-BE49-F238E27FC236}">
+                <a16:creationId xmlns:a16="http://schemas.microsoft.com/office/drawing/2014/main" id="{7B02F0E9-BB44-8019-6564-D312E4B75DEC}"/>
+              </a:ext>
+            </a:extLst>
+          </p:cNvPr>
+          <p:cNvSpPr txBox="1"/>
+          <p:nvPr/>
+        </p:nvSpPr>
+        <p:spPr>
+          <a:xfrm>
+            <a:off x="244446" y="3378094"/>
+            <a:ext cx="1620957" cy="523220"/>
+          </a:xfrm>
+          <a:prstGeom prst="rect">
+            <a:avLst/>
+          </a:prstGeom>
+          <a:noFill/>
+        </p:spPr>
+        <p:txBody>
+          <a:bodyPr wrap="none" rtlCol="0">
+            <a:spAutoFit/>
+          </a:bodyPr>
+          <a:lstStyle/>
+          <a:p>
+            <a:r>
+              <a:rPr lang="zh-CN" altLang="en-US" sz="2800" b="1" dirty="0">
+                <a:solidFill>
+                  <a:schemeClr val="bg2"/>
+                </a:solidFill>
+              </a:rPr>
+              <a:t>项目分工</a:t>
+            </a:r>
+          </a:p>
+        </p:txBody>
+      </p:sp>
+      <p:sp>
+        <p:nvSpPr>
+          <p:cNvPr id="9" name="文本框 8">
+            <a:extLst>
+              <a:ext uri="{FF2B5EF4-FFF2-40B4-BE49-F238E27FC236}">
+                <a16:creationId xmlns:a16="http://schemas.microsoft.com/office/drawing/2014/main" id="{9F8E8086-45BE-9E66-203F-9786F76E0868}"/>
+              </a:ext>
+            </a:extLst>
+          </p:cNvPr>
+          <p:cNvSpPr txBox="1"/>
+          <p:nvPr/>
+        </p:nvSpPr>
+        <p:spPr>
+          <a:xfrm>
+            <a:off x="2361964" y="2845942"/>
+            <a:ext cx="8849827" cy="2246769"/>
+          </a:xfrm>
+          <a:prstGeom prst="rect">
+            <a:avLst/>
+          </a:prstGeom>
+          <a:noFill/>
+        </p:spPr>
+        <p:txBody>
+          <a:bodyPr wrap="square" rtlCol="0">
+            <a:spAutoFit/>
+          </a:bodyPr>
+          <a:lstStyle/>
+          <a:p>
+            <a:r>
+              <a:rPr lang="zh-CN" altLang="en-US" sz="2000" b="1" dirty="0"/>
+              <a:t>陈煜暄：立项报告 </a:t>
+            </a:r>
+            <a:r>
+              <a:rPr lang="en-US" altLang="zh-CN" sz="2000" b="1" dirty="0"/>
+              <a:t>	</a:t>
+            </a:r>
+            <a:r>
+              <a:rPr lang="zh-CN" altLang="en-US" sz="2000" b="1" dirty="0"/>
+              <a:t>电器架及电器，底盘的建模出图        对比分析报告</a:t>
+            </a:r>
+            <a:endParaRPr lang="en-US" altLang="zh-CN" sz="2000" b="1" dirty="0"/>
+          </a:p>
+          <a:p>
+            <a:endParaRPr lang="en-US" altLang="zh-CN" sz="2000" b="1" dirty="0"/>
+          </a:p>
+          <a:p>
+            <a:r>
+              <a:rPr lang="zh-CN" altLang="en-US" sz="2000" b="1" dirty="0"/>
+              <a:t>张航诚：外壳绘制             外壳工程图及结构螺丝安装绘制</a:t>
+            </a:r>
+            <a:endParaRPr lang="en-US" altLang="zh-CN" sz="2000" b="1" dirty="0"/>
+          </a:p>
+          <a:p>
+            <a:endParaRPr lang="en-US" altLang="zh-CN" sz="2000" b="1" dirty="0"/>
+          </a:p>
+          <a:p>
+            <a:r>
+              <a:rPr lang="zh-CN" altLang="en-US" sz="2000" b="1" dirty="0"/>
+              <a:t>王齐权：悬挂建模以及出图            </a:t>
+            </a:r>
+            <a:r>
+              <a:rPr lang="en-US" altLang="zh-CN" sz="2000" b="1" dirty="0"/>
+              <a:t>BOM</a:t>
+            </a:r>
+            <a:r>
+              <a:rPr lang="zh-CN" altLang="en-US" sz="2000" b="1" dirty="0"/>
+              <a:t>表            项目报告</a:t>
+            </a:r>
+            <a:endParaRPr lang="en-US" altLang="zh-CN" sz="2000" b="1" dirty="0"/>
+          </a:p>
+          <a:p>
+            <a:endParaRPr lang="en-US" altLang="zh-CN" sz="2000" b="1" dirty="0"/>
+          </a:p>
+          <a:p>
+            <a:r>
+              <a:rPr lang="zh-CN" altLang="en-US" sz="2000" b="1" dirty="0"/>
+              <a:t>夏姜楠：</a:t>
+            </a:r>
+            <a:r>
+              <a:rPr lang="en-US" altLang="zh-CN" sz="2000" b="1" dirty="0" err="1"/>
+              <a:t>eplan</a:t>
+            </a:r>
+            <a:r>
+              <a:rPr lang="zh-CN" altLang="en-US" sz="2000" b="1" dirty="0"/>
+              <a:t>电气原理图绘制         </a:t>
+            </a:r>
+          </a:p>
+        </p:txBody>
+      </p:sp>
     </p:spTree>
     <p:extLst>
       <p:ext uri="{BB962C8B-B14F-4D97-AF65-F5344CB8AC3E}">
@@ -9047,20 +10135,12 @@
 <file path=ppt/slides/slide5.xml><?xml version="1.0" encoding="utf-8"?>
 <p:sld xmlns:a="http://schemas.openxmlformats.org/drawingml/2006/main" xmlns:r="http://schemas.openxmlformats.org/officeDocument/2006/relationships" xmlns:p="http://schemas.openxmlformats.org/presentationml/2006/main">
   <p:cSld>
-    <p:bg>
-      <p:bgPr>
-        <a:solidFill>
-          <a:srgbClr val="FFFCF7"/>
-        </a:solidFill>
-        <a:effectLst/>
-      </p:bgPr>
-    </p:bg>
     <p:spTree>
       <p:nvGrpSpPr>
         <p:cNvPr id="1" name="">
           <a:extLst>
             <a:ext uri="{FF2B5EF4-FFF2-40B4-BE49-F238E27FC236}">
-              <a16:creationId xmlns:a16="http://schemas.microsoft.com/office/drawing/2014/main" id="{9D684B31-ED15-B55C-7160-E7212092E9ED}"/>
+              <a16:creationId xmlns:a16="http://schemas.microsoft.com/office/drawing/2014/main" id="{951BD646-838B-2071-AE7E-E2EAD94A621C}"/>
             </a:ext>
           </a:extLst>
         </p:cNvPr>
@@ -9077,10 +10157,10 @@
       </p:grpSpPr>
       <p:sp>
         <p:nvSpPr>
-          <p:cNvPr id="4" name="矩形 3">
-            <a:extLst>
-              <a:ext uri="{FF2B5EF4-FFF2-40B4-BE49-F238E27FC236}">
-                <a16:creationId xmlns:a16="http://schemas.microsoft.com/office/drawing/2014/main" id="{4B1A5990-195A-A2F7-78A6-55E997C6D1A7}"/>
+          <p:cNvPr id="9" name="矩形 8">
+            <a:extLst>
+              <a:ext uri="{FF2B5EF4-FFF2-40B4-BE49-F238E27FC236}">
+                <a16:creationId xmlns:a16="http://schemas.microsoft.com/office/drawing/2014/main" id="{2BB2B750-3E03-C0C8-67B9-192E4B9BCEAA}"/>
               </a:ext>
             </a:extLst>
           </p:cNvPr>
@@ -9089,14 +10169,14 @@
         </p:nvSpPr>
         <p:spPr>
           <a:xfrm>
-            <a:off x="0" y="944628"/>
-            <a:ext cx="2025283" cy="5913372"/>
+            <a:off x="0" y="4053249"/>
+            <a:ext cx="12192000" cy="2709193"/>
           </a:xfrm>
           <a:prstGeom prst="rect">
             <a:avLst/>
           </a:prstGeom>
           <a:solidFill>
-            <a:srgbClr val="177BF5"/>
+            <a:srgbClr val="177DF8"/>
           </a:solidFill>
           <a:ln>
             <a:noFill/>
@@ -9123,16 +10203,50 @@
           <a:lstStyle/>
           <a:p>
             <a:pPr algn="ctr"/>
-            <a:endParaRPr lang="zh-CN" altLang="en-US"/>
-          </a:p>
-        </p:txBody>
-      </p:sp>
-      <p:sp>
-        <p:nvSpPr>
-          <p:cNvPr id="6" name="矩形 5">
-            <a:extLst>
-              <a:ext uri="{FF2B5EF4-FFF2-40B4-BE49-F238E27FC236}">
-                <a16:creationId xmlns:a16="http://schemas.microsoft.com/office/drawing/2014/main" id="{D1F80DD2-07CE-CDFF-53A2-5540DC0A964F}"/>
+            <a:r>
+              <a:rPr lang="en-US" altLang="zh-CN" dirty="0"/>
+              <a:t>·</a:t>
+            </a:r>
+            <a:endParaRPr lang="zh-CN" altLang="en-US" dirty="0"/>
+          </a:p>
+        </p:txBody>
+      </p:sp>
+      <p:pic>
+        <p:nvPicPr>
+          <p:cNvPr id="11" name="图片 10">
+            <a:extLst>
+              <a:ext uri="{FF2B5EF4-FFF2-40B4-BE49-F238E27FC236}">
+                <a16:creationId xmlns:a16="http://schemas.microsoft.com/office/drawing/2014/main" id="{8222DAA1-1BAE-0CE8-9C77-2C3E82A80B4A}"/>
+              </a:ext>
+            </a:extLst>
+          </p:cNvPr>
+          <p:cNvPicPr>
+            <a:picLocks noChangeAspect="1"/>
+          </p:cNvPicPr>
+          <p:nvPr/>
+        </p:nvPicPr>
+        <p:blipFill>
+          <a:blip r:embed="rId2"/>
+          <a:stretch>
+            <a:fillRect/>
+          </a:stretch>
+        </p:blipFill>
+        <p:spPr>
+          <a:xfrm>
+            <a:off x="184195" y="197312"/>
+            <a:ext cx="1741460" cy="586009"/>
+          </a:xfrm>
+          <a:prstGeom prst="rect">
+            <a:avLst/>
+          </a:prstGeom>
+        </p:spPr>
+      </p:pic>
+      <p:sp>
+        <p:nvSpPr>
+          <p:cNvPr id="12" name="矩形 11">
+            <a:extLst>
+              <a:ext uri="{FF2B5EF4-FFF2-40B4-BE49-F238E27FC236}">
+                <a16:creationId xmlns:a16="http://schemas.microsoft.com/office/drawing/2014/main" id="{CE414B79-C6DC-2DFE-D9CD-5C62B5D5D4B1}"/>
               </a:ext>
             </a:extLst>
           </p:cNvPr>
@@ -9141,8 +10255,8 @@
         </p:nvSpPr>
         <p:spPr>
           <a:xfrm>
-            <a:off x="-1" y="1080655"/>
-            <a:ext cx="2025283" cy="5777345"/>
+            <a:off x="0" y="4148805"/>
+            <a:ext cx="12192000" cy="2709193"/>
           </a:xfrm>
           <a:prstGeom prst="rect">
             <a:avLst/>
@@ -9181,102 +10295,175 @@
       </p:sp>
       <p:sp>
         <p:nvSpPr>
-          <p:cNvPr id="7" name="标题 1">
-            <a:extLst>
-              <a:ext uri="{FF2B5EF4-FFF2-40B4-BE49-F238E27FC236}">
-                <a16:creationId xmlns:a16="http://schemas.microsoft.com/office/drawing/2014/main" id="{C3712CC9-C771-4BB3-4D74-C13AF679A243}"/>
-              </a:ext>
-            </a:extLst>
-          </p:cNvPr>
-          <p:cNvSpPr txBox="1">
-            <a:spLocks/>
+          <p:cNvPr id="13" name="副标题 2">
+            <a:extLst>
+              <a:ext uri="{FF2B5EF4-FFF2-40B4-BE49-F238E27FC236}">
+                <a16:creationId xmlns:a16="http://schemas.microsoft.com/office/drawing/2014/main" id="{D1E3830A-65AA-9A7B-02C0-342521E19E51}"/>
+              </a:ext>
+            </a:extLst>
+          </p:cNvPr>
+          <p:cNvSpPr>
+            <a:spLocks noGrp="1"/>
           </p:cNvSpPr>
-          <p:nvPr/>
-        </p:nvSpPr>
-        <p:spPr>
-          <a:xfrm>
-            <a:off x="2231406" y="197312"/>
-            <a:ext cx="4412506" cy="647777"/>
-          </a:xfrm>
-          <a:prstGeom prst="rect">
-            <a:avLst/>
-          </a:prstGeom>
-        </p:spPr>
-        <p:txBody>
-          <a:bodyPr vert="horz" lIns="91440" tIns="45720" rIns="91440" bIns="45720" rtlCol="0" anchor="ctr">
+          <p:nvPr>
+            <p:ph type="subTitle" idx="1"/>
+          </p:nvPr>
+        </p:nvSpPr>
+        <p:spPr>
+          <a:xfrm>
+            <a:off x="8227751" y="4900655"/>
+            <a:ext cx="3517260" cy="1205494"/>
+          </a:xfrm>
+        </p:spPr>
+        <p:txBody>
+          <a:bodyPr>
             <a:normAutofit/>
           </a:bodyPr>
-          <a:lstStyle>
-            <a:lvl1pPr algn="l" defTabSz="914400" rtl="0" eaLnBrk="1" latinLnBrk="0" hangingPunct="1">
-              <a:lnSpc>
-                <a:spcPct val="90000"/>
-              </a:lnSpc>
-              <a:spcBef>
-                <a:spcPct val="0"/>
-              </a:spcBef>
-              <a:buNone/>
-              <a:defRPr sz="4400" kern="1200">
+          <a:lstStyle/>
+          <a:p>
+            <a:r>
+              <a:rPr lang="zh-CN" altLang="en-US" sz="3200" b="1" dirty="0">
                 <a:solidFill>
-                  <a:schemeClr val="tx1"/>
+                  <a:schemeClr val="bg1"/>
                 </a:solidFill>
-                <a:latin typeface="+mj-lt"/>
-                <a:ea typeface="+mj-ea"/>
-                <a:cs typeface="+mj-cs"/>
-              </a:defRPr>
-            </a:lvl1pPr>
-          </a:lstStyle>
-          <a:p>
-            <a:r>
-              <a:rPr lang="zh-CN" altLang="en-US" sz="4000" b="1" dirty="0">
                 <a:latin typeface="+mn-ea"/>
-                <a:ea typeface="+mn-ea"/>
               </a:rPr>
-              <a:t>主要设计安排</a:t>
-            </a:r>
-          </a:p>
-        </p:txBody>
-      </p:sp>
-      <p:pic>
-        <p:nvPicPr>
-          <p:cNvPr id="2" name="图片 1" descr="徽标&#10;&#10;AI 生成的内容可能不正确。">
-            <a:extLst>
-              <a:ext uri="{FF2B5EF4-FFF2-40B4-BE49-F238E27FC236}">
-                <a16:creationId xmlns:a16="http://schemas.microsoft.com/office/drawing/2014/main" id="{DCC1C085-F0FF-C0AC-0678-89EEF1FE91B9}"/>
-              </a:ext>
-            </a:extLst>
-          </p:cNvPr>
-          <p:cNvPicPr>
-            <a:picLocks/>
-          </p:cNvPicPr>
-          <p:nvPr/>
-        </p:nvPicPr>
-        <p:blipFill>
-          <a:blip r:embed="rId2">
-            <a:extLst>
-              <a:ext uri="{28A0092B-C50C-407E-A947-70E740481C1C}">
-                <a14:useLocalDpi xmlns:a14="http://schemas.microsoft.com/office/drawing/2010/main" val="0"/>
-              </a:ext>
-            </a:extLst>
-          </a:blip>
-          <a:srcRect t="29985" b="27316"/>
-          <a:stretch>
-            <a:fillRect/>
-          </a:stretch>
-        </p:blipFill>
-        <p:spPr>
-          <a:xfrm>
-            <a:off x="184195" y="166221"/>
-            <a:ext cx="1741461" cy="688543"/>
-          </a:xfrm>
-          <a:prstGeom prst="rect">
-            <a:avLst/>
-          </a:prstGeom>
-        </p:spPr>
-      </p:pic>
+              <a:t>介绍整体</a:t>
+            </a:r>
+            <a:endParaRPr lang="en-US" altLang="zh-CN" sz="3200" b="1" dirty="0">
+              <a:solidFill>
+                <a:schemeClr val="bg1"/>
+              </a:solidFill>
+              <a:latin typeface="+mn-ea"/>
+            </a:endParaRPr>
+          </a:p>
+          <a:p>
+            <a:r>
+              <a:rPr lang="zh-CN" altLang="en-US" sz="3200" b="1" dirty="0">
+                <a:solidFill>
+                  <a:schemeClr val="bg1"/>
+                </a:solidFill>
+                <a:latin typeface="+mn-ea"/>
+              </a:rPr>
+              <a:t>的设计样貌</a:t>
+            </a:r>
+          </a:p>
+        </p:txBody>
+      </p:sp>
+      <p:sp>
+        <p:nvSpPr>
+          <p:cNvPr id="14" name="Text Placeholder 1">
+            <a:extLst>
+              <a:ext uri="{FF2B5EF4-FFF2-40B4-BE49-F238E27FC236}">
+                <a16:creationId xmlns:a16="http://schemas.microsoft.com/office/drawing/2014/main" id="{23D3ADBF-4AFC-CCC2-9583-4CB1F2DB95B9}"/>
+              </a:ext>
+            </a:extLst>
+          </p:cNvPr>
+          <p:cNvSpPr>
+            <a:spLocks noChangeArrowheads="1"/>
+          </p:cNvSpPr>
+          <p:nvPr/>
+        </p:nvSpPr>
+        <p:spPr bwMode="auto">
+          <a:xfrm>
+            <a:off x="184195" y="6106149"/>
+            <a:ext cx="5721796" cy="440494"/>
+          </a:xfrm>
+          <a:prstGeom prst="rect">
+            <a:avLst/>
+          </a:prstGeom>
+          <a:noFill/>
+          <a:ln w="9525">
+            <a:noFill/>
+            <a:bevel/>
+          </a:ln>
+        </p:spPr>
+        <p:txBody>
+          <a:bodyPr anchor="ctr"/>
+          <a:lstStyle/>
+          <a:p>
+            <a:pPr eaLnBrk="1" hangingPunct="1">
+              <a:defRPr/>
+            </a:pPr>
+            <a:r>
+              <a:rPr lang="en-US" altLang="zh-CN" sz="1400" b="1" dirty="0">
+                <a:solidFill>
+                  <a:schemeClr val="accent4">
+                    <a:lumMod val="95000"/>
+                    <a:lumOff val="5000"/>
+                  </a:schemeClr>
+                </a:solidFill>
+                <a:latin typeface="Arial" panose="020B0604020202020204" pitchFamily="34" charset="0"/>
+                <a:cs typeface="Arial" panose="020B0604020202020204" pitchFamily="34" charset="0"/>
+              </a:rPr>
+              <a:t>Prepared by AIR-Tech@ </a:t>
+            </a:r>
+            <a:fld id="{5853BA87-C0A4-4D40-A7D0-264FBDFF6174}" type="datetime9">
+              <a:rPr lang="en-US" altLang="zh-CN" sz="1400" b="1" dirty="0" smtClean="0">
+                <a:solidFill>
+                  <a:schemeClr val="accent4">
+                    <a:lumMod val="95000"/>
+                    <a:lumOff val="5000"/>
+                  </a:schemeClr>
+                </a:solidFill>
+                <a:latin typeface="Arial" panose="020B0604020202020204" pitchFamily="34" charset="0"/>
+                <a:cs typeface="Arial" panose="020B0604020202020204" pitchFamily="34" charset="0"/>
+              </a:rPr>
+              <a:t>11/24/2025 5:24:34 PM</a:t>
+            </a:fld>
+            <a:endParaRPr lang="zh-CN" altLang="en-US" sz="1400" b="1" dirty="0">
+              <a:solidFill>
+                <a:schemeClr val="accent4">
+                  <a:lumMod val="95000"/>
+                  <a:lumOff val="5000"/>
+                </a:schemeClr>
+              </a:solidFill>
+              <a:latin typeface="Arial" panose="020B0604020202020204" pitchFamily="34" charset="0"/>
+              <a:cs typeface="Arial" panose="020B0604020202020204" pitchFamily="34" charset="0"/>
+            </a:endParaRPr>
+          </a:p>
+        </p:txBody>
+      </p:sp>
+      <p:sp>
+        <p:nvSpPr>
+          <p:cNvPr id="4" name="文本框 3">
+            <a:extLst>
+              <a:ext uri="{FF2B5EF4-FFF2-40B4-BE49-F238E27FC236}">
+                <a16:creationId xmlns:a16="http://schemas.microsoft.com/office/drawing/2014/main" id="{989D0C88-12C8-B08E-1A88-2C340F798154}"/>
+              </a:ext>
+            </a:extLst>
+          </p:cNvPr>
+          <p:cNvSpPr txBox="1"/>
+          <p:nvPr/>
+        </p:nvSpPr>
+        <p:spPr>
+          <a:xfrm>
+            <a:off x="3045093" y="2058914"/>
+            <a:ext cx="6094902" cy="1015663"/>
+          </a:xfrm>
+          <a:prstGeom prst="rect">
+            <a:avLst/>
+          </a:prstGeom>
+          <a:noFill/>
+        </p:spPr>
+        <p:txBody>
+          <a:bodyPr wrap="square">
+            <a:spAutoFit/>
+          </a:bodyPr>
+          <a:lstStyle/>
+          <a:p>
+            <a:pPr algn="ctr"/>
+            <a:r>
+              <a:rPr lang="zh-CN" altLang="en-US" sz="6000" b="1" dirty="0"/>
+              <a:t>整体概览</a:t>
+            </a:r>
+          </a:p>
+        </p:txBody>
+      </p:sp>
     </p:spTree>
     <p:extLst>
       <p:ext uri="{BB962C8B-B14F-4D97-AF65-F5344CB8AC3E}">
-        <p14:creationId xmlns:p14="http://schemas.microsoft.com/office/powerpoint/2010/main" val="2415024750"/>
+        <p14:creationId xmlns:p14="http://schemas.microsoft.com/office/powerpoint/2010/main" val="3803949131"/>
       </p:ext>
     </p:extLst>
   </p:cSld>
@@ -9350,7 +10537,7 @@
             <a:avLst/>
           </a:prstGeom>
           <a:solidFill>
-            <a:srgbClr val="177BF5"/>
+            <a:srgbClr val="197DF7"/>
           </a:solidFill>
           <a:ln>
             <a:noFill/>
@@ -9381,6 +10568,36 @@
           </a:p>
         </p:txBody>
       </p:sp>
+      <p:pic>
+        <p:nvPicPr>
+          <p:cNvPr id="5" name="图片 4">
+            <a:extLst>
+              <a:ext uri="{FF2B5EF4-FFF2-40B4-BE49-F238E27FC236}">
+                <a16:creationId xmlns:a16="http://schemas.microsoft.com/office/drawing/2014/main" id="{636A7CEB-76CB-A09B-5198-C3A9A8653469}"/>
+              </a:ext>
+            </a:extLst>
+          </p:cNvPr>
+          <p:cNvPicPr>
+            <a:picLocks noChangeAspect="1"/>
+          </p:cNvPicPr>
+          <p:nvPr/>
+        </p:nvPicPr>
+        <p:blipFill>
+          <a:blip r:embed="rId2"/>
+          <a:stretch>
+            <a:fillRect/>
+          </a:stretch>
+        </p:blipFill>
+        <p:spPr>
+          <a:xfrm>
+            <a:off x="184195" y="197312"/>
+            <a:ext cx="1741460" cy="586009"/>
+          </a:xfrm>
+          <a:prstGeom prst="rect">
+            <a:avLst/>
+          </a:prstGeom>
+        </p:spPr>
+      </p:pic>
       <p:sp>
         <p:nvSpPr>
           <p:cNvPr id="6" name="矩形 5">
@@ -9485,42 +10702,104 @@
                 <a:latin typeface="+mn-ea"/>
                 <a:ea typeface="+mn-ea"/>
               </a:rPr>
-              <a:t>主要设计安排</a:t>
+              <a:t>整体概览</a:t>
+            </a:r>
+          </a:p>
+        </p:txBody>
+      </p:sp>
+      <p:sp>
+        <p:nvSpPr>
+          <p:cNvPr id="2" name="文本框 1">
+            <a:extLst>
+              <a:ext uri="{FF2B5EF4-FFF2-40B4-BE49-F238E27FC236}">
+                <a16:creationId xmlns:a16="http://schemas.microsoft.com/office/drawing/2014/main" id="{0130B522-85DC-66FB-1B27-2B2BEA700B4D}"/>
+              </a:ext>
+            </a:extLst>
+          </p:cNvPr>
+          <p:cNvSpPr txBox="1"/>
+          <p:nvPr/>
+        </p:nvSpPr>
+        <p:spPr>
+          <a:xfrm>
+            <a:off x="2613775" y="1681232"/>
+            <a:ext cx="3647768" cy="3416320"/>
+          </a:xfrm>
+          <a:prstGeom prst="rect">
+            <a:avLst/>
+          </a:prstGeom>
+          <a:noFill/>
+        </p:spPr>
+        <p:txBody>
+          <a:bodyPr wrap="square" rtlCol="0">
+            <a:spAutoFit/>
+          </a:bodyPr>
+          <a:lstStyle/>
+          <a:p>
+            <a:r>
+              <a:rPr lang="zh-CN" altLang="en-US" sz="2400" dirty="0"/>
+              <a:t>我们所设计的这款轻型</a:t>
+            </a:r>
+            <a:r>
+              <a:rPr lang="en-US" altLang="zh-CN" sz="2400" dirty="0"/>
+              <a:t>AGV</a:t>
+            </a:r>
+            <a:r>
+              <a:rPr lang="zh-CN" altLang="en-US" sz="2400" dirty="0"/>
+              <a:t>小车主要是用来作为迎宾机器人的移动底盘。</a:t>
+            </a:r>
+            <a:endParaRPr lang="en-US" altLang="zh-CN" sz="2400" dirty="0"/>
+          </a:p>
+          <a:p>
+            <a:r>
+              <a:rPr lang="zh-CN" altLang="en-US" sz="2400" dirty="0"/>
+              <a:t>其长宽高为</a:t>
+            </a:r>
+            <a:r>
+              <a:rPr lang="en-US" altLang="zh-CN" sz="2400" dirty="0"/>
+              <a:t>517*468.5*242mm</a:t>
+            </a:r>
+          </a:p>
+          <a:p>
+            <a:endParaRPr lang="en-US" altLang="zh-CN" sz="2400" dirty="0"/>
+          </a:p>
+          <a:p>
+            <a:r>
+              <a:rPr lang="zh-CN" altLang="en-US" sz="2400" dirty="0"/>
+              <a:t>右图为其三维模型（为方便展示将其铝合金板设置成透明状）</a:t>
             </a:r>
           </a:p>
         </p:txBody>
       </p:sp>
       <p:pic>
         <p:nvPicPr>
-          <p:cNvPr id="2" name="图片 1" descr="徽标&#10;&#10;AI 生成的内容可能不正确。">
-            <a:extLst>
-              <a:ext uri="{FF2B5EF4-FFF2-40B4-BE49-F238E27FC236}">
-                <a16:creationId xmlns:a16="http://schemas.microsoft.com/office/drawing/2014/main" id="{0220A979-C458-F381-70DD-7545ABF92D50}"/>
+          <p:cNvPr id="10" name="图片 9" descr="图片包含 游戏机, 桌子, 雪, 男人&#10;&#10;AI 生成的内容可能不正确。">
+            <a:extLst>
+              <a:ext uri="{FF2B5EF4-FFF2-40B4-BE49-F238E27FC236}">
+                <a16:creationId xmlns:a16="http://schemas.microsoft.com/office/drawing/2014/main" id="{DB67A0A0-F585-8E28-236C-B774EC131693}"/>
               </a:ext>
             </a:extLst>
           </p:cNvPr>
           <p:cNvPicPr>
-            <a:picLocks/>
+            <a:picLocks noChangeAspect="1"/>
           </p:cNvPicPr>
           <p:nvPr/>
         </p:nvPicPr>
         <p:blipFill>
-          <a:blip r:embed="rId2">
+          <a:blip r:embed="rId3">
             <a:extLst>
               <a:ext uri="{28A0092B-C50C-407E-A947-70E740481C1C}">
                 <a14:useLocalDpi xmlns:a14="http://schemas.microsoft.com/office/drawing/2010/main" val="0"/>
               </a:ext>
             </a:extLst>
           </a:blip>
-          <a:srcRect t="29985" b="27316"/>
           <a:stretch>
             <a:fillRect/>
           </a:stretch>
         </p:blipFill>
         <p:spPr>
           <a:xfrm>
-            <a:off x="184195" y="166221"/>
-            <a:ext cx="1741461" cy="688543"/>
+            <a:off x="7123268" y="1817336"/>
+            <a:ext cx="4557897" cy="3605776"/>
           </a:xfrm>
           <a:prstGeom prst="rect">
             <a:avLst/>
@@ -9604,7 +10883,7 @@
             <a:avLst/>
           </a:prstGeom>
           <a:solidFill>
-            <a:srgbClr val="177BF5"/>
+            <a:srgbClr val="197DF7"/>
           </a:solidFill>
           <a:ln>
             <a:noFill/>
@@ -9635,6 +10914,36 @@
           </a:p>
         </p:txBody>
       </p:sp>
+      <p:pic>
+        <p:nvPicPr>
+          <p:cNvPr id="5" name="图片 4">
+            <a:extLst>
+              <a:ext uri="{FF2B5EF4-FFF2-40B4-BE49-F238E27FC236}">
+                <a16:creationId xmlns:a16="http://schemas.microsoft.com/office/drawing/2014/main" id="{8C9E4CEE-D54D-1BF6-DB43-D66C59E586BC}"/>
+              </a:ext>
+            </a:extLst>
+          </p:cNvPr>
+          <p:cNvPicPr>
+            <a:picLocks noChangeAspect="1"/>
+          </p:cNvPicPr>
+          <p:nvPr/>
+        </p:nvPicPr>
+        <p:blipFill>
+          <a:blip r:embed="rId2"/>
+          <a:stretch>
+            <a:fillRect/>
+          </a:stretch>
+        </p:blipFill>
+        <p:spPr>
+          <a:xfrm>
+            <a:off x="184195" y="197312"/>
+            <a:ext cx="1741460" cy="586009"/>
+          </a:xfrm>
+          <a:prstGeom prst="rect">
+            <a:avLst/>
+          </a:prstGeom>
+        </p:spPr>
+      </p:pic>
       <p:sp>
         <p:nvSpPr>
           <p:cNvPr id="6" name="矩形 5">
@@ -9739,48 +11048,199 @@
                 <a:latin typeface="+mn-ea"/>
                 <a:ea typeface="+mn-ea"/>
               </a:rPr>
-              <a:t>主要设计安排</a:t>
+              <a:t>整体概览</a:t>
             </a:r>
           </a:p>
         </p:txBody>
       </p:sp>
       <p:pic>
         <p:nvPicPr>
-          <p:cNvPr id="5" name="图片 4" descr="徽标&#10;&#10;AI 生成的内容可能不正确。">
-            <a:extLst>
-              <a:ext uri="{FF2B5EF4-FFF2-40B4-BE49-F238E27FC236}">
-                <a16:creationId xmlns:a16="http://schemas.microsoft.com/office/drawing/2014/main" id="{0CACB1C6-241D-0451-D06E-FF9F4A4E09EE}"/>
+          <p:cNvPr id="15" name="图片 14" descr="图片包含 器具, 游戏机&#10;&#10;AI 生成的内容可能不正确。">
+            <a:extLst>
+              <a:ext uri="{FF2B5EF4-FFF2-40B4-BE49-F238E27FC236}">
+                <a16:creationId xmlns:a16="http://schemas.microsoft.com/office/drawing/2014/main" id="{3FDFA73C-3C45-3D4C-9D99-93226476F3C6}"/>
               </a:ext>
             </a:extLst>
           </p:cNvPr>
           <p:cNvPicPr>
-            <a:picLocks/>
+            <a:picLocks noChangeAspect="1"/>
           </p:cNvPicPr>
           <p:nvPr/>
         </p:nvPicPr>
         <p:blipFill>
-          <a:blip r:embed="rId2">
+          <a:blip r:embed="rId3">
             <a:extLst>
               <a:ext uri="{28A0092B-C50C-407E-A947-70E740481C1C}">
                 <a14:useLocalDpi xmlns:a14="http://schemas.microsoft.com/office/drawing/2010/main" val="0"/>
               </a:ext>
             </a:extLst>
           </a:blip>
-          <a:srcRect t="29985" b="27316"/>
           <a:stretch>
             <a:fillRect/>
           </a:stretch>
         </p:blipFill>
         <p:spPr>
           <a:xfrm>
-            <a:off x="184195" y="166221"/>
-            <a:ext cx="1741461" cy="688543"/>
+            <a:off x="5479459" y="1153358"/>
+            <a:ext cx="3335206" cy="2014332"/>
           </a:xfrm>
           <a:prstGeom prst="rect">
             <a:avLst/>
           </a:prstGeom>
         </p:spPr>
       </p:pic>
+      <p:pic>
+        <p:nvPicPr>
+          <p:cNvPr id="17" name="图片 16" descr="电子仪器&#10;&#10;AI 生成的内容可能不正确。">
+            <a:extLst>
+              <a:ext uri="{FF2B5EF4-FFF2-40B4-BE49-F238E27FC236}">
+                <a16:creationId xmlns:a16="http://schemas.microsoft.com/office/drawing/2014/main" id="{01EFFDD0-FB91-3D42-92F4-CC63B0A8A431}"/>
+              </a:ext>
+            </a:extLst>
+          </p:cNvPr>
+          <p:cNvPicPr>
+            <a:picLocks noChangeAspect="1"/>
+          </p:cNvPicPr>
+          <p:nvPr/>
+        </p:nvPicPr>
+        <p:blipFill>
+          <a:blip r:embed="rId4">
+            <a:extLst>
+              <a:ext uri="{28A0092B-C50C-407E-A947-70E740481C1C}">
+                <a14:useLocalDpi xmlns:a14="http://schemas.microsoft.com/office/drawing/2010/main" val="0"/>
+              </a:ext>
+            </a:extLst>
+          </a:blip>
+          <a:stretch>
+            <a:fillRect/>
+          </a:stretch>
+        </p:blipFill>
+        <p:spPr>
+          <a:xfrm>
+            <a:off x="8723870" y="1153358"/>
+            <a:ext cx="3126365" cy="2322569"/>
+          </a:xfrm>
+          <a:prstGeom prst="rect">
+            <a:avLst/>
+          </a:prstGeom>
+        </p:spPr>
+      </p:pic>
+      <p:pic>
+        <p:nvPicPr>
+          <p:cNvPr id="19" name="图片 18" descr="图片包含 灯光, 游戏机, 电脑, 烤箱&#10;&#10;AI 生成的内容可能不正确。">
+            <a:extLst>
+              <a:ext uri="{FF2B5EF4-FFF2-40B4-BE49-F238E27FC236}">
+                <a16:creationId xmlns:a16="http://schemas.microsoft.com/office/drawing/2014/main" id="{133506E9-9B88-1F30-E0C3-41DCC4D579F3}"/>
+              </a:ext>
+            </a:extLst>
+          </p:cNvPr>
+          <p:cNvPicPr>
+            <a:picLocks noChangeAspect="1"/>
+          </p:cNvPicPr>
+          <p:nvPr/>
+        </p:nvPicPr>
+        <p:blipFill>
+          <a:blip r:embed="rId5">
+            <a:extLst>
+              <a:ext uri="{28A0092B-C50C-407E-A947-70E740481C1C}">
+                <a14:useLocalDpi xmlns:a14="http://schemas.microsoft.com/office/drawing/2010/main" val="0"/>
+              </a:ext>
+            </a:extLst>
+          </a:blip>
+          <a:stretch>
+            <a:fillRect/>
+          </a:stretch>
+        </p:blipFill>
+        <p:spPr>
+          <a:xfrm>
+            <a:off x="5479460" y="3084819"/>
+            <a:ext cx="3408699" cy="2031912"/>
+          </a:xfrm>
+          <a:prstGeom prst="rect">
+            <a:avLst/>
+          </a:prstGeom>
+        </p:spPr>
+      </p:pic>
+      <p:pic>
+        <p:nvPicPr>
+          <p:cNvPr id="21" name="图片 20" descr="图标&#10;&#10;AI 生成的内容可能不正确。">
+            <a:extLst>
+              <a:ext uri="{FF2B5EF4-FFF2-40B4-BE49-F238E27FC236}">
+                <a16:creationId xmlns:a16="http://schemas.microsoft.com/office/drawing/2014/main" id="{87B2B05E-C214-95B8-549B-844E0ED27196}"/>
+              </a:ext>
+            </a:extLst>
+          </p:cNvPr>
+          <p:cNvPicPr>
+            <a:picLocks/>
+          </p:cNvPicPr>
+          <p:nvPr/>
+        </p:nvPicPr>
+        <p:blipFill>
+          <a:blip r:embed="rId6">
+            <a:extLst>
+              <a:ext uri="{28A0092B-C50C-407E-A947-70E740481C1C}">
+                <a14:useLocalDpi xmlns:a14="http://schemas.microsoft.com/office/drawing/2010/main" val="0"/>
+              </a:ext>
+            </a:extLst>
+          </a:blip>
+          <a:srcRect r="-1046" b="15112"/>
+          <a:stretch>
+            <a:fillRect/>
+          </a:stretch>
+        </p:blipFill>
+        <p:spPr>
+          <a:xfrm>
+            <a:off x="8888159" y="3084819"/>
+            <a:ext cx="2347001" cy="2031912"/>
+          </a:xfrm>
+          <a:prstGeom prst="rect">
+            <a:avLst/>
+          </a:prstGeom>
+        </p:spPr>
+      </p:pic>
+      <p:sp>
+        <p:nvSpPr>
+          <p:cNvPr id="22" name="文本框 21">
+            <a:extLst>
+              <a:ext uri="{FF2B5EF4-FFF2-40B4-BE49-F238E27FC236}">
+                <a16:creationId xmlns:a16="http://schemas.microsoft.com/office/drawing/2014/main" id="{6620393C-B9CE-8F4D-CADA-BA779DEDE07C}"/>
+              </a:ext>
+            </a:extLst>
+          </p:cNvPr>
+          <p:cNvSpPr txBox="1"/>
+          <p:nvPr/>
+        </p:nvSpPr>
+        <p:spPr>
+          <a:xfrm>
+            <a:off x="2435816" y="2888591"/>
+            <a:ext cx="2428568" cy="1200329"/>
+          </a:xfrm>
+          <a:prstGeom prst="rect">
+            <a:avLst/>
+          </a:prstGeom>
+          <a:noFill/>
+        </p:spPr>
+        <p:txBody>
+          <a:bodyPr wrap="square" rtlCol="0">
+            <a:spAutoFit/>
+          </a:bodyPr>
+          <a:lstStyle/>
+          <a:p>
+            <a:r>
+              <a:rPr lang="zh-CN" altLang="en-US" sz="2400" dirty="0"/>
+              <a:t>右边为轻型</a:t>
+            </a:r>
+            <a:r>
+              <a:rPr lang="en-US" altLang="zh-CN" sz="2400" dirty="0"/>
+              <a:t>AGV</a:t>
+            </a:r>
+            <a:r>
+              <a:rPr lang="zh-CN" altLang="en-US" sz="2400" dirty="0"/>
+              <a:t>小车四个方向的视图</a:t>
+            </a:r>
+          </a:p>
+        </p:txBody>
+      </p:sp>
     </p:spTree>
     <p:extLst>
       <p:ext uri="{BB962C8B-B14F-4D97-AF65-F5344CB8AC3E}">
@@ -9807,6 +11267,478 @@
 </file>
 
 <file path=ppt/slides/slide8.xml><?xml version="1.0" encoding="utf-8"?>
+<p:sld xmlns:a="http://schemas.openxmlformats.org/drawingml/2006/main" xmlns:r="http://schemas.openxmlformats.org/officeDocument/2006/relationships" xmlns:p="http://schemas.openxmlformats.org/presentationml/2006/main">
+  <p:cSld>
+    <p:spTree>
+      <p:nvGrpSpPr>
+        <p:cNvPr id="1" name=""/>
+        <p:cNvGrpSpPr/>
+        <p:nvPr/>
+      </p:nvGrpSpPr>
+      <p:grpSpPr>
+        <a:xfrm>
+          <a:off x="0" y="0"/>
+          <a:ext cx="0" cy="0"/>
+          <a:chOff x="0" y="0"/>
+          <a:chExt cx="0" cy="0"/>
+        </a:xfrm>
+      </p:grpSpPr>
+      <p:sp>
+        <p:nvSpPr>
+          <p:cNvPr id="4" name="矩形 3">
+            <a:extLst>
+              <a:ext uri="{FF2B5EF4-FFF2-40B4-BE49-F238E27FC236}">
+                <a16:creationId xmlns:a16="http://schemas.microsoft.com/office/drawing/2014/main" id="{F095D332-6305-985C-75E6-83662D8CA343}"/>
+              </a:ext>
+            </a:extLst>
+          </p:cNvPr>
+          <p:cNvSpPr/>
+          <p:nvPr/>
+        </p:nvSpPr>
+        <p:spPr>
+          <a:xfrm>
+            <a:off x="0" y="944628"/>
+            <a:ext cx="2025283" cy="5913372"/>
+          </a:xfrm>
+          <a:prstGeom prst="rect">
+            <a:avLst/>
+          </a:prstGeom>
+          <a:solidFill>
+            <a:srgbClr val="197DF7"/>
+          </a:solidFill>
+          <a:ln>
+            <a:noFill/>
+          </a:ln>
+        </p:spPr>
+        <p:style>
+          <a:lnRef idx="2">
+            <a:schemeClr val="accent1">
+              <a:shade val="15000"/>
+            </a:schemeClr>
+          </a:lnRef>
+          <a:fillRef idx="1">
+            <a:schemeClr val="accent1"/>
+          </a:fillRef>
+          <a:effectRef idx="0">
+            <a:schemeClr val="accent1"/>
+          </a:effectRef>
+          <a:fontRef idx="minor">
+            <a:schemeClr val="lt1"/>
+          </a:fontRef>
+        </p:style>
+        <p:txBody>
+          <a:bodyPr rtlCol="0" anchor="ctr"/>
+          <a:lstStyle/>
+          <a:p>
+            <a:pPr algn="ctr"/>
+            <a:endParaRPr lang="zh-CN" altLang="en-US"/>
+          </a:p>
+        </p:txBody>
+      </p:sp>
+      <p:pic>
+        <p:nvPicPr>
+          <p:cNvPr id="5" name="图片 4">
+            <a:extLst>
+              <a:ext uri="{FF2B5EF4-FFF2-40B4-BE49-F238E27FC236}">
+                <a16:creationId xmlns:a16="http://schemas.microsoft.com/office/drawing/2014/main" id="{42B187C5-4D56-DB95-6DB3-654A0EB90BD5}"/>
+              </a:ext>
+            </a:extLst>
+          </p:cNvPr>
+          <p:cNvPicPr>
+            <a:picLocks noChangeAspect="1"/>
+          </p:cNvPicPr>
+          <p:nvPr/>
+        </p:nvPicPr>
+        <p:blipFill>
+          <a:blip r:embed="rId2"/>
+          <a:stretch>
+            <a:fillRect/>
+          </a:stretch>
+        </p:blipFill>
+        <p:spPr>
+          <a:xfrm>
+            <a:off x="184195" y="197312"/>
+            <a:ext cx="1741460" cy="586009"/>
+          </a:xfrm>
+          <a:prstGeom prst="rect">
+            <a:avLst/>
+          </a:prstGeom>
+        </p:spPr>
+      </p:pic>
+      <p:sp>
+        <p:nvSpPr>
+          <p:cNvPr id="6" name="矩形 5">
+            <a:extLst>
+              <a:ext uri="{FF2B5EF4-FFF2-40B4-BE49-F238E27FC236}">
+                <a16:creationId xmlns:a16="http://schemas.microsoft.com/office/drawing/2014/main" id="{4C5367D6-D5D5-9705-DEC2-7236F594D042}"/>
+              </a:ext>
+            </a:extLst>
+          </p:cNvPr>
+          <p:cNvSpPr/>
+          <p:nvPr/>
+        </p:nvSpPr>
+        <p:spPr>
+          <a:xfrm>
+            <a:off x="-1" y="1080655"/>
+            <a:ext cx="2025283" cy="5777345"/>
+          </a:xfrm>
+          <a:prstGeom prst="rect">
+            <a:avLst/>
+          </a:prstGeom>
+          <a:solidFill>
+            <a:srgbClr val="0048CE"/>
+          </a:solidFill>
+          <a:ln>
+            <a:noFill/>
+          </a:ln>
+        </p:spPr>
+        <p:style>
+          <a:lnRef idx="2">
+            <a:schemeClr val="accent1">
+              <a:shade val="15000"/>
+            </a:schemeClr>
+          </a:lnRef>
+          <a:fillRef idx="1">
+            <a:schemeClr val="accent1"/>
+          </a:fillRef>
+          <a:effectRef idx="0">
+            <a:schemeClr val="accent1"/>
+          </a:effectRef>
+          <a:fontRef idx="minor">
+            <a:schemeClr val="lt1"/>
+          </a:fontRef>
+        </p:style>
+        <p:txBody>
+          <a:bodyPr rtlCol="0" anchor="ctr"/>
+          <a:lstStyle/>
+          <a:p>
+            <a:pPr algn="ctr"/>
+            <a:endParaRPr lang="zh-CN" altLang="en-US"/>
+          </a:p>
+        </p:txBody>
+      </p:sp>
+      <p:sp>
+        <p:nvSpPr>
+          <p:cNvPr id="7" name="标题 1">
+            <a:extLst>
+              <a:ext uri="{FF2B5EF4-FFF2-40B4-BE49-F238E27FC236}">
+                <a16:creationId xmlns:a16="http://schemas.microsoft.com/office/drawing/2014/main" id="{1B9E62ED-55A0-B9A4-2C70-08A64DF594BE}"/>
+              </a:ext>
+            </a:extLst>
+          </p:cNvPr>
+          <p:cNvSpPr txBox="1">
+            <a:spLocks/>
+          </p:cNvSpPr>
+          <p:nvPr/>
+        </p:nvSpPr>
+        <p:spPr>
+          <a:xfrm>
+            <a:off x="2231406" y="197312"/>
+            <a:ext cx="4412506" cy="647777"/>
+          </a:xfrm>
+          <a:prstGeom prst="rect">
+            <a:avLst/>
+          </a:prstGeom>
+        </p:spPr>
+        <p:txBody>
+          <a:bodyPr vert="horz" lIns="91440" tIns="45720" rIns="91440" bIns="45720" rtlCol="0" anchor="ctr">
+            <a:normAutofit/>
+          </a:bodyPr>
+          <a:lstStyle>
+            <a:lvl1pPr algn="l" defTabSz="914400" rtl="0" eaLnBrk="1" latinLnBrk="0" hangingPunct="1">
+              <a:lnSpc>
+                <a:spcPct val="90000"/>
+              </a:lnSpc>
+              <a:spcBef>
+                <a:spcPct val="0"/>
+              </a:spcBef>
+              <a:buNone/>
+              <a:defRPr sz="4400" kern="1200">
+                <a:solidFill>
+                  <a:schemeClr val="tx1"/>
+                </a:solidFill>
+                <a:latin typeface="+mj-lt"/>
+                <a:ea typeface="+mj-ea"/>
+                <a:cs typeface="+mj-cs"/>
+              </a:defRPr>
+            </a:lvl1pPr>
+          </a:lstStyle>
+          <a:p>
+            <a:r>
+              <a:rPr lang="zh-CN" altLang="en-US" sz="4000" b="1" dirty="0">
+                <a:latin typeface="+mn-ea"/>
+                <a:ea typeface="+mn-ea"/>
+              </a:rPr>
+              <a:t>整体概览</a:t>
+            </a:r>
+          </a:p>
+        </p:txBody>
+      </p:sp>
+      <p:sp>
+        <p:nvSpPr>
+          <p:cNvPr id="12" name="文本框 11">
+            <a:extLst>
+              <a:ext uri="{FF2B5EF4-FFF2-40B4-BE49-F238E27FC236}">
+                <a16:creationId xmlns:a16="http://schemas.microsoft.com/office/drawing/2014/main" id="{CCA02C10-E2B0-E098-8BED-07A11594376A}"/>
+              </a:ext>
+            </a:extLst>
+          </p:cNvPr>
+          <p:cNvSpPr txBox="1"/>
+          <p:nvPr/>
+        </p:nvSpPr>
+        <p:spPr>
+          <a:xfrm>
+            <a:off x="2231406" y="944628"/>
+            <a:ext cx="2428568" cy="461665"/>
+          </a:xfrm>
+          <a:prstGeom prst="rect">
+            <a:avLst/>
+          </a:prstGeom>
+          <a:noFill/>
+        </p:spPr>
+        <p:txBody>
+          <a:bodyPr wrap="square" rtlCol="0">
+            <a:spAutoFit/>
+          </a:bodyPr>
+          <a:lstStyle/>
+          <a:p>
+            <a:r>
+              <a:rPr lang="zh-CN" altLang="en-US" sz="2400" b="1" dirty="0"/>
+              <a:t>内部结构展示</a:t>
+            </a:r>
+          </a:p>
+        </p:txBody>
+      </p:sp>
+      <p:pic>
+        <p:nvPicPr>
+          <p:cNvPr id="14" name="图片 13" descr="图示&#10;&#10;AI 生成的内容可能不正确。">
+            <a:extLst>
+              <a:ext uri="{FF2B5EF4-FFF2-40B4-BE49-F238E27FC236}">
+                <a16:creationId xmlns:a16="http://schemas.microsoft.com/office/drawing/2014/main" id="{5AB1E623-A2F8-45A4-A657-60141DE76DE0}"/>
+              </a:ext>
+            </a:extLst>
+          </p:cNvPr>
+          <p:cNvPicPr>
+            <a:picLocks noChangeAspect="1"/>
+          </p:cNvPicPr>
+          <p:nvPr/>
+        </p:nvPicPr>
+        <p:blipFill>
+          <a:blip r:embed="rId3">
+            <a:extLst>
+              <a:ext uri="{28A0092B-C50C-407E-A947-70E740481C1C}">
+                <a14:useLocalDpi xmlns:a14="http://schemas.microsoft.com/office/drawing/2010/main" val="0"/>
+              </a:ext>
+            </a:extLst>
+          </a:blip>
+          <a:stretch>
+            <a:fillRect/>
+          </a:stretch>
+        </p:blipFill>
+        <p:spPr>
+          <a:xfrm>
+            <a:off x="2231406" y="1817673"/>
+            <a:ext cx="3140694" cy="2151654"/>
+          </a:xfrm>
+          <a:prstGeom prst="rect">
+            <a:avLst/>
+          </a:prstGeom>
+        </p:spPr>
+      </p:pic>
+      <p:pic>
+        <p:nvPicPr>
+          <p:cNvPr id="16" name="图片 15" descr="图示&#10;&#10;AI 生成的内容可能不正确。">
+            <a:extLst>
+              <a:ext uri="{FF2B5EF4-FFF2-40B4-BE49-F238E27FC236}">
+                <a16:creationId xmlns:a16="http://schemas.microsoft.com/office/drawing/2014/main" id="{C795ADCB-016F-A77A-E1E3-547948084505}"/>
+              </a:ext>
+            </a:extLst>
+          </p:cNvPr>
+          <p:cNvPicPr>
+            <a:picLocks noChangeAspect="1"/>
+          </p:cNvPicPr>
+          <p:nvPr/>
+        </p:nvPicPr>
+        <p:blipFill>
+          <a:blip r:embed="rId4">
+            <a:extLst>
+              <a:ext uri="{28A0092B-C50C-407E-A947-70E740481C1C}">
+                <a14:useLocalDpi xmlns:a14="http://schemas.microsoft.com/office/drawing/2010/main" val="0"/>
+              </a:ext>
+            </a:extLst>
+          </a:blip>
+          <a:stretch>
+            <a:fillRect/>
+          </a:stretch>
+        </p:blipFill>
+        <p:spPr>
+          <a:xfrm>
+            <a:off x="5578223" y="1822294"/>
+            <a:ext cx="3174930" cy="2222070"/>
+          </a:xfrm>
+          <a:prstGeom prst="rect">
+            <a:avLst/>
+          </a:prstGeom>
+        </p:spPr>
+      </p:pic>
+      <p:pic>
+        <p:nvPicPr>
+          <p:cNvPr id="18" name="图片 17" descr="图示&#10;&#10;AI 生成的内容可能不正确。">
+            <a:extLst>
+              <a:ext uri="{FF2B5EF4-FFF2-40B4-BE49-F238E27FC236}">
+                <a16:creationId xmlns:a16="http://schemas.microsoft.com/office/drawing/2014/main" id="{2D755BC6-11A4-AB4F-82C4-7D72E6849739}"/>
+              </a:ext>
+            </a:extLst>
+          </p:cNvPr>
+          <p:cNvPicPr>
+            <a:picLocks noChangeAspect="1"/>
+          </p:cNvPicPr>
+          <p:nvPr/>
+        </p:nvPicPr>
+        <p:blipFill>
+          <a:blip r:embed="rId5">
+            <a:extLst>
+              <a:ext uri="{28A0092B-C50C-407E-A947-70E740481C1C}">
+                <a14:useLocalDpi xmlns:a14="http://schemas.microsoft.com/office/drawing/2010/main" val="0"/>
+              </a:ext>
+            </a:extLst>
+          </a:blip>
+          <a:stretch>
+            <a:fillRect/>
+          </a:stretch>
+        </p:blipFill>
+        <p:spPr>
+          <a:xfrm>
+            <a:off x="8959276" y="1921978"/>
+            <a:ext cx="2756605" cy="1943043"/>
+          </a:xfrm>
+          <a:prstGeom prst="rect">
+            <a:avLst/>
+          </a:prstGeom>
+        </p:spPr>
+      </p:pic>
+      <p:pic>
+        <p:nvPicPr>
+          <p:cNvPr id="24" name="图片 23" descr="图片包含 游戏机, 电子, 话筒&#10;&#10;AI 生成的内容可能不正确。">
+            <a:extLst>
+              <a:ext uri="{FF2B5EF4-FFF2-40B4-BE49-F238E27FC236}">
+                <a16:creationId xmlns:a16="http://schemas.microsoft.com/office/drawing/2014/main" id="{05ABBC76-8285-ED41-C0B6-3A0814376C1D}"/>
+              </a:ext>
+            </a:extLst>
+          </p:cNvPr>
+          <p:cNvPicPr>
+            <a:picLocks noChangeAspect="1"/>
+          </p:cNvPicPr>
+          <p:nvPr/>
+        </p:nvPicPr>
+        <p:blipFill>
+          <a:blip r:embed="rId6">
+            <a:extLst>
+              <a:ext uri="{28A0092B-C50C-407E-A947-70E740481C1C}">
+                <a14:useLocalDpi xmlns:a14="http://schemas.microsoft.com/office/drawing/2010/main" val="0"/>
+              </a:ext>
+            </a:extLst>
+          </a:blip>
+          <a:stretch>
+            <a:fillRect/>
+          </a:stretch>
+        </p:blipFill>
+        <p:spPr>
+          <a:xfrm>
+            <a:off x="2231406" y="4520045"/>
+            <a:ext cx="3221190" cy="1846292"/>
+          </a:xfrm>
+          <a:prstGeom prst="rect">
+            <a:avLst/>
+          </a:prstGeom>
+        </p:spPr>
+      </p:pic>
+      <p:pic>
+        <p:nvPicPr>
+          <p:cNvPr id="26" name="图片 25" descr="图片包含 话筒, 游戏机&#10;&#10;AI 生成的内容可能不正确。">
+            <a:extLst>
+              <a:ext uri="{FF2B5EF4-FFF2-40B4-BE49-F238E27FC236}">
+                <a16:creationId xmlns:a16="http://schemas.microsoft.com/office/drawing/2014/main" id="{692B1706-FDE3-3DB5-B607-D0A02DAE20D9}"/>
+              </a:ext>
+            </a:extLst>
+          </p:cNvPr>
+          <p:cNvPicPr>
+            <a:picLocks noChangeAspect="1"/>
+          </p:cNvPicPr>
+          <p:nvPr/>
+        </p:nvPicPr>
+        <p:blipFill>
+          <a:blip r:embed="rId7">
+            <a:extLst>
+              <a:ext uri="{28A0092B-C50C-407E-A947-70E740481C1C}">
+                <a14:useLocalDpi xmlns:a14="http://schemas.microsoft.com/office/drawing/2010/main" val="0"/>
+              </a:ext>
+            </a:extLst>
+          </a:blip>
+          <a:stretch>
+            <a:fillRect/>
+          </a:stretch>
+        </p:blipFill>
+        <p:spPr>
+          <a:xfrm>
+            <a:off x="5658719" y="4552647"/>
+            <a:ext cx="2951018" cy="1781088"/>
+          </a:xfrm>
+          <a:prstGeom prst="rect">
+            <a:avLst/>
+          </a:prstGeom>
+        </p:spPr>
+      </p:pic>
+      <p:pic>
+        <p:nvPicPr>
+          <p:cNvPr id="28" name="图片 27" descr="图示, 工程绘图&#10;&#10;AI 生成的内容可能不正确。">
+            <a:extLst>
+              <a:ext uri="{FF2B5EF4-FFF2-40B4-BE49-F238E27FC236}">
+                <a16:creationId xmlns:a16="http://schemas.microsoft.com/office/drawing/2014/main" id="{E3AE8A6F-ECF0-CF81-72F3-A63D51245FF1}"/>
+              </a:ext>
+            </a:extLst>
+          </p:cNvPr>
+          <p:cNvPicPr>
+            <a:picLocks noChangeAspect="1"/>
+          </p:cNvPicPr>
+          <p:nvPr/>
+        </p:nvPicPr>
+        <p:blipFill>
+          <a:blip r:embed="rId8">
+            <a:extLst>
+              <a:ext uri="{28A0092B-C50C-407E-A947-70E740481C1C}">
+                <a14:useLocalDpi xmlns:a14="http://schemas.microsoft.com/office/drawing/2010/main" val="0"/>
+              </a:ext>
+            </a:extLst>
+          </a:blip>
+          <a:stretch>
+            <a:fillRect/>
+          </a:stretch>
+        </p:blipFill>
+        <p:spPr>
+          <a:xfrm>
+            <a:off x="9123294" y="4439708"/>
+            <a:ext cx="2428568" cy="2006966"/>
+          </a:xfrm>
+          <a:prstGeom prst="rect">
+            <a:avLst/>
+          </a:prstGeom>
+        </p:spPr>
+      </p:pic>
+    </p:spTree>
+    <p:extLst>
+      <p:ext uri="{BB962C8B-B14F-4D97-AF65-F5344CB8AC3E}">
+        <p14:creationId xmlns:p14="http://schemas.microsoft.com/office/powerpoint/2010/main" val="45029866"/>
+      </p:ext>
+    </p:extLst>
+  </p:cSld>
+  <p:clrMapOvr>
+    <a:masterClrMapping/>
+  </p:clrMapOvr>
+</p:sld>
+</file>
+
+<file path=ppt/slides/slide9.xml><?xml version="1.0" encoding="utf-8"?>
 <p:sld xmlns:a="http://schemas.openxmlformats.org/drawingml/2006/main" xmlns:r="http://schemas.openxmlformats.org/officeDocument/2006/relationships" xmlns:p="http://schemas.openxmlformats.org/presentationml/2006/main">
   <p:cSld>
     <p:bg>
@@ -9858,7 +11790,7 @@
             <a:avLst/>
           </a:prstGeom>
           <a:solidFill>
-            <a:srgbClr val="177BF5"/>
+            <a:srgbClr val="177DF8"/>
           </a:solidFill>
           <a:ln>
             <a:noFill/>
@@ -9893,6 +11825,36 @@
           </a:p>
         </p:txBody>
       </p:sp>
+      <p:pic>
+        <p:nvPicPr>
+          <p:cNvPr id="11" name="图片 10">
+            <a:extLst>
+              <a:ext uri="{FF2B5EF4-FFF2-40B4-BE49-F238E27FC236}">
+                <a16:creationId xmlns:a16="http://schemas.microsoft.com/office/drawing/2014/main" id="{7FA38026-B17F-CD37-BAFB-C535E9A81A98}"/>
+              </a:ext>
+            </a:extLst>
+          </p:cNvPr>
+          <p:cNvPicPr>
+            <a:picLocks noChangeAspect="1"/>
+          </p:cNvPicPr>
+          <p:nvPr/>
+        </p:nvPicPr>
+        <p:blipFill>
+          <a:blip r:embed="rId2"/>
+          <a:stretch>
+            <a:fillRect/>
+          </a:stretch>
+        </p:blipFill>
+        <p:spPr>
+          <a:xfrm>
+            <a:off x="184195" y="197312"/>
+            <a:ext cx="1741460" cy="586009"/>
+          </a:xfrm>
+          <a:prstGeom prst="rect">
+            <a:avLst/>
+          </a:prstGeom>
+        </p:spPr>
+      </p:pic>
       <p:sp>
         <p:nvSpPr>
           <p:cNvPr id="12" name="矩形 11">
@@ -9907,7 +11869,7 @@
         </p:nvSpPr>
         <p:spPr>
           <a:xfrm>
-            <a:off x="0" y="4148807"/>
+            <a:off x="0" y="4148805"/>
             <a:ext cx="12192000" cy="2709193"/>
           </a:xfrm>
           <a:prstGeom prst="rect">
@@ -10040,7 +12002,10 @@
             <a:r>
               <a:rPr lang="en-US" altLang="zh-CN" sz="1400" b="1" dirty="0">
                 <a:solidFill>
-                  <a:srgbClr val="0096B4"/>
+                  <a:schemeClr val="accent4">
+                    <a:lumMod val="95000"/>
+                    <a:lumOff val="5000"/>
+                  </a:schemeClr>
                 </a:solidFill>
                 <a:latin typeface="Arial" panose="020B0604020202020204" pitchFamily="34" charset="0"/>
                 <a:cs typeface="Arial" panose="020B0604020202020204" pitchFamily="34" charset="0"/>
@@ -10050,16 +12015,22 @@
             <a:fld id="{5853BA87-C0A4-4D40-A7D0-264FBDFF6174}" type="datetime9">
               <a:rPr lang="en-US" altLang="zh-CN" sz="1400" b="1" dirty="0" smtClean="0">
                 <a:solidFill>
-                  <a:srgbClr val="0096B4"/>
+                  <a:schemeClr val="accent4">
+                    <a:lumMod val="95000"/>
+                    <a:lumOff val="5000"/>
+                  </a:schemeClr>
                 </a:solidFill>
                 <a:latin typeface="Arial" panose="020B0604020202020204" pitchFamily="34" charset="0"/>
                 <a:cs typeface="Arial" panose="020B0604020202020204" pitchFamily="34" charset="0"/>
               </a:rPr>
-              <a:t>11/14/2025 10:54:12 AM</a:t>
+              <a:t>11/24/2025 5:24:34 PM</a:t>
             </a:fld>
             <a:endParaRPr lang="zh-CN" altLang="en-US" sz="1400" b="1" dirty="0">
               <a:solidFill>
-                <a:srgbClr val="0096B4"/>
+                <a:schemeClr val="accent4">
+                  <a:lumMod val="95000"/>
+                  <a:lumOff val="5000"/>
+                </a:schemeClr>
               </a:solidFill>
               <a:latin typeface="Arial" panose="020B0604020202020204" pitchFamily="34" charset="0"/>
               <a:cs typeface="Arial" panose="020B0604020202020204" pitchFamily="34" charset="0"/>
@@ -10103,300 +12074,10 @@
           </a:p>
         </p:txBody>
       </p:sp>
-      <p:pic>
-        <p:nvPicPr>
-          <p:cNvPr id="3" name="图片 2" descr="文本&#10;&#10;AI 生成的内容可能不正确。">
-            <a:extLst>
-              <a:ext uri="{FF2B5EF4-FFF2-40B4-BE49-F238E27FC236}">
-                <a16:creationId xmlns:a16="http://schemas.microsoft.com/office/drawing/2014/main" id="{9C019256-55CC-E25C-F092-A5AA10CA928F}"/>
-              </a:ext>
-            </a:extLst>
-          </p:cNvPr>
-          <p:cNvPicPr>
-            <a:picLocks noChangeAspect="1"/>
-          </p:cNvPicPr>
-          <p:nvPr/>
-        </p:nvPicPr>
-        <p:blipFill>
-          <a:blip r:embed="rId2">
-            <a:extLst>
-              <a:ext uri="{28A0092B-C50C-407E-A947-70E740481C1C}">
-                <a14:useLocalDpi xmlns:a14="http://schemas.microsoft.com/office/drawing/2010/main" val="0"/>
-              </a:ext>
-            </a:extLst>
-          </a:blip>
-          <a:stretch>
-            <a:fillRect/>
-          </a:stretch>
-        </p:blipFill>
-        <p:spPr>
-          <a:xfrm>
-            <a:off x="50525" y="164735"/>
-            <a:ext cx="2008800" cy="648980"/>
-          </a:xfrm>
-          <a:prstGeom prst="rect">
-            <a:avLst/>
-          </a:prstGeom>
-        </p:spPr>
-      </p:pic>
     </p:spTree>
     <p:extLst>
       <p:ext uri="{BB962C8B-B14F-4D97-AF65-F5344CB8AC3E}">
         <p14:creationId xmlns:p14="http://schemas.microsoft.com/office/powerpoint/2010/main" val="3488419961"/>
-      </p:ext>
-    </p:extLst>
-  </p:cSld>
-  <p:clrMapOvr>
-    <a:masterClrMapping/>
-  </p:clrMapOvr>
-  <mc:AlternateContent xmlns:mc="http://schemas.openxmlformats.org/markup-compatibility/2006" xmlns:p159="http://schemas.microsoft.com/office/powerpoint/2015/09/main">
-    <mc:Choice Requires="p159">
-      <p:transition xmlns:p14="http://schemas.microsoft.com/office/powerpoint/2010/main" spd="slow" p14:dur="2000">
-        <p159:morph option="byObject"/>
-      </p:transition>
-    </mc:Choice>
-    <mc:Fallback xmlns="">
-      <p:transition spd="slow">
-        <p:fade/>
-      </p:transition>
-    </mc:Fallback>
-  </mc:AlternateContent>
-</p:sld>
-</file>
-
-<file path=ppt/slides/slide9.xml><?xml version="1.0" encoding="utf-8"?>
-<p:sld xmlns:a="http://schemas.openxmlformats.org/drawingml/2006/main" xmlns:r="http://schemas.openxmlformats.org/officeDocument/2006/relationships" xmlns:p="http://schemas.openxmlformats.org/presentationml/2006/main">
-  <p:cSld>
-    <p:bg>
-      <p:bgPr>
-        <a:solidFill>
-          <a:srgbClr val="FFFCF7"/>
-        </a:solidFill>
-        <a:effectLst/>
-      </p:bgPr>
-    </p:bg>
-    <p:spTree>
-      <p:nvGrpSpPr>
-        <p:cNvPr id="1" name="">
-          <a:extLst>
-            <a:ext uri="{FF2B5EF4-FFF2-40B4-BE49-F238E27FC236}">
-              <a16:creationId xmlns:a16="http://schemas.microsoft.com/office/drawing/2014/main" id="{82A03F8C-C045-90F0-A222-070B35787551}"/>
-            </a:ext>
-          </a:extLst>
-        </p:cNvPr>
-        <p:cNvGrpSpPr/>
-        <p:nvPr/>
-      </p:nvGrpSpPr>
-      <p:grpSpPr>
-        <a:xfrm>
-          <a:off x="0" y="0"/>
-          <a:ext cx="0" cy="0"/>
-          <a:chOff x="0" y="0"/>
-          <a:chExt cx="0" cy="0"/>
-        </a:xfrm>
-      </p:grpSpPr>
-      <p:sp>
-        <p:nvSpPr>
-          <p:cNvPr id="4" name="矩形 3">
-            <a:extLst>
-              <a:ext uri="{FF2B5EF4-FFF2-40B4-BE49-F238E27FC236}">
-                <a16:creationId xmlns:a16="http://schemas.microsoft.com/office/drawing/2014/main" id="{0C1B2792-69C3-C466-E7EA-417A80EC82BB}"/>
-              </a:ext>
-            </a:extLst>
-          </p:cNvPr>
-          <p:cNvSpPr/>
-          <p:nvPr/>
-        </p:nvSpPr>
-        <p:spPr>
-          <a:xfrm>
-            <a:off x="0" y="944628"/>
-            <a:ext cx="2025283" cy="5913372"/>
-          </a:xfrm>
-          <a:prstGeom prst="rect">
-            <a:avLst/>
-          </a:prstGeom>
-          <a:solidFill>
-            <a:srgbClr val="177BF5"/>
-          </a:solidFill>
-          <a:ln>
-            <a:noFill/>
-          </a:ln>
-        </p:spPr>
-        <p:style>
-          <a:lnRef idx="2">
-            <a:schemeClr val="accent1">
-              <a:shade val="15000"/>
-            </a:schemeClr>
-          </a:lnRef>
-          <a:fillRef idx="1">
-            <a:schemeClr val="accent1"/>
-          </a:fillRef>
-          <a:effectRef idx="0">
-            <a:schemeClr val="accent1"/>
-          </a:effectRef>
-          <a:fontRef idx="minor">
-            <a:schemeClr val="lt1"/>
-          </a:fontRef>
-        </p:style>
-        <p:txBody>
-          <a:bodyPr rtlCol="0" anchor="ctr"/>
-          <a:lstStyle/>
-          <a:p>
-            <a:pPr algn="ctr"/>
-            <a:endParaRPr lang="zh-CN" altLang="en-US"/>
-          </a:p>
-        </p:txBody>
-      </p:sp>
-      <p:sp>
-        <p:nvSpPr>
-          <p:cNvPr id="6" name="矩形 5">
-            <a:extLst>
-              <a:ext uri="{FF2B5EF4-FFF2-40B4-BE49-F238E27FC236}">
-                <a16:creationId xmlns:a16="http://schemas.microsoft.com/office/drawing/2014/main" id="{3841BCEB-F417-F8EE-344B-EB83CCF99B93}"/>
-              </a:ext>
-            </a:extLst>
-          </p:cNvPr>
-          <p:cNvSpPr/>
-          <p:nvPr/>
-        </p:nvSpPr>
-        <p:spPr>
-          <a:xfrm>
-            <a:off x="-1" y="1080655"/>
-            <a:ext cx="2025283" cy="5777345"/>
-          </a:xfrm>
-          <a:prstGeom prst="rect">
-            <a:avLst/>
-          </a:prstGeom>
-          <a:solidFill>
-            <a:srgbClr val="0048CE"/>
-          </a:solidFill>
-          <a:ln>
-            <a:noFill/>
-          </a:ln>
-        </p:spPr>
-        <p:style>
-          <a:lnRef idx="2">
-            <a:schemeClr val="accent1">
-              <a:shade val="15000"/>
-            </a:schemeClr>
-          </a:lnRef>
-          <a:fillRef idx="1">
-            <a:schemeClr val="accent1"/>
-          </a:fillRef>
-          <a:effectRef idx="0">
-            <a:schemeClr val="accent1"/>
-          </a:effectRef>
-          <a:fontRef idx="minor">
-            <a:schemeClr val="lt1"/>
-          </a:fontRef>
-        </p:style>
-        <p:txBody>
-          <a:bodyPr rtlCol="0" anchor="ctr"/>
-          <a:lstStyle/>
-          <a:p>
-            <a:pPr algn="ctr"/>
-            <a:endParaRPr lang="zh-CN" altLang="en-US"/>
-          </a:p>
-        </p:txBody>
-      </p:sp>
-      <p:sp>
-        <p:nvSpPr>
-          <p:cNvPr id="7" name="标题 1">
-            <a:extLst>
-              <a:ext uri="{FF2B5EF4-FFF2-40B4-BE49-F238E27FC236}">
-                <a16:creationId xmlns:a16="http://schemas.microsoft.com/office/drawing/2014/main" id="{3A80A810-8913-F220-68A6-39FB751BF7F0}"/>
-              </a:ext>
-            </a:extLst>
-          </p:cNvPr>
-          <p:cNvSpPr txBox="1">
-            <a:spLocks/>
-          </p:cNvSpPr>
-          <p:nvPr/>
-        </p:nvSpPr>
-        <p:spPr>
-          <a:xfrm>
-            <a:off x="2231406" y="197312"/>
-            <a:ext cx="4412506" cy="647777"/>
-          </a:xfrm>
-          <a:prstGeom prst="rect">
-            <a:avLst/>
-          </a:prstGeom>
-        </p:spPr>
-        <p:txBody>
-          <a:bodyPr vert="horz" lIns="91440" tIns="45720" rIns="91440" bIns="45720" rtlCol="0" anchor="ctr">
-            <a:normAutofit/>
-          </a:bodyPr>
-          <a:lstStyle>
-            <a:lvl1pPr algn="l" defTabSz="914400" rtl="0" eaLnBrk="1" latinLnBrk="0" hangingPunct="1">
-              <a:lnSpc>
-                <a:spcPct val="90000"/>
-              </a:lnSpc>
-              <a:spcBef>
-                <a:spcPct val="0"/>
-              </a:spcBef>
-              <a:buNone/>
-              <a:defRPr sz="4400" kern="1200">
-                <a:solidFill>
-                  <a:schemeClr val="tx1"/>
-                </a:solidFill>
-                <a:latin typeface="+mj-lt"/>
-                <a:ea typeface="+mj-ea"/>
-                <a:cs typeface="+mj-cs"/>
-              </a:defRPr>
-            </a:lvl1pPr>
-          </a:lstStyle>
-          <a:p>
-            <a:r>
-              <a:rPr lang="zh-CN" altLang="en-US" sz="4000" b="1" dirty="0">
-                <a:latin typeface="+mn-ea"/>
-                <a:ea typeface="+mn-ea"/>
-              </a:rPr>
-              <a:t>设计创新点</a:t>
-            </a:r>
-          </a:p>
-        </p:txBody>
-      </p:sp>
-      <p:pic>
-        <p:nvPicPr>
-          <p:cNvPr id="2" name="图片 1" descr="徽标&#10;&#10;AI 生成的内容可能不正确。">
-            <a:extLst>
-              <a:ext uri="{FF2B5EF4-FFF2-40B4-BE49-F238E27FC236}">
-                <a16:creationId xmlns:a16="http://schemas.microsoft.com/office/drawing/2014/main" id="{515428D3-116D-6FA5-00BB-688F2357BF4F}"/>
-              </a:ext>
-            </a:extLst>
-          </p:cNvPr>
-          <p:cNvPicPr>
-            <a:picLocks/>
-          </p:cNvPicPr>
-          <p:nvPr/>
-        </p:nvPicPr>
-        <p:blipFill>
-          <a:blip r:embed="rId2">
-            <a:extLst>
-              <a:ext uri="{28A0092B-C50C-407E-A947-70E740481C1C}">
-                <a14:useLocalDpi xmlns:a14="http://schemas.microsoft.com/office/drawing/2010/main" val="0"/>
-              </a:ext>
-            </a:extLst>
-          </a:blip>
-          <a:srcRect t="29985" b="27316"/>
-          <a:stretch>
-            <a:fillRect/>
-          </a:stretch>
-        </p:blipFill>
-        <p:spPr>
-          <a:xfrm>
-            <a:off x="184195" y="166221"/>
-            <a:ext cx="1741461" cy="688543"/>
-          </a:xfrm>
-          <a:prstGeom prst="rect">
-            <a:avLst/>
-          </a:prstGeom>
-        </p:spPr>
-      </p:pic>
-    </p:spTree>
-    <p:extLst>
-      <p:ext uri="{BB962C8B-B14F-4D97-AF65-F5344CB8AC3E}">
-        <p14:creationId xmlns:p14="http://schemas.microsoft.com/office/powerpoint/2010/main" val="3679176792"/>
       </p:ext>
     </p:extLst>
   </p:cSld>
@@ -10731,4 +12412,319 @@
     </a:ext>
   </a:extLst>
 </a:theme>
+</file>
+
+<file path=ppt/theme/theme2.xml><?xml version="1.0" encoding="utf-8"?>
+<a:theme xmlns:a="http://schemas.openxmlformats.org/drawingml/2006/main" name="Office 主题​​">
+  <a:themeElements>
+    <a:clrScheme name="Office">
+      <a:dk1>
+        <a:sysClr val="windowText" lastClr="000000"/>
+      </a:dk1>
+      <a:lt1>
+        <a:sysClr val="window" lastClr="FFFFFF"/>
+      </a:lt1>
+      <a:dk2>
+        <a:srgbClr val="0E2841"/>
+      </a:dk2>
+      <a:lt2>
+        <a:srgbClr val="E8E8E8"/>
+      </a:lt2>
+      <a:accent1>
+        <a:srgbClr val="156082"/>
+      </a:accent1>
+      <a:accent2>
+        <a:srgbClr val="E97132"/>
+      </a:accent2>
+      <a:accent3>
+        <a:srgbClr val="196B24"/>
+      </a:accent3>
+      <a:accent4>
+        <a:srgbClr val="0F9ED5"/>
+      </a:accent4>
+      <a:accent5>
+        <a:srgbClr val="A02B93"/>
+      </a:accent5>
+      <a:accent6>
+        <a:srgbClr val="4EA72E"/>
+      </a:accent6>
+      <a:hlink>
+        <a:srgbClr val="467886"/>
+      </a:hlink>
+      <a:folHlink>
+        <a:srgbClr val="96607D"/>
+      </a:folHlink>
+    </a:clrScheme>
+    <a:fontScheme name="Office">
+      <a:majorFont>
+        <a:latin typeface="等线 Light" panose="02110004020202020204"/>
+        <a:ea typeface=""/>
+        <a:cs typeface=""/>
+        <a:font script="Jpan" typeface="游ゴシック Light"/>
+        <a:font script="Hang" typeface="맑은 고딕"/>
+        <a:font script="Hans" typeface="等线 Light"/>
+        <a:font script="Hant" typeface="新細明體"/>
+        <a:font script="Arab" typeface="Times New Roman"/>
+        <a:font script="Hebr" typeface="Times New Roman"/>
+        <a:font script="Thai" typeface="Angsana New"/>
+        <a:font script="Ethi" typeface="Nyala"/>
+        <a:font script="Beng" typeface="Vrinda"/>
+        <a:font script="Gujr" typeface="Shruti"/>
+        <a:font script="Khmr" typeface="MoolBoran"/>
+        <a:font script="Knda" typeface="Tunga"/>
+        <a:font script="Guru" typeface="Raavi"/>
+        <a:font script="Cans" typeface="Euphemia"/>
+        <a:font script="Cher" typeface="Plantagenet Cherokee"/>
+        <a:font script="Yiii" typeface="Microsoft Yi Baiti"/>
+        <a:font script="Tibt" typeface="Microsoft Himalaya"/>
+        <a:font script="Thaa" typeface="MV Boli"/>
+        <a:font script="Deva" typeface="Mangal"/>
+        <a:font script="Telu" typeface="Gautami"/>
+        <a:font script="Taml" typeface="Latha"/>
+        <a:font script="Syrc" typeface="Estrangelo Edessa"/>
+        <a:font script="Orya" typeface="Kalinga"/>
+        <a:font script="Mlym" typeface="Kartika"/>
+        <a:font script="Laoo" typeface="DokChampa"/>
+        <a:font script="Sinh" typeface="Iskoola Pota"/>
+        <a:font script="Mong" typeface="Mongolian Baiti"/>
+        <a:font script="Viet" typeface="Times New Roman"/>
+        <a:font script="Uigh" typeface="Microsoft Uighur"/>
+        <a:font script="Geor" typeface="Sylfaen"/>
+        <a:font script="Armn" typeface="Arial"/>
+        <a:font script="Bugi" typeface="Leelawadee UI"/>
+        <a:font script="Bopo" typeface="Microsoft JhengHei"/>
+        <a:font script="Java" typeface="Javanese Text"/>
+        <a:font script="Lisu" typeface="Segoe UI"/>
+        <a:font script="Mymr" typeface="Myanmar Text"/>
+        <a:font script="Nkoo" typeface="Ebrima"/>
+        <a:font script="Olck" typeface="Nirmala UI"/>
+        <a:font script="Osma" typeface="Ebrima"/>
+        <a:font script="Phag" typeface="Phagspa"/>
+        <a:font script="Syrn" typeface="Estrangelo Edessa"/>
+        <a:font script="Syrj" typeface="Estrangelo Edessa"/>
+        <a:font script="Syre" typeface="Estrangelo Edessa"/>
+        <a:font script="Sora" typeface="Nirmala UI"/>
+        <a:font script="Tale" typeface="Microsoft Tai Le"/>
+        <a:font script="Talu" typeface="Microsoft New Tai Lue"/>
+        <a:font script="Tfng" typeface="Ebrima"/>
+      </a:majorFont>
+      <a:minorFont>
+        <a:latin typeface="等线" panose="02110004020202020204"/>
+        <a:ea typeface=""/>
+        <a:cs typeface=""/>
+        <a:font script="Jpan" typeface="游ゴシック"/>
+        <a:font script="Hang" typeface="맑은 고딕"/>
+        <a:font script="Hans" typeface="等线"/>
+        <a:font script="Hant" typeface="新細明體"/>
+        <a:font script="Arab" typeface="Arial"/>
+        <a:font script="Hebr" typeface="Arial"/>
+        <a:font script="Thai" typeface="Cordia New"/>
+        <a:font script="Ethi" typeface="Nyala"/>
+        <a:font script="Beng" typeface="Vrinda"/>
+        <a:font script="Gujr" typeface="Shruti"/>
+        <a:font script="Khmr" typeface="DaunPenh"/>
+        <a:font script="Knda" typeface="Tunga"/>
+        <a:font script="Guru" typeface="Raavi"/>
+        <a:font script="Cans" typeface="Euphemia"/>
+        <a:font script="Cher" typeface="Plantagenet Cherokee"/>
+        <a:font script="Yiii" typeface="Microsoft Yi Baiti"/>
+        <a:font script="Tibt" typeface="Microsoft Himalaya"/>
+        <a:font script="Thaa" typeface="MV Boli"/>
+        <a:font script="Deva" typeface="Mangal"/>
+        <a:font script="Telu" typeface="Gautami"/>
+        <a:font script="Taml" typeface="Latha"/>
+        <a:font script="Syrc" typeface="Estrangelo Edessa"/>
+        <a:font script="Orya" typeface="Kalinga"/>
+        <a:font script="Mlym" typeface="Kartika"/>
+        <a:font script="Laoo" typeface="DokChampa"/>
+        <a:font script="Sinh" typeface="Iskoola Pota"/>
+        <a:font script="Mong" typeface="Mongolian Baiti"/>
+        <a:font script="Viet" typeface="Arial"/>
+        <a:font script="Uigh" typeface="Microsoft Uighur"/>
+        <a:font script="Geor" typeface="Sylfaen"/>
+        <a:font script="Armn" typeface="Arial"/>
+        <a:font script="Bugi" typeface="Leelawadee UI"/>
+        <a:font script="Bopo" typeface="Microsoft JhengHei"/>
+        <a:font script="Java" typeface="Javanese Text"/>
+        <a:font script="Lisu" typeface="Segoe UI"/>
+        <a:font script="Mymr" typeface="Myanmar Text"/>
+        <a:font script="Nkoo" typeface="Ebrima"/>
+        <a:font script="Olck" typeface="Nirmala UI"/>
+        <a:font script="Osma" typeface="Ebrima"/>
+        <a:font script="Phag" typeface="Phagspa"/>
+        <a:font script="Syrn" typeface="Estrangelo Edessa"/>
+        <a:font script="Syrj" typeface="Estrangelo Edessa"/>
+        <a:font script="Syre" typeface="Estrangelo Edessa"/>
+        <a:font script="Sora" typeface="Nirmala UI"/>
+        <a:font script="Tale" typeface="Microsoft Tai Le"/>
+        <a:font script="Talu" typeface="Microsoft New Tai Lue"/>
+        <a:font script="Tfng" typeface="Ebrima"/>
+      </a:minorFont>
+    </a:fontScheme>
+    <a:fmtScheme name="Office">
+      <a:fillStyleLst>
+        <a:solidFill>
+          <a:schemeClr val="phClr"/>
+        </a:solidFill>
+        <a:gradFill rotWithShape="1">
+          <a:gsLst>
+            <a:gs pos="0">
+              <a:schemeClr val="phClr">
+                <a:lumMod val="110000"/>
+                <a:satMod val="105000"/>
+                <a:tint val="67000"/>
+              </a:schemeClr>
+            </a:gs>
+            <a:gs pos="50000">
+              <a:schemeClr val="phClr">
+                <a:lumMod val="105000"/>
+                <a:satMod val="103000"/>
+                <a:tint val="73000"/>
+              </a:schemeClr>
+            </a:gs>
+            <a:gs pos="100000">
+              <a:schemeClr val="phClr">
+                <a:lumMod val="105000"/>
+                <a:satMod val="109000"/>
+                <a:tint val="81000"/>
+              </a:schemeClr>
+            </a:gs>
+          </a:gsLst>
+          <a:lin ang="5400000" scaled="0"/>
+        </a:gradFill>
+        <a:gradFill rotWithShape="1">
+          <a:gsLst>
+            <a:gs pos="0">
+              <a:schemeClr val="phClr">
+                <a:satMod val="103000"/>
+                <a:lumMod val="102000"/>
+                <a:tint val="94000"/>
+              </a:schemeClr>
+            </a:gs>
+            <a:gs pos="50000">
+              <a:schemeClr val="phClr">
+                <a:satMod val="110000"/>
+                <a:lumMod val="100000"/>
+                <a:shade val="100000"/>
+              </a:schemeClr>
+            </a:gs>
+            <a:gs pos="100000">
+              <a:schemeClr val="phClr">
+                <a:lumMod val="99000"/>
+                <a:satMod val="120000"/>
+                <a:shade val="78000"/>
+              </a:schemeClr>
+            </a:gs>
+          </a:gsLst>
+          <a:lin ang="5400000" scaled="0"/>
+        </a:gradFill>
+      </a:fillStyleLst>
+      <a:lnStyleLst>
+        <a:ln w="12700" cap="flat" cmpd="sng" algn="ctr">
+          <a:solidFill>
+            <a:schemeClr val="phClr"/>
+          </a:solidFill>
+          <a:prstDash val="solid"/>
+          <a:miter lim="800000"/>
+        </a:ln>
+        <a:ln w="19050" cap="flat" cmpd="sng" algn="ctr">
+          <a:solidFill>
+            <a:schemeClr val="phClr"/>
+          </a:solidFill>
+          <a:prstDash val="solid"/>
+          <a:miter lim="800000"/>
+        </a:ln>
+        <a:ln w="25400" cap="flat" cmpd="sng" algn="ctr">
+          <a:solidFill>
+            <a:schemeClr val="phClr"/>
+          </a:solidFill>
+          <a:prstDash val="solid"/>
+          <a:miter lim="800000"/>
+        </a:ln>
+      </a:lnStyleLst>
+      <a:effectStyleLst>
+        <a:effectStyle>
+          <a:effectLst/>
+        </a:effectStyle>
+        <a:effectStyle>
+          <a:effectLst/>
+        </a:effectStyle>
+        <a:effectStyle>
+          <a:effectLst>
+            <a:outerShdw blurRad="57150" dist="19050" dir="5400000" algn="ctr" rotWithShape="0">
+              <a:srgbClr val="000000">
+                <a:alpha val="63000"/>
+              </a:srgbClr>
+            </a:outerShdw>
+          </a:effectLst>
+        </a:effectStyle>
+      </a:effectStyleLst>
+      <a:bgFillStyleLst>
+        <a:solidFill>
+          <a:schemeClr val="phClr"/>
+        </a:solidFill>
+        <a:solidFill>
+          <a:schemeClr val="phClr">
+            <a:tint val="95000"/>
+            <a:satMod val="170000"/>
+          </a:schemeClr>
+        </a:solidFill>
+        <a:gradFill rotWithShape="1">
+          <a:gsLst>
+            <a:gs pos="0">
+              <a:schemeClr val="phClr">
+                <a:tint val="93000"/>
+                <a:satMod val="150000"/>
+                <a:shade val="98000"/>
+                <a:lumMod val="102000"/>
+              </a:schemeClr>
+            </a:gs>
+            <a:gs pos="50000">
+              <a:schemeClr val="phClr">
+                <a:tint val="98000"/>
+                <a:satMod val="130000"/>
+                <a:shade val="90000"/>
+                <a:lumMod val="103000"/>
+              </a:schemeClr>
+            </a:gs>
+            <a:gs pos="100000">
+              <a:schemeClr val="phClr">
+                <a:shade val="63000"/>
+                <a:satMod val="120000"/>
+              </a:schemeClr>
+            </a:gs>
+          </a:gsLst>
+          <a:lin ang="5400000" scaled="0"/>
+        </a:gradFill>
+      </a:bgFillStyleLst>
+    </a:fmtScheme>
+  </a:themeElements>
+  <a:objectDefaults>
+    <a:lnDef>
+      <a:spPr/>
+      <a:bodyPr/>
+      <a:lstStyle/>
+      <a:style>
+        <a:lnRef idx="2">
+          <a:schemeClr val="accent1"/>
+        </a:lnRef>
+        <a:fillRef idx="0">
+          <a:schemeClr val="accent1"/>
+        </a:fillRef>
+        <a:effectRef idx="1">
+          <a:schemeClr val="accent1"/>
+        </a:effectRef>
+        <a:fontRef idx="minor">
+          <a:schemeClr val="tx1"/>
+        </a:fontRef>
+      </a:style>
+    </a:lnDef>
+  </a:objectDefaults>
+  <a:extraClrSchemeLst/>
+  <a:extLst>
+    <a:ext uri="{05A4C25C-085E-4340-85A3-A5531E510DB2}">
+      <thm15:themeFamily xmlns:thm15="http://schemas.microsoft.com/office/thememl/2012/main" name="Office Theme" id="{2E142A2C-CD16-42D6-873A-C26D2A0506FA}" vid="{1BDDFF52-6CD6-40A5-AB3C-68EB2F1E4D0A}"/>
+    </a:ext>
+  </a:extLst>
+</a:theme>
 </file>